--- a/soft-dev-2-intro.pptx
+++ b/soft-dev-2-intro.pptx
@@ -134,6 +134,22 @@
       </a:defRPr>
     </a:lvl9pPr>
   </p:defaultTextStyle>
+  <p:extLst>
+    <p:ext uri="{EFAFB233-063F-42B5-8137-9DF3F51BA10A}">
+      <p15:sldGuideLst xmlns:p15="http://schemas.microsoft.com/office/powerpoint/2012/main">
+        <p15:guide id="1" orient="horz" pos="2160">
+          <p15:clr>
+            <a:srgbClr val="A4A3A4"/>
+          </p15:clr>
+        </p15:guide>
+        <p15:guide id="2" pos="2880">
+          <p15:clr>
+            <a:srgbClr val="A4A3A4"/>
+          </p15:clr>
+        </p15:guide>
+      </p15:sldGuideLst>
+    </p:ext>
+  </p:extLst>
 </p:presentation>
 </file>
 
@@ -220,7 +236,7 @@
             <a:fld id="{9C7200FD-C438-496B-A78D-3816F97A74F0}" type="datetimeFigureOut">
               <a:rPr lang="el-GR" smtClean="0"/>
               <a:pPr/>
-              <a:t>1/10/2023</a:t>
+              <a:t>1/10/2024</a:t>
             </a:fld>
             <a:endParaRPr lang="en-US"/>
           </a:p>
@@ -294,6 +310,11 @@
         </p:txBody>
       </p:sp>
     </p:spTree>
+    <p:extLst>
+      <p:ext uri="{BB962C8B-B14F-4D97-AF65-F5344CB8AC3E}">
+        <p14:creationId xmlns:p14="http://schemas.microsoft.com/office/powerpoint/2010/main" val="1"/>
+      </p:ext>
+    </p:extLst>
   </p:cSld>
   <p:clrMap bg1="lt1" tx1="dk1" bg2="lt2" tx2="dk2" accent1="accent1" accent2="accent2" accent3="accent3" accent4="accent4" accent5="accent5" accent6="accent6" hlink="hlink" folHlink="folHlink"/>
 </p:handoutMaster>
@@ -382,7 +403,7 @@
             <a:fld id="{2313A616-81EC-4D71-A13E-8040CCC87A8F}" type="datetimeFigureOut">
               <a:rPr lang="el-GR" smtClean="0"/>
               <a:pPr/>
-              <a:t>1/10/2023</a:t>
+              <a:t>1/10/2024</a:t>
             </a:fld>
             <a:endParaRPr lang="el-GR"/>
           </a:p>
@@ -448,35 +469,35 @@
           <a:p>
             <a:pPr lvl="0"/>
             <a:r>
-              <a:rPr lang="en-US" smtClean="0"/>
+              <a:rPr lang="en-US"/>
               <a:t>Click to edit Master text styles</a:t>
             </a:r>
           </a:p>
           <a:p>
             <a:pPr lvl="1"/>
             <a:r>
-              <a:rPr lang="en-US" smtClean="0"/>
+              <a:rPr lang="en-US"/>
               <a:t>Second level</a:t>
             </a:r>
           </a:p>
           <a:p>
             <a:pPr lvl="2"/>
             <a:r>
-              <a:rPr lang="en-US" smtClean="0"/>
+              <a:rPr lang="en-US"/>
               <a:t>Third level</a:t>
             </a:r>
           </a:p>
           <a:p>
             <a:pPr lvl="3"/>
             <a:r>
-              <a:rPr lang="en-US" smtClean="0"/>
+              <a:rPr lang="en-US"/>
               <a:t>Fourth level</a:t>
             </a:r>
           </a:p>
           <a:p>
             <a:pPr lvl="4"/>
             <a:r>
-              <a:rPr lang="en-US" smtClean="0"/>
+              <a:rPr lang="en-US"/>
               <a:t>Fifth level</a:t>
             </a:r>
             <a:endParaRPr lang="el-GR"/>
@@ -695,28 +716,28 @@
           <a:lstStyle/>
           <a:p>
             <a:r>
-              <a:rPr lang="el-GR" dirty="0" smtClean="0"/>
+              <a:rPr lang="el-GR" dirty="0"/>
               <a:t>σκοπός να μάθουμε</a:t>
             </a:r>
             <a:r>
-              <a:rPr lang="el-GR" baseline="0" dirty="0" smtClean="0"/>
+              <a:rPr lang="el-GR" baseline="0" dirty="0"/>
               <a:t> να αναπτύσσουμε γράφουμε καθαρό κώδικα – βασική προϋπόθεση για να έχουμε λογισμικό καλής ποιότητας, δηλαδή, …</a:t>
             </a:r>
           </a:p>
           <a:p>
-            <a:endParaRPr lang="el-GR" baseline="0" dirty="0" smtClean="0"/>
-          </a:p>
-          <a:p>
-            <a:r>
-              <a:rPr lang="el-GR" baseline="0" dirty="0" smtClean="0"/>
+            <a:endParaRPr lang="el-GR" baseline="0" dirty="0"/>
+          </a:p>
+          <a:p>
+            <a:r>
+              <a:rPr lang="el-GR" baseline="0" dirty="0"/>
               <a:t>γενικά είναι κάτι που είναι δύσκολο, γιατί δουλεύουμε </a:t>
             </a:r>
             <a:r>
-              <a:rPr lang="el-GR" baseline="0" dirty="0" err="1" smtClean="0"/>
+              <a:rPr lang="el-GR" baseline="0" dirty="0" err="1"/>
               <a:t>υπο</a:t>
             </a:r>
             <a:r>
-              <a:rPr lang="el-GR" baseline="0" dirty="0" smtClean="0"/>
+              <a:rPr lang="el-GR" baseline="0" dirty="0"/>
               <a:t> πίεση, αλλά πρέπει να μάθουμε μα το κάνουμε γιατί σε πραγματικές συνθήκες εργασίας είναι πολύ σημαντικό !  </a:t>
             </a:r>
             <a:endParaRPr lang="el-GR" dirty="0"/>
@@ -802,20 +823,20 @@
           <a:lstStyle/>
           <a:p>
             <a:r>
-              <a:rPr lang="el-GR" dirty="0" smtClean="0"/>
+              <a:rPr lang="el-GR" dirty="0"/>
               <a:t>εδώ</a:t>
             </a:r>
             <a:r>
-              <a:rPr lang="el-GR" baseline="0" dirty="0" smtClean="0"/>
+              <a:rPr lang="el-GR" baseline="0" dirty="0"/>
               <a:t> βλέπουμε ακριβώς γιατί είναι σημαντικό</a:t>
             </a:r>
           </a:p>
           <a:p>
-            <a:endParaRPr lang="el-GR" baseline="0" dirty="0" smtClean="0"/>
-          </a:p>
-          <a:p>
-            <a:r>
-              <a:rPr lang="el-GR" baseline="0" dirty="0" smtClean="0"/>
+            <a:endParaRPr lang="el-GR" baseline="0" dirty="0"/>
+          </a:p>
+          <a:p>
+            <a:r>
+              <a:rPr lang="el-GR" baseline="0" dirty="0"/>
               <a:t>το διάγραμμα δείχνει το πώς μεταβάλλεται η παραγωγικότητα μιας ομάδας που αναπτύσσει ένα κακοφτιαγμένο λογισμικό </a:t>
             </a:r>
             <a:endParaRPr lang="el-GR" dirty="0"/>
@@ -901,41 +922,41 @@
           <a:lstStyle/>
           <a:p>
             <a:r>
-              <a:rPr lang="el-GR" dirty="0" smtClean="0"/>
+              <a:rPr lang="el-GR" dirty="0"/>
               <a:t>ένα σύνηθες σενάριο είναι οι </a:t>
             </a:r>
             <a:r>
-              <a:rPr lang="en-US" dirty="0" smtClean="0"/>
+              <a:rPr lang="en-US" dirty="0"/>
               <a:t>developers </a:t>
             </a:r>
             <a:r>
-              <a:rPr lang="el-GR" dirty="0" smtClean="0"/>
+              <a:rPr lang="el-GR" dirty="0"/>
               <a:t>να ζητήσουν από τους διαχειριστές</a:t>
             </a:r>
             <a:r>
-              <a:rPr lang="el-GR" baseline="0" dirty="0" smtClean="0"/>
+              <a:rPr lang="el-GR" baseline="0" dirty="0"/>
               <a:t> την συνολική ανακατασκευή του λογισμικού. </a:t>
             </a:r>
           </a:p>
           <a:p>
-            <a:endParaRPr lang="el-GR" baseline="0" dirty="0" smtClean="0"/>
-          </a:p>
-          <a:p>
-            <a:r>
-              <a:rPr lang="el-GR" baseline="0" dirty="0" smtClean="0"/>
+            <a:endParaRPr lang="el-GR" baseline="0" dirty="0"/>
+          </a:p>
+          <a:p>
+            <a:r>
+              <a:rPr lang="el-GR" baseline="0" dirty="0"/>
               <a:t>συνήθως οι διαχειριστές το δέχονται κατόπιν πίεσης και με βάση την ελάχιστη παραγωγικότητα </a:t>
             </a:r>
           </a:p>
           <a:p>
-            <a:endParaRPr lang="el-GR" baseline="0" dirty="0" smtClean="0"/>
-          </a:p>
-          <a:p>
-            <a:r>
-              <a:rPr lang="el-GR" baseline="0" dirty="0" smtClean="0"/>
+            <a:endParaRPr lang="el-GR" baseline="0" dirty="0"/>
+          </a:p>
+          <a:p>
+            <a:r>
+              <a:rPr lang="el-GR" baseline="0" dirty="0"/>
               <a:t>οπότε οργανώνουν μια ομάδα με στόχο την </a:t>
             </a:r>
             <a:r>
-              <a:rPr lang="el-GR" baseline="0" dirty="0" err="1" smtClean="0"/>
+              <a:rPr lang="el-GR" baseline="0" dirty="0" err="1"/>
               <a:t>ανακατσκευή</a:t>
             </a:r>
             <a:endParaRPr lang="el-GR" dirty="0"/>
@@ -1021,11 +1042,11 @@
           <a:lstStyle/>
           <a:p>
             <a:r>
-              <a:rPr lang="el-GR" dirty="0" smtClean="0"/>
+              <a:rPr lang="el-GR" dirty="0"/>
               <a:t>το να κρατάμε τον</a:t>
             </a:r>
             <a:r>
-              <a:rPr lang="el-GR" baseline="0" dirty="0" smtClean="0"/>
+              <a:rPr lang="el-GR" baseline="0" dirty="0"/>
               <a:t> κώδικά μας καθαρό είναι ο μόνος τρόπος να αποφύγουμε τέτοιες καταστάσεις …</a:t>
             </a:r>
             <a:endParaRPr lang="el-GR" dirty="0"/>
@@ -1111,20 +1132,20 @@
           <a:lstStyle/>
           <a:p>
             <a:r>
-              <a:rPr lang="el-GR" dirty="0" smtClean="0"/>
+              <a:rPr lang="el-GR" dirty="0"/>
               <a:t>γιατί</a:t>
             </a:r>
             <a:r>
-              <a:rPr lang="el-GR" baseline="0" dirty="0" smtClean="0"/>
+              <a:rPr lang="el-GR" baseline="0" dirty="0"/>
               <a:t> ο κώδικας που φτιάχνουμε είναι κακός ?</a:t>
             </a:r>
           </a:p>
           <a:p>
-            <a:endParaRPr lang="el-GR" baseline="0" dirty="0" smtClean="0"/>
-          </a:p>
-          <a:p>
-            <a:r>
-              <a:rPr lang="el-GR" baseline="0" dirty="0" smtClean="0"/>
+            <a:endParaRPr lang="el-GR" baseline="0" dirty="0"/>
+          </a:p>
+          <a:p>
+            <a:r>
+              <a:rPr lang="el-GR" baseline="0" dirty="0"/>
               <a:t>όλοι ξέρουμε ότι αυτό μπορεί να έχει πολύ δυσάρεστες συνέπειες …</a:t>
             </a:r>
             <a:endParaRPr lang="el-GR" dirty="0"/>
@@ -1210,43 +1231,43 @@
           <a:lstStyle/>
           <a:p>
             <a:r>
-              <a:rPr lang="el-GR" dirty="0" smtClean="0"/>
+              <a:rPr lang="el-GR" dirty="0"/>
               <a:t>απλός και άμεσος </a:t>
             </a:r>
           </a:p>
           <a:p>
-            <a:endParaRPr lang="el-GR" dirty="0" smtClean="0"/>
-          </a:p>
-          <a:p>
-            <a:endParaRPr lang="el-GR" dirty="0" smtClean="0"/>
-          </a:p>
-          <a:p>
-            <a:r>
-              <a:rPr lang="el-GR" dirty="0" smtClean="0"/>
+            <a:endParaRPr lang="el-GR" dirty="0"/>
+          </a:p>
+          <a:p>
+            <a:endParaRPr lang="el-GR" dirty="0"/>
+          </a:p>
+          <a:p>
+            <a:r>
+              <a:rPr lang="el-GR" dirty="0"/>
               <a:t>(</a:t>
             </a:r>
             <a:r>
-              <a:rPr lang="en-US" dirty="0" err="1" smtClean="0"/>
+              <a:rPr lang="en-US" dirty="0" err="1"/>
               <a:t>booch</a:t>
             </a:r>
             <a:r>
-              <a:rPr lang="en-US" baseline="0" dirty="0" smtClean="0"/>
+              <a:rPr lang="en-US" baseline="0" dirty="0"/>
               <a:t>, </a:t>
             </a:r>
             <a:r>
-              <a:rPr lang="en-US" baseline="0" dirty="0" err="1" smtClean="0"/>
+              <a:rPr lang="en-US" baseline="0" dirty="0" err="1"/>
               <a:t>rumbaugh</a:t>
             </a:r>
             <a:r>
-              <a:rPr lang="en-US" baseline="0" dirty="0" smtClean="0"/>
+              <a:rPr lang="en-US" baseline="0" dirty="0"/>
               <a:t>, </a:t>
             </a:r>
             <a:r>
-              <a:rPr lang="en-US" baseline="0" dirty="0" err="1" smtClean="0"/>
+              <a:rPr lang="en-US" baseline="0" dirty="0" err="1"/>
               <a:t>jacobson</a:t>
             </a:r>
             <a:r>
-              <a:rPr lang="en-US" baseline="0" dirty="0" smtClean="0"/>
+              <a:rPr lang="en-US" baseline="0" dirty="0"/>
               <a:t>)</a:t>
             </a:r>
             <a:endParaRPr lang="el-GR" dirty="0"/>
@@ -1332,10 +1353,9 @@
           <a:lstStyle/>
           <a:p>
             <a:r>
-              <a:rPr lang="el-GR" dirty="0" smtClean="0"/>
+              <a:rPr lang="el-GR" dirty="0"/>
               <a:t>αποδοτικός και κομψός</a:t>
             </a:r>
-            <a:endParaRPr lang="el-GR" dirty="0"/>
           </a:p>
         </p:txBody>
       </p:sp>
@@ -1417,10 +1437,9 @@
           </a:lstStyle>
           <a:p>
             <a:r>
-              <a:rPr kumimoji="0" lang="en-US" smtClean="0"/>
+              <a:rPr kumimoji="0" lang="en-US"/>
               <a:t>Click to edit Master title style</a:t>
             </a:r>
-            <a:endParaRPr kumimoji="0" lang="en-US"/>
           </a:p>
         </p:txBody>
       </p:sp>
@@ -1481,10 +1500,9 @@
           </a:lstStyle>
           <a:p>
             <a:r>
-              <a:rPr kumimoji="0" lang="en-US" smtClean="0"/>
+              <a:rPr kumimoji="0" lang="en-US"/>
               <a:t>Click to edit Master subtitle style</a:t>
             </a:r>
-            <a:endParaRPr kumimoji="0" lang="en-US"/>
           </a:p>
         </p:txBody>
       </p:sp>
@@ -1515,7 +1533,7 @@
             <a:fld id="{1D8BD707-D9CF-40AE-B4C6-C98DA3205C09}" type="datetimeFigureOut">
               <a:rPr lang="en-US" smtClean="0"/>
               <a:pPr/>
-              <a:t>10/1/2023</a:t>
+              <a:t>10/1/2024</a:t>
             </a:fld>
             <a:endParaRPr lang="en-US"/>
           </a:p>
@@ -1799,10 +1817,9 @@
           <a:lstStyle/>
           <a:p>
             <a:r>
-              <a:rPr kumimoji="0" lang="en-US" smtClean="0"/>
+              <a:rPr kumimoji="0" lang="en-US"/>
               <a:t>Click to edit Master title style</a:t>
             </a:r>
-            <a:endParaRPr kumimoji="0" lang="en-US"/>
           </a:p>
         </p:txBody>
       </p:sp>
@@ -1823,35 +1840,35 @@
           <a:p>
             <a:pPr lvl="0" eaLnBrk="1" latinLnBrk="0" hangingPunct="1"/>
             <a:r>
-              <a:rPr lang="en-US" smtClean="0"/>
+              <a:rPr lang="en-US"/>
               <a:t>Click to edit Master text styles</a:t>
             </a:r>
           </a:p>
           <a:p>
             <a:pPr lvl="1" eaLnBrk="1" latinLnBrk="0" hangingPunct="1"/>
             <a:r>
-              <a:rPr lang="en-US" smtClean="0"/>
+              <a:rPr lang="en-US"/>
               <a:t>Second level</a:t>
             </a:r>
           </a:p>
           <a:p>
             <a:pPr lvl="2" eaLnBrk="1" latinLnBrk="0" hangingPunct="1"/>
             <a:r>
-              <a:rPr lang="en-US" smtClean="0"/>
+              <a:rPr lang="en-US"/>
               <a:t>Third level</a:t>
             </a:r>
           </a:p>
           <a:p>
             <a:pPr lvl="3" eaLnBrk="1" latinLnBrk="0" hangingPunct="1"/>
             <a:r>
-              <a:rPr lang="en-US" smtClean="0"/>
+              <a:rPr lang="en-US"/>
               <a:t>Fourth level</a:t>
             </a:r>
           </a:p>
           <a:p>
             <a:pPr lvl="4" eaLnBrk="1" latinLnBrk="0" hangingPunct="1"/>
             <a:r>
-              <a:rPr lang="en-US" smtClean="0"/>
+              <a:rPr lang="en-US"/>
               <a:t>Fifth level</a:t>
             </a:r>
             <a:endParaRPr kumimoji="0" lang="en-US"/>
@@ -1876,7 +1893,7 @@
             <a:fld id="{1D8BD707-D9CF-40AE-B4C6-C98DA3205C09}" type="datetimeFigureOut">
               <a:rPr lang="en-US" smtClean="0"/>
               <a:pPr/>
-              <a:t>10/1/2023</a:t>
+              <a:t>10/1/2024</a:t>
             </a:fld>
             <a:endParaRPr lang="en-US"/>
           </a:p>
@@ -1971,10 +1988,9 @@
           <a:lstStyle/>
           <a:p>
             <a:r>
-              <a:rPr kumimoji="0" lang="en-US" smtClean="0"/>
+              <a:rPr kumimoji="0" lang="en-US"/>
               <a:t>Click to edit Master title style</a:t>
             </a:r>
-            <a:endParaRPr kumimoji="0" lang="en-US"/>
           </a:p>
         </p:txBody>
       </p:sp>
@@ -2000,35 +2016,35 @@
           <a:p>
             <a:pPr lvl="0" eaLnBrk="1" latinLnBrk="0" hangingPunct="1"/>
             <a:r>
-              <a:rPr lang="en-US" smtClean="0"/>
+              <a:rPr lang="en-US"/>
               <a:t>Click to edit Master text styles</a:t>
             </a:r>
           </a:p>
           <a:p>
             <a:pPr lvl="1" eaLnBrk="1" latinLnBrk="0" hangingPunct="1"/>
             <a:r>
-              <a:rPr lang="en-US" smtClean="0"/>
+              <a:rPr lang="en-US"/>
               <a:t>Second level</a:t>
             </a:r>
           </a:p>
           <a:p>
             <a:pPr lvl="2" eaLnBrk="1" latinLnBrk="0" hangingPunct="1"/>
             <a:r>
-              <a:rPr lang="en-US" smtClean="0"/>
+              <a:rPr lang="en-US"/>
               <a:t>Third level</a:t>
             </a:r>
           </a:p>
           <a:p>
             <a:pPr lvl="3" eaLnBrk="1" latinLnBrk="0" hangingPunct="1"/>
             <a:r>
-              <a:rPr lang="en-US" smtClean="0"/>
+              <a:rPr lang="en-US"/>
               <a:t>Fourth level</a:t>
             </a:r>
           </a:p>
           <a:p>
             <a:pPr lvl="4" eaLnBrk="1" latinLnBrk="0" hangingPunct="1"/>
             <a:r>
-              <a:rPr lang="en-US" smtClean="0"/>
+              <a:rPr lang="en-US"/>
               <a:t>Fifth level</a:t>
             </a:r>
             <a:endParaRPr kumimoji="0" lang="en-US"/>
@@ -2053,7 +2069,7 @@
             <a:fld id="{1D8BD707-D9CF-40AE-B4C6-C98DA3205C09}" type="datetimeFigureOut">
               <a:rPr lang="en-US" smtClean="0"/>
               <a:pPr/>
-              <a:t>10/1/2023</a:t>
+              <a:t>10/1/2024</a:t>
             </a:fld>
             <a:endParaRPr lang="en-US"/>
           </a:p>
@@ -2265,10 +2281,9 @@
           <a:lstStyle/>
           <a:p>
             <a:r>
-              <a:rPr kumimoji="0" lang="en-US" smtClean="0"/>
+              <a:rPr kumimoji="0" lang="en-US"/>
               <a:t>Click to edit Master title style</a:t>
             </a:r>
-            <a:endParaRPr kumimoji="0" lang="en-US"/>
           </a:p>
         </p:txBody>
       </p:sp>
@@ -2290,7 +2305,7 @@
             <a:fld id="{1D8BD707-D9CF-40AE-B4C6-C98DA3205C09}" type="datetimeFigureOut">
               <a:rPr lang="en-US" smtClean="0"/>
               <a:pPr/>
-              <a:t>10/1/2023</a:t>
+              <a:t>10/1/2024</a:t>
             </a:fld>
             <a:endParaRPr lang="en-US"/>
           </a:p>
@@ -2361,35 +2376,35 @@
           <a:p>
             <a:pPr lvl="0" eaLnBrk="1" latinLnBrk="0" hangingPunct="1"/>
             <a:r>
-              <a:rPr lang="en-US" smtClean="0"/>
+              <a:rPr lang="en-US"/>
               <a:t>Click to edit Master text styles</a:t>
             </a:r>
           </a:p>
           <a:p>
             <a:pPr lvl="1" eaLnBrk="1" latinLnBrk="0" hangingPunct="1"/>
             <a:r>
-              <a:rPr lang="en-US" smtClean="0"/>
+              <a:rPr lang="en-US"/>
               <a:t>Second level</a:t>
             </a:r>
           </a:p>
           <a:p>
             <a:pPr lvl="2" eaLnBrk="1" latinLnBrk="0" hangingPunct="1"/>
             <a:r>
-              <a:rPr lang="en-US" smtClean="0"/>
+              <a:rPr lang="en-US"/>
               <a:t>Third level</a:t>
             </a:r>
           </a:p>
           <a:p>
             <a:pPr lvl="3" eaLnBrk="1" latinLnBrk="0" hangingPunct="1"/>
             <a:r>
-              <a:rPr lang="en-US" smtClean="0"/>
+              <a:rPr lang="en-US"/>
               <a:t>Fourth level</a:t>
             </a:r>
           </a:p>
           <a:p>
             <a:pPr lvl="4" eaLnBrk="1" latinLnBrk="0" hangingPunct="1"/>
             <a:r>
-              <a:rPr lang="en-US" smtClean="0"/>
+              <a:rPr lang="en-US"/>
               <a:t>Fifth level</a:t>
             </a:r>
             <a:endParaRPr kumimoji="0" lang="en-US"/>
@@ -2452,10 +2467,9 @@
           </a:lstStyle>
           <a:p>
             <a:r>
-              <a:rPr kumimoji="0" lang="en-US" smtClean="0"/>
+              <a:rPr kumimoji="0" lang="en-US"/>
               <a:t>Click to edit Master title style</a:t>
             </a:r>
-            <a:endParaRPr kumimoji="0" lang="en-US"/>
           </a:p>
         </p:txBody>
       </p:sp>
@@ -2532,7 +2546,7 @@
           <a:p>
             <a:pPr lvl="0" eaLnBrk="1" latinLnBrk="0" hangingPunct="1"/>
             <a:r>
-              <a:rPr kumimoji="0" lang="en-US" smtClean="0"/>
+              <a:rPr kumimoji="0" lang="en-US"/>
               <a:t>Click to edit Master text styles</a:t>
             </a:r>
           </a:p>
@@ -2561,7 +2575,7 @@
             <a:fld id="{1D8BD707-D9CF-40AE-B4C6-C98DA3205C09}" type="datetimeFigureOut">
               <a:rPr lang="en-US" smtClean="0"/>
               <a:pPr/>
-              <a:t>10/1/2023</a:t>
+              <a:t>10/1/2024</a:t>
             </a:fld>
             <a:endParaRPr lang="en-US"/>
           </a:p>
@@ -2758,10 +2772,9 @@
           <a:lstStyle/>
           <a:p>
             <a:r>
-              <a:rPr kumimoji="0" lang="en-US" smtClean="0"/>
+              <a:rPr kumimoji="0" lang="en-US"/>
               <a:t>Click to edit Master title style</a:t>
             </a:r>
-            <a:endParaRPr kumimoji="0" lang="en-US"/>
           </a:p>
         </p:txBody>
       </p:sp>
@@ -2783,7 +2796,7 @@
             <a:fld id="{1D8BD707-D9CF-40AE-B4C6-C98DA3205C09}" type="datetimeFigureOut">
               <a:rPr lang="en-US" smtClean="0"/>
               <a:pPr/>
-              <a:t>10/1/2023</a:t>
+              <a:t>10/1/2024</a:t>
             </a:fld>
             <a:endParaRPr lang="en-US"/>
           </a:p>
@@ -2854,35 +2867,35 @@
           <a:p>
             <a:pPr lvl="0" eaLnBrk="1" latinLnBrk="0" hangingPunct="1"/>
             <a:r>
-              <a:rPr lang="en-US" smtClean="0"/>
+              <a:rPr lang="en-US"/>
               <a:t>Click to edit Master text styles</a:t>
             </a:r>
           </a:p>
           <a:p>
             <a:pPr lvl="1" eaLnBrk="1" latinLnBrk="0" hangingPunct="1"/>
             <a:r>
-              <a:rPr lang="en-US" smtClean="0"/>
+              <a:rPr lang="en-US"/>
               <a:t>Second level</a:t>
             </a:r>
           </a:p>
           <a:p>
             <a:pPr lvl="2" eaLnBrk="1" latinLnBrk="0" hangingPunct="1"/>
             <a:r>
-              <a:rPr lang="en-US" smtClean="0"/>
+              <a:rPr lang="en-US"/>
               <a:t>Third level</a:t>
             </a:r>
           </a:p>
           <a:p>
             <a:pPr lvl="3" eaLnBrk="1" latinLnBrk="0" hangingPunct="1"/>
             <a:r>
-              <a:rPr lang="en-US" smtClean="0"/>
+              <a:rPr lang="en-US"/>
               <a:t>Fourth level</a:t>
             </a:r>
           </a:p>
           <a:p>
             <a:pPr lvl="4" eaLnBrk="1" latinLnBrk="0" hangingPunct="1"/>
             <a:r>
-              <a:rPr lang="en-US" smtClean="0"/>
+              <a:rPr lang="en-US"/>
               <a:t>Fifth level</a:t>
             </a:r>
             <a:endParaRPr kumimoji="0" lang="en-US"/>
@@ -2911,35 +2924,35 @@
           <a:p>
             <a:pPr lvl="0" eaLnBrk="1" latinLnBrk="0" hangingPunct="1"/>
             <a:r>
-              <a:rPr lang="en-US" smtClean="0"/>
+              <a:rPr lang="en-US"/>
               <a:t>Click to edit Master text styles</a:t>
             </a:r>
           </a:p>
           <a:p>
             <a:pPr lvl="1" eaLnBrk="1" latinLnBrk="0" hangingPunct="1"/>
             <a:r>
-              <a:rPr lang="en-US" smtClean="0"/>
+              <a:rPr lang="en-US"/>
               <a:t>Second level</a:t>
             </a:r>
           </a:p>
           <a:p>
             <a:pPr lvl="2" eaLnBrk="1" latinLnBrk="0" hangingPunct="1"/>
             <a:r>
-              <a:rPr lang="en-US" smtClean="0"/>
+              <a:rPr lang="en-US"/>
               <a:t>Third level</a:t>
             </a:r>
           </a:p>
           <a:p>
             <a:pPr lvl="3" eaLnBrk="1" latinLnBrk="0" hangingPunct="1"/>
             <a:r>
-              <a:rPr lang="en-US" smtClean="0"/>
+              <a:rPr lang="en-US"/>
               <a:t>Fourth level</a:t>
             </a:r>
           </a:p>
           <a:p>
             <a:pPr lvl="4" eaLnBrk="1" latinLnBrk="0" hangingPunct="1"/>
             <a:r>
-              <a:rPr lang="en-US" smtClean="0"/>
+              <a:rPr lang="en-US"/>
               <a:t>Fifth level</a:t>
             </a:r>
             <a:endParaRPr kumimoji="0" lang="en-US"/>
@@ -2996,10 +3009,9 @@
           </a:lstStyle>
           <a:p>
             <a:r>
-              <a:rPr kumimoji="0" lang="en-US" smtClean="0"/>
+              <a:rPr kumimoji="0" lang="en-US"/>
               <a:t>Click to edit Master title style</a:t>
             </a:r>
-            <a:endParaRPr kumimoji="0" lang="en-US"/>
           </a:p>
         </p:txBody>
       </p:sp>
@@ -3056,7 +3068,7 @@
           <a:p>
             <a:pPr lvl="0" eaLnBrk="1" latinLnBrk="0" hangingPunct="1"/>
             <a:r>
-              <a:rPr kumimoji="0" lang="en-US" smtClean="0"/>
+              <a:rPr kumimoji="0" lang="en-US"/>
               <a:t>Click to edit Master text styles</a:t>
             </a:r>
           </a:p>
@@ -3113,7 +3125,7 @@
           <a:p>
             <a:pPr lvl="0" eaLnBrk="1" latinLnBrk="0" hangingPunct="1"/>
             <a:r>
-              <a:rPr kumimoji="0" lang="en-US" smtClean="0"/>
+              <a:rPr kumimoji="0" lang="en-US"/>
               <a:t>Click to edit Master text styles</a:t>
             </a:r>
           </a:p>
@@ -3137,7 +3149,7 @@
             <a:fld id="{1D8BD707-D9CF-40AE-B4C6-C98DA3205C09}" type="datetimeFigureOut">
               <a:rPr lang="en-US" smtClean="0"/>
               <a:pPr/>
-              <a:t>10/1/2023</a:t>
+              <a:t>10/1/2024</a:t>
             </a:fld>
             <a:endParaRPr lang="en-US"/>
           </a:p>
@@ -3208,35 +3220,35 @@
           <a:p>
             <a:pPr lvl="0" eaLnBrk="1" latinLnBrk="0" hangingPunct="1"/>
             <a:r>
-              <a:rPr lang="en-US" smtClean="0"/>
+              <a:rPr lang="en-US"/>
               <a:t>Click to edit Master text styles</a:t>
             </a:r>
           </a:p>
           <a:p>
             <a:pPr lvl="1" eaLnBrk="1" latinLnBrk="0" hangingPunct="1"/>
             <a:r>
-              <a:rPr lang="en-US" smtClean="0"/>
+              <a:rPr lang="en-US"/>
               <a:t>Second level</a:t>
             </a:r>
           </a:p>
           <a:p>
             <a:pPr lvl="2" eaLnBrk="1" latinLnBrk="0" hangingPunct="1"/>
             <a:r>
-              <a:rPr lang="en-US" smtClean="0"/>
+              <a:rPr lang="en-US"/>
               <a:t>Third level</a:t>
             </a:r>
           </a:p>
           <a:p>
             <a:pPr lvl="3" eaLnBrk="1" latinLnBrk="0" hangingPunct="1"/>
             <a:r>
-              <a:rPr lang="en-US" smtClean="0"/>
+              <a:rPr lang="en-US"/>
               <a:t>Fourth level</a:t>
             </a:r>
           </a:p>
           <a:p>
             <a:pPr lvl="4" eaLnBrk="1" latinLnBrk="0" hangingPunct="1"/>
             <a:r>
-              <a:rPr lang="en-US" smtClean="0"/>
+              <a:rPr lang="en-US"/>
               <a:t>Fifth level</a:t>
             </a:r>
             <a:endParaRPr kumimoji="0" lang="en-US"/>
@@ -3265,35 +3277,35 @@
           <a:p>
             <a:pPr lvl="0" eaLnBrk="1" latinLnBrk="0" hangingPunct="1"/>
             <a:r>
-              <a:rPr lang="en-US" smtClean="0"/>
+              <a:rPr lang="en-US"/>
               <a:t>Click to edit Master text styles</a:t>
             </a:r>
           </a:p>
           <a:p>
             <a:pPr lvl="1" eaLnBrk="1" latinLnBrk="0" hangingPunct="1"/>
             <a:r>
-              <a:rPr lang="en-US" smtClean="0"/>
+              <a:rPr lang="en-US"/>
               <a:t>Second level</a:t>
             </a:r>
           </a:p>
           <a:p>
             <a:pPr lvl="2" eaLnBrk="1" latinLnBrk="0" hangingPunct="1"/>
             <a:r>
-              <a:rPr lang="en-US" smtClean="0"/>
+              <a:rPr lang="en-US"/>
               <a:t>Third level</a:t>
             </a:r>
           </a:p>
           <a:p>
             <a:pPr lvl="3" eaLnBrk="1" latinLnBrk="0" hangingPunct="1"/>
             <a:r>
-              <a:rPr lang="en-US" smtClean="0"/>
+              <a:rPr lang="en-US"/>
               <a:t>Fourth level</a:t>
             </a:r>
           </a:p>
           <a:p>
             <a:pPr lvl="4" eaLnBrk="1" latinLnBrk="0" hangingPunct="1"/>
             <a:r>
-              <a:rPr lang="en-US" smtClean="0"/>
+              <a:rPr lang="en-US"/>
               <a:t>Fifth level</a:t>
             </a:r>
             <a:endParaRPr kumimoji="0" lang="en-US"/>
@@ -3346,10 +3358,9 @@
           <a:lstStyle/>
           <a:p>
             <a:r>
-              <a:rPr kumimoji="0" lang="en-US" smtClean="0"/>
+              <a:rPr kumimoji="0" lang="en-US"/>
               <a:t>Click to edit Master title style</a:t>
             </a:r>
-            <a:endParaRPr kumimoji="0" lang="en-US"/>
           </a:p>
         </p:txBody>
       </p:sp>
@@ -3371,7 +3382,7 @@
             <a:fld id="{1D8BD707-D9CF-40AE-B4C6-C98DA3205C09}" type="datetimeFigureOut">
               <a:rPr lang="en-US" smtClean="0"/>
               <a:pPr/>
-              <a:t>10/1/2023</a:t>
+              <a:t>10/1/2024</a:t>
             </a:fld>
             <a:endParaRPr lang="en-US"/>
           </a:p>
@@ -3513,7 +3524,7 @@
             <a:fld id="{1D8BD707-D9CF-40AE-B4C6-C98DA3205C09}" type="datetimeFigureOut">
               <a:rPr lang="en-US" smtClean="0"/>
               <a:pPr/>
-              <a:t>10/1/2023</a:t>
+              <a:t>10/1/2024</a:t>
             </a:fld>
             <a:endParaRPr lang="en-US"/>
           </a:p>
@@ -3708,10 +3719,9 @@
           </a:lstStyle>
           <a:p>
             <a:r>
-              <a:rPr kumimoji="0" lang="en-US" smtClean="0"/>
+              <a:rPr kumimoji="0" lang="en-US"/>
               <a:t>Click to edit Master title style</a:t>
             </a:r>
-            <a:endParaRPr kumimoji="0" lang="en-US"/>
           </a:p>
         </p:txBody>
       </p:sp>
@@ -3768,7 +3778,7 @@
           <a:p>
             <a:pPr lvl="0" eaLnBrk="1" latinLnBrk="0" hangingPunct="1"/>
             <a:r>
-              <a:rPr kumimoji="0" lang="en-US" smtClean="0"/>
+              <a:rPr kumimoji="0" lang="en-US"/>
               <a:t>Click to edit Master text styles</a:t>
             </a:r>
           </a:p>
@@ -3792,7 +3802,7 @@
             <a:fld id="{1D8BD707-D9CF-40AE-B4C6-C98DA3205C09}" type="datetimeFigureOut">
               <a:rPr lang="en-US" smtClean="0"/>
               <a:pPr/>
-              <a:t>10/1/2023</a:t>
+              <a:t>10/1/2024</a:t>
             </a:fld>
             <a:endParaRPr lang="en-US"/>
           </a:p>
@@ -3985,35 +3995,35 @@
           <a:p>
             <a:pPr lvl="0" eaLnBrk="1" latinLnBrk="0" hangingPunct="1"/>
             <a:r>
-              <a:rPr lang="en-US" smtClean="0"/>
+              <a:rPr lang="en-US"/>
               <a:t>Click to edit Master text styles</a:t>
             </a:r>
           </a:p>
           <a:p>
             <a:pPr lvl="1" eaLnBrk="1" latinLnBrk="0" hangingPunct="1"/>
             <a:r>
-              <a:rPr lang="en-US" smtClean="0"/>
+              <a:rPr lang="en-US"/>
               <a:t>Second level</a:t>
             </a:r>
           </a:p>
           <a:p>
             <a:pPr lvl="2" eaLnBrk="1" latinLnBrk="0" hangingPunct="1"/>
             <a:r>
-              <a:rPr lang="en-US" smtClean="0"/>
+              <a:rPr lang="en-US"/>
               <a:t>Third level</a:t>
             </a:r>
           </a:p>
           <a:p>
             <a:pPr lvl="3" eaLnBrk="1" latinLnBrk="0" hangingPunct="1"/>
             <a:r>
-              <a:rPr lang="en-US" smtClean="0"/>
+              <a:rPr lang="en-US"/>
               <a:t>Fourth level</a:t>
             </a:r>
           </a:p>
           <a:p>
             <a:pPr lvl="4" eaLnBrk="1" latinLnBrk="0" hangingPunct="1"/>
             <a:r>
-              <a:rPr lang="en-US" smtClean="0"/>
+              <a:rPr lang="en-US"/>
               <a:t>Fifth level</a:t>
             </a:r>
             <a:endParaRPr kumimoji="0" lang="en-US"/>
@@ -4085,10 +4095,9 @@
           </a:lstStyle>
           <a:p>
             <a:r>
-              <a:rPr kumimoji="0" lang="en-US" smtClean="0"/>
+              <a:rPr kumimoji="0" lang="en-US"/>
               <a:t>Click to edit Master title style</a:t>
             </a:r>
-            <a:endParaRPr kumimoji="0" lang="en-US"/>
           </a:p>
         </p:txBody>
       </p:sp>
@@ -4130,7 +4139,7 @@
           </a:lstStyle>
           <a:p>
             <a:r>
-              <a:rPr kumimoji="0" lang="en-US" smtClean="0"/>
+              <a:rPr kumimoji="0" lang="en-US"/>
               <a:t>Click icon to add picture</a:t>
             </a:r>
             <a:endParaRPr kumimoji="0" lang="en-US" dirty="0"/>
@@ -4177,7 +4186,7 @@
           <a:p>
             <a:pPr lvl="0" eaLnBrk="1" latinLnBrk="0" hangingPunct="1"/>
             <a:r>
-              <a:rPr kumimoji="0" lang="en-US" smtClean="0"/>
+              <a:rPr kumimoji="0" lang="en-US"/>
               <a:t>Click to edit Master text styles</a:t>
             </a:r>
           </a:p>
@@ -4201,7 +4210,7 @@
             <a:fld id="{1D8BD707-D9CF-40AE-B4C6-C98DA3205C09}" type="datetimeFigureOut">
               <a:rPr lang="en-US" smtClean="0"/>
               <a:pPr/>
-              <a:t>10/1/2023</a:t>
+              <a:t>10/1/2024</a:t>
             </a:fld>
             <a:endParaRPr lang="en-US"/>
           </a:p>
@@ -4438,10 +4447,9 @@
           <a:lstStyle/>
           <a:p>
             <a:r>
-              <a:rPr kumimoji="0" lang="en-US" smtClean="0"/>
+              <a:rPr kumimoji="0" lang="en-US"/>
               <a:t>Click to edit Master title style</a:t>
             </a:r>
-            <a:endParaRPr kumimoji="0" lang="en-US"/>
           </a:p>
         </p:txBody>
       </p:sp>
@@ -4472,38 +4480,37 @@
           <a:p>
             <a:pPr lvl="0" eaLnBrk="1" latinLnBrk="0" hangingPunct="1"/>
             <a:r>
-              <a:rPr kumimoji="0" lang="en-US" smtClean="0"/>
+              <a:rPr kumimoji="0" lang="en-US"/>
               <a:t>Click to edit Master text styles</a:t>
             </a:r>
           </a:p>
           <a:p>
             <a:pPr lvl="1" eaLnBrk="1" latinLnBrk="0" hangingPunct="1"/>
             <a:r>
-              <a:rPr kumimoji="0" lang="en-US" smtClean="0"/>
+              <a:rPr kumimoji="0" lang="en-US"/>
               <a:t>Second level</a:t>
             </a:r>
           </a:p>
           <a:p>
             <a:pPr lvl="2" eaLnBrk="1" latinLnBrk="0" hangingPunct="1"/>
             <a:r>
-              <a:rPr kumimoji="0" lang="en-US" smtClean="0"/>
+              <a:rPr kumimoji="0" lang="en-US"/>
               <a:t>Third level</a:t>
             </a:r>
           </a:p>
           <a:p>
             <a:pPr lvl="3" eaLnBrk="1" latinLnBrk="0" hangingPunct="1"/>
             <a:r>
-              <a:rPr kumimoji="0" lang="en-US" smtClean="0"/>
+              <a:rPr kumimoji="0" lang="en-US"/>
               <a:t>Fourth level</a:t>
             </a:r>
           </a:p>
           <a:p>
             <a:pPr lvl="4" eaLnBrk="1" latinLnBrk="0" hangingPunct="1"/>
             <a:r>
-              <a:rPr kumimoji="0" lang="en-US" smtClean="0"/>
+              <a:rPr kumimoji="0" lang="en-US"/>
               <a:t>Fifth level</a:t>
             </a:r>
-            <a:endParaRPr kumimoji="0" lang="en-US"/>
           </a:p>
         </p:txBody>
       </p:sp>
@@ -4541,7 +4548,7 @@
             <a:fld id="{1D8BD707-D9CF-40AE-B4C6-C98DA3205C09}" type="datetimeFigureOut">
               <a:rPr lang="en-US" smtClean="0"/>
               <a:pPr/>
-              <a:t>10/1/2023</a:t>
+              <a:t>10/1/2024</a:t>
             </a:fld>
             <a:endParaRPr lang="en-US"/>
           </a:p>
@@ -5091,20 +5098,20 @@
           <a:lstStyle/>
           <a:p>
             <a:r>
-              <a:rPr lang="en-US" dirty="0" smtClean="0"/>
+              <a:rPr lang="en-US" dirty="0"/>
               <a:t>Software Development II</a:t>
             </a:r>
             <a:br>
-              <a:rPr lang="en-US" dirty="0" smtClean="0"/>
+              <a:rPr lang="en-US" dirty="0"/>
             </a:br>
             <a:r>
-              <a:rPr lang="en-US" sz="1800" dirty="0" smtClean="0">
+              <a:rPr lang="en-US" sz="1800" dirty="0">
                 <a:hlinkClick r:id="rId3"/>
               </a:rPr>
               <a:t>www.cs.uoi.gr/~zarras/soft-devII.htm</a:t>
             </a:r>
             <a:r>
-              <a:rPr lang="en-US" sz="1800" dirty="0" smtClean="0"/>
+              <a:rPr lang="en-US" sz="1800" dirty="0"/>
               <a:t>    </a:t>
             </a:r>
             <a:endParaRPr lang="el-GR" sz="1800" dirty="0"/>
@@ -5129,15 +5136,15 @@
           <a:lstStyle/>
           <a:p>
             <a:r>
-              <a:rPr lang="en-US" dirty="0" smtClean="0"/>
+              <a:rPr lang="en-US" dirty="0"/>
               <a:t>from Clean Code by R. C. Martin, </a:t>
             </a:r>
             <a:r>
-              <a:rPr lang="en-US" dirty="0" err="1" smtClean="0"/>
+              <a:rPr lang="en-US" dirty="0" err="1"/>
               <a:t>a.k.a</a:t>
             </a:r>
             <a:r>
-              <a:rPr lang="en-US" dirty="0" smtClean="0"/>
+              <a:rPr lang="en-US" dirty="0"/>
               <a:t> “Uncle Bob”</a:t>
             </a:r>
             <a:endParaRPr lang="el-GR" dirty="0"/>
@@ -5217,7 +5224,7 @@
           <a:lstStyle/>
           <a:p>
             <a:r>
-              <a:rPr lang="en-US" dirty="0" smtClean="0"/>
+              <a:rPr lang="en-US" dirty="0"/>
               <a:t>Bad Code</a:t>
             </a:r>
             <a:endParaRPr lang="el-GR" dirty="0"/>
@@ -5247,7 +5254,7 @@
           <a:p>
             <a:pPr algn="just"/>
             <a:r>
-              <a:rPr lang="en-US" sz="2400" dirty="0" smtClean="0">
+              <a:rPr lang="en-US" sz="2400" dirty="0">
                 <a:solidFill>
                   <a:srgbClr val="0070C0"/>
                 </a:solidFill>
@@ -5255,7 +5262,7 @@
               <a:t>A managerial solution:</a:t>
             </a:r>
             <a:r>
-              <a:rPr lang="en-US" sz="2400" dirty="0" smtClean="0">
+              <a:rPr lang="en-US" sz="2400" dirty="0">
                 <a:solidFill>
                   <a:srgbClr val="FF0000"/>
                 </a:solidFill>
@@ -5265,7 +5272,7 @@
           </a:p>
           <a:p>
             <a:pPr algn="just"/>
-            <a:endParaRPr lang="en-US" dirty="0" smtClean="0">
+            <a:endParaRPr lang="en-US" dirty="0">
               <a:solidFill>
                 <a:srgbClr val="FF0000"/>
               </a:solidFill>
@@ -5274,11 +5281,11 @@
           <a:p>
             <a:pPr algn="just"/>
             <a:r>
-              <a:rPr lang="en-US" sz="2000" dirty="0" smtClean="0"/>
+              <a:rPr lang="en-US" sz="2000" dirty="0"/>
               <a:t>As </a:t>
             </a:r>
             <a:r>
-              <a:rPr lang="en-US" sz="2000" dirty="0" smtClean="0">
+              <a:rPr lang="en-US" sz="2000" dirty="0">
                 <a:solidFill>
                   <a:srgbClr val="FF0000"/>
                 </a:solidFill>
@@ -5286,11 +5293,11 @@
               <a:t>productivity decreases</a:t>
             </a:r>
             <a:r>
-              <a:rPr lang="en-US" sz="2000" dirty="0" smtClean="0"/>
+              <a:rPr lang="en-US" sz="2000" dirty="0"/>
               <a:t>, management does the only thing they can; they </a:t>
             </a:r>
             <a:r>
-              <a:rPr lang="en-US" sz="2000" dirty="0" smtClean="0">
+              <a:rPr lang="en-US" sz="2000" dirty="0">
                 <a:solidFill>
                   <a:srgbClr val="FF0000"/>
                 </a:solidFill>
@@ -5298,22 +5305,22 @@
               <a:t>add more staff to the project </a:t>
             </a:r>
             <a:r>
-              <a:rPr lang="en-US" sz="2000" dirty="0" smtClean="0"/>
+              <a:rPr lang="en-US" sz="2000" dirty="0"/>
               <a:t>in hopes of increasing productivity. </a:t>
             </a:r>
           </a:p>
           <a:p>
             <a:pPr algn="just"/>
-            <a:endParaRPr lang="en-US" sz="2000" dirty="0" smtClean="0"/>
+            <a:endParaRPr lang="en-US" sz="2000" dirty="0"/>
           </a:p>
           <a:p>
             <a:pPr algn="just"/>
             <a:r>
-              <a:rPr lang="en-US" sz="2000" dirty="0" smtClean="0"/>
+              <a:rPr lang="en-US" sz="2000" dirty="0"/>
               <a:t>But that </a:t>
             </a:r>
             <a:r>
-              <a:rPr lang="en-US" sz="2000" dirty="0" smtClean="0">
+              <a:rPr lang="en-US" sz="2000" dirty="0">
                 <a:solidFill>
                   <a:srgbClr val="FF0000"/>
                 </a:solidFill>
@@ -5321,22 +5328,22 @@
               <a:t>new staff is not versed in the design of the system</a:t>
             </a:r>
             <a:r>
-              <a:rPr lang="en-US" sz="2000" dirty="0" smtClean="0"/>
+              <a:rPr lang="en-US" sz="2000" dirty="0"/>
               <a:t>. </a:t>
             </a:r>
           </a:p>
           <a:p>
             <a:pPr algn="just"/>
-            <a:endParaRPr lang="en-US" sz="2000" dirty="0" smtClean="0"/>
+            <a:endParaRPr lang="en-US" sz="2000" dirty="0"/>
           </a:p>
           <a:p>
             <a:pPr algn="just"/>
             <a:r>
-              <a:rPr lang="en-US" sz="2000" dirty="0" smtClean="0"/>
+              <a:rPr lang="en-US" sz="2000" dirty="0"/>
               <a:t>They, and everyone else on the team, are under horrific </a:t>
             </a:r>
             <a:r>
-              <a:rPr lang="en-US" sz="2000" b="1" dirty="0" smtClean="0">
+              <a:rPr lang="en-US" sz="2000" b="1" dirty="0">
                 <a:solidFill>
                   <a:srgbClr val="FF0000"/>
                 </a:solidFill>
@@ -5344,26 +5351,26 @@
               <a:t>pressure to increase productivity</a:t>
             </a:r>
             <a:r>
-              <a:rPr lang="en-US" sz="2000" b="1" dirty="0" smtClean="0"/>
+              <a:rPr lang="en-US" sz="2000" b="1" dirty="0"/>
               <a:t>.</a:t>
             </a:r>
             <a:r>
-              <a:rPr lang="en-US" sz="2000" dirty="0" smtClean="0"/>
+              <a:rPr lang="en-US" sz="2000" dirty="0"/>
               <a:t> </a:t>
             </a:r>
           </a:p>
           <a:p>
             <a:pPr algn="just"/>
-            <a:endParaRPr lang="en-US" sz="2000" dirty="0" smtClean="0"/>
+            <a:endParaRPr lang="en-US" sz="2000" dirty="0"/>
           </a:p>
           <a:p>
             <a:pPr algn="just"/>
             <a:r>
-              <a:rPr lang="en-US" sz="2000" dirty="0" smtClean="0"/>
+              <a:rPr lang="en-US" sz="2000" dirty="0"/>
               <a:t>So they all make </a:t>
             </a:r>
             <a:r>
-              <a:rPr lang="en-US" sz="2000" dirty="0" smtClean="0">
+              <a:rPr lang="en-US" sz="2000" dirty="0">
                 <a:solidFill>
                   <a:srgbClr val="FF0000"/>
                 </a:solidFill>
@@ -5371,7 +5378,7 @@
               <a:t>more and more messes (!!!!!)</a:t>
             </a:r>
             <a:r>
-              <a:rPr lang="en-US" sz="2000" dirty="0" smtClean="0"/>
+              <a:rPr lang="en-US" sz="2000" dirty="0"/>
               <a:t>, driving the productivity ever further toward zero.</a:t>
             </a:r>
             <a:endParaRPr lang="el-GR" sz="2000" dirty="0"/>
@@ -5451,7 +5458,7 @@
           <a:lstStyle/>
           <a:p>
             <a:r>
-              <a:rPr lang="en-US" dirty="0" smtClean="0"/>
+              <a:rPr lang="en-US" dirty="0"/>
               <a:t>Bad Code</a:t>
             </a:r>
             <a:endParaRPr lang="el-GR" dirty="0"/>
@@ -5481,14 +5488,14 @@
           <a:p>
             <a:pPr algn="just"/>
             <a:r>
-              <a:rPr lang="en-US" sz="2400" dirty="0" smtClean="0">
+              <a:rPr lang="en-US" sz="2400" dirty="0">
                 <a:solidFill>
                   <a:srgbClr val="FF0000"/>
                 </a:solidFill>
               </a:rPr>
               <a:t>What would you do if you were a developer in such a project ??</a:t>
             </a:r>
-            <a:endParaRPr lang="en-US" dirty="0" smtClean="0">
+            <a:endParaRPr lang="en-US" dirty="0">
               <a:solidFill>
                 <a:srgbClr val="FF0000"/>
               </a:solidFill>
@@ -5569,7 +5576,7 @@
           <a:lstStyle/>
           <a:p>
             <a:r>
-              <a:rPr lang="en-US" dirty="0" smtClean="0"/>
+              <a:rPr lang="en-US" dirty="0"/>
               <a:t>Bad Code</a:t>
             </a:r>
             <a:endParaRPr lang="el-GR" dirty="0"/>
@@ -5599,7 +5606,7 @@
           <a:p>
             <a:pPr algn="just"/>
             <a:r>
-              <a:rPr lang="en-US" sz="2400" dirty="0" smtClean="0">
+              <a:rPr lang="en-US" sz="2400" dirty="0">
                 <a:solidFill>
                   <a:srgbClr val="0070C0"/>
                 </a:solidFill>
@@ -5607,7 +5614,7 @@
               <a:t>A technical solution:</a:t>
             </a:r>
             <a:r>
-              <a:rPr lang="en-US" sz="2400" dirty="0" smtClean="0">
+              <a:rPr lang="en-US" sz="2400" dirty="0">
                 <a:solidFill>
                   <a:srgbClr val="FF0000"/>
                 </a:solidFill>
@@ -5617,7 +5624,7 @@
           </a:p>
           <a:p>
             <a:pPr algn="just"/>
-            <a:endParaRPr lang="en-US" sz="2400" dirty="0" smtClean="0">
+            <a:endParaRPr lang="en-US" sz="2400" dirty="0">
               <a:solidFill>
                 <a:srgbClr val="FF0000"/>
               </a:solidFill>
@@ -5626,11 +5633,11 @@
           <a:p>
             <a:pPr algn="just"/>
             <a:r>
-              <a:rPr lang="en-US" sz="2000" dirty="0" smtClean="0"/>
+              <a:rPr lang="en-US" sz="2000" dirty="0"/>
               <a:t>Eventually the team rebels. They demand a </a:t>
             </a:r>
             <a:r>
-              <a:rPr lang="en-US" sz="2000" dirty="0" smtClean="0">
+              <a:rPr lang="en-US" sz="2000" dirty="0">
                 <a:solidFill>
                   <a:srgbClr val="FF0000"/>
                 </a:solidFill>
@@ -5638,21 +5645,21 @@
               <a:t>redesign</a:t>
             </a:r>
             <a:r>
-              <a:rPr lang="en-US" sz="2000" dirty="0" smtClean="0"/>
+              <a:rPr lang="en-US" sz="2000" dirty="0"/>
               <a:t>.  Management eventually bend to the demands of the developers and authorize the grand redesign in the sky.</a:t>
             </a:r>
           </a:p>
           <a:p>
-            <a:endParaRPr lang="en-US" sz="2000" dirty="0" smtClean="0"/>
+            <a:endParaRPr lang="en-US" sz="2000" dirty="0"/>
           </a:p>
           <a:p>
             <a:pPr algn="just"/>
             <a:r>
-              <a:rPr lang="en-US" sz="2000" dirty="0" smtClean="0"/>
+              <a:rPr lang="en-US" sz="2000" dirty="0"/>
               <a:t>A </a:t>
             </a:r>
             <a:r>
-              <a:rPr lang="en-US" sz="2000" dirty="0" smtClean="0">
+              <a:rPr lang="en-US" sz="2000" dirty="0">
                 <a:solidFill>
                   <a:srgbClr val="FF0000"/>
                 </a:solidFill>
@@ -5660,25 +5667,25 @@
               <a:t>new tiger team </a:t>
             </a:r>
             <a:r>
-              <a:rPr lang="en-US" sz="2000" dirty="0" smtClean="0"/>
+              <a:rPr lang="en-US" sz="2000" dirty="0"/>
               <a:t>is selected. Everyone else must continue to maintain the </a:t>
             </a:r>
             <a:r>
-              <a:rPr lang="fr-FR" sz="2000" dirty="0" err="1" smtClean="0"/>
+              <a:rPr lang="fr-FR" sz="2000" dirty="0" err="1"/>
               <a:t>current</a:t>
             </a:r>
             <a:r>
-              <a:rPr lang="fr-FR" sz="2000" dirty="0" smtClean="0"/>
+              <a:rPr lang="fr-FR" sz="2000" dirty="0"/>
               <a:t> system.</a:t>
             </a:r>
           </a:p>
           <a:p>
-            <a:endParaRPr lang="fr-FR" sz="2000" dirty="0" smtClean="0"/>
+            <a:endParaRPr lang="fr-FR" sz="2000" dirty="0"/>
           </a:p>
           <a:p>
             <a:pPr algn="just"/>
             <a:r>
-              <a:rPr lang="en-US" sz="2000" b="1" dirty="0" smtClean="0">
+              <a:rPr lang="en-US" sz="2000" b="1" dirty="0">
                 <a:solidFill>
                   <a:srgbClr val="FF0000"/>
                 </a:solidFill>
@@ -5761,7 +5768,7 @@
           <a:lstStyle/>
           <a:p>
             <a:r>
-              <a:rPr lang="en-US" dirty="0" smtClean="0"/>
+              <a:rPr lang="en-US" dirty="0"/>
               <a:t>Bad Code</a:t>
             </a:r>
             <a:endParaRPr lang="el-GR" dirty="0"/>
@@ -5791,7 +5798,7 @@
           <a:p>
             <a:pPr algn="just"/>
             <a:r>
-              <a:rPr lang="en-US" sz="2400" dirty="0" smtClean="0">
+              <a:rPr lang="en-US" sz="2400" dirty="0">
                 <a:solidFill>
                   <a:srgbClr val="0070C0"/>
                 </a:solidFill>
@@ -5799,7 +5806,7 @@
               <a:t>A technical solution:</a:t>
             </a:r>
             <a:r>
-              <a:rPr lang="en-US" sz="2400" dirty="0" smtClean="0">
+              <a:rPr lang="en-US" sz="2400" dirty="0">
                 <a:solidFill>
                   <a:srgbClr val="FF0000"/>
                 </a:solidFill>
@@ -5808,16 +5815,16 @@
             </a:r>
           </a:p>
           <a:p>
-            <a:endParaRPr lang="fr-FR" dirty="0" smtClean="0"/>
+            <a:endParaRPr lang="fr-FR" dirty="0"/>
           </a:p>
           <a:p>
             <a:pPr algn="just"/>
             <a:r>
-              <a:rPr lang="en-US" sz="2000" dirty="0" smtClean="0"/>
+              <a:rPr lang="en-US" sz="2000" dirty="0"/>
               <a:t>Now the </a:t>
             </a:r>
             <a:r>
-              <a:rPr lang="en-US" sz="2000" dirty="0" smtClean="0">
+              <a:rPr lang="en-US" sz="2000" dirty="0">
                 <a:solidFill>
                   <a:srgbClr val="FF0000"/>
                 </a:solidFill>
@@ -5825,22 +5832,22 @@
               <a:t>two teams are in a race</a:t>
             </a:r>
             <a:r>
-              <a:rPr lang="en-US" sz="2000" dirty="0" smtClean="0"/>
+              <a:rPr lang="en-US" sz="2000" dirty="0"/>
               <a:t>. </a:t>
             </a:r>
           </a:p>
           <a:p>
             <a:pPr algn="just"/>
-            <a:endParaRPr lang="en-US" sz="2000" dirty="0" smtClean="0"/>
+            <a:endParaRPr lang="en-US" sz="2000" dirty="0"/>
           </a:p>
           <a:p>
             <a:pPr algn="just"/>
             <a:r>
-              <a:rPr lang="en-US" sz="2000" dirty="0" smtClean="0"/>
+              <a:rPr lang="en-US" sz="2000" dirty="0"/>
               <a:t>The tiger team must </a:t>
             </a:r>
             <a:r>
-              <a:rPr lang="en-US" sz="2000" dirty="0" smtClean="0">
+              <a:rPr lang="en-US" sz="2000" dirty="0">
                 <a:solidFill>
                   <a:srgbClr val="FF0000"/>
                 </a:solidFill>
@@ -5848,22 +5855,22 @@
               <a:t>build a new system</a:t>
             </a:r>
             <a:r>
-              <a:rPr lang="en-US" sz="2000" dirty="0" smtClean="0"/>
+              <a:rPr lang="en-US" sz="2000" dirty="0"/>
               <a:t> that does everything that the old system does. </a:t>
             </a:r>
           </a:p>
           <a:p>
             <a:pPr algn="just"/>
-            <a:endParaRPr lang="en-US" sz="2000" dirty="0" smtClean="0"/>
+            <a:endParaRPr lang="en-US" sz="2000" dirty="0"/>
           </a:p>
           <a:p>
             <a:pPr algn="just"/>
             <a:r>
-              <a:rPr lang="en-US" sz="2000" dirty="0" smtClean="0"/>
+              <a:rPr lang="en-US" sz="2000" dirty="0"/>
               <a:t>Not only that, they have to </a:t>
             </a:r>
             <a:r>
-              <a:rPr lang="en-US" sz="2000" dirty="0" smtClean="0">
+              <a:rPr lang="en-US" sz="2000" dirty="0">
                 <a:solidFill>
                   <a:srgbClr val="FF0000"/>
                 </a:solidFill>
@@ -5871,20 +5878,20 @@
               <a:t>keep up with the changes </a:t>
             </a:r>
             <a:r>
-              <a:rPr lang="en-US" sz="2000" dirty="0" smtClean="0"/>
+              <a:rPr lang="en-US" sz="2000" dirty="0"/>
               <a:t>that are continuously being made to the old system !!!!</a:t>
             </a:r>
           </a:p>
           <a:p>
-            <a:endParaRPr lang="en-US" sz="2000" dirty="0" smtClean="0"/>
-          </a:p>
-          <a:p>
-            <a:r>
-              <a:rPr lang="en-US" sz="2000" dirty="0" smtClean="0"/>
+            <a:endParaRPr lang="en-US" sz="2000" dirty="0"/>
+          </a:p>
+          <a:p>
+            <a:r>
+              <a:rPr lang="en-US" sz="2000" dirty="0"/>
               <a:t>And by the time it’s done, the tiger team members are demanding that the new system be redesigned because </a:t>
             </a:r>
             <a:r>
-              <a:rPr lang="en-US" sz="2000" dirty="0" smtClean="0">
+              <a:rPr lang="en-US" sz="2000" dirty="0">
                 <a:solidFill>
                   <a:srgbClr val="FF0000"/>
                 </a:solidFill>
@@ -5967,7 +5974,7 @@
           <a:lstStyle/>
           <a:p>
             <a:r>
-              <a:rPr lang="en-US" dirty="0" smtClean="0"/>
+              <a:rPr lang="en-US" dirty="0"/>
               <a:t>Bad Code</a:t>
             </a:r>
             <a:endParaRPr lang="el-GR" dirty="0"/>
@@ -5997,7 +6004,7 @@
           <a:p>
             <a:pPr algn="just"/>
             <a:r>
-              <a:rPr lang="en-US" sz="2400" dirty="0" smtClean="0">
+              <a:rPr lang="en-US" sz="2400" dirty="0">
                 <a:solidFill>
                   <a:srgbClr val="0070C0"/>
                 </a:solidFill>
@@ -6005,7 +6012,7 @@
               <a:t>The moral:</a:t>
             </a:r>
             <a:r>
-              <a:rPr lang="en-US" sz="2400" dirty="0" smtClean="0">
+              <a:rPr lang="en-US" sz="2400" dirty="0">
                 <a:solidFill>
                   <a:srgbClr val="FF0000"/>
                 </a:solidFill>
@@ -6015,7 +6022,7 @@
           </a:p>
           <a:p>
             <a:pPr algn="just"/>
-            <a:endParaRPr lang="en-US" sz="2400" dirty="0" smtClean="0">
+            <a:endParaRPr lang="en-US" sz="2400" dirty="0">
               <a:solidFill>
                 <a:srgbClr val="FF0000"/>
               </a:solidFill>
@@ -6023,11 +6030,11 @@
           </a:p>
           <a:p>
             <a:r>
-              <a:rPr lang="en-US" sz="2000" dirty="0" smtClean="0"/>
+              <a:rPr lang="en-US" sz="2000" dirty="0"/>
               <a:t>Spending time </a:t>
             </a:r>
             <a:r>
-              <a:rPr lang="en-US" sz="2000" dirty="0" smtClean="0">
+              <a:rPr lang="en-US" sz="2000" dirty="0">
                 <a:solidFill>
                   <a:srgbClr val="FF0000"/>
                 </a:solidFill>
@@ -6035,11 +6042,11 @@
               <a:t>keeping your code</a:t>
             </a:r>
             <a:r>
-              <a:rPr lang="en-US" sz="2000" dirty="0" smtClean="0"/>
+              <a:rPr lang="en-US" sz="2000" dirty="0"/>
               <a:t> clean is not just </a:t>
             </a:r>
             <a:r>
-              <a:rPr lang="en-US" sz="2000" dirty="0" smtClean="0">
+              <a:rPr lang="en-US" sz="2000" dirty="0">
                 <a:solidFill>
                   <a:srgbClr val="FF0000"/>
                 </a:solidFill>
@@ -6047,11 +6054,11 @@
               <a:t>cost effective</a:t>
             </a:r>
             <a:r>
-              <a:rPr lang="en-US" sz="2000" dirty="0" smtClean="0"/>
+              <a:rPr lang="en-US" sz="2000" dirty="0"/>
               <a:t>; it’s a matter of </a:t>
             </a:r>
             <a:r>
-              <a:rPr lang="en-US" sz="2000" dirty="0" smtClean="0">
+              <a:rPr lang="en-US" sz="2000" dirty="0">
                 <a:solidFill>
                   <a:srgbClr val="FF0000"/>
                 </a:solidFill>
@@ -6061,7 +6068,7 @@
           </a:p>
           <a:p>
             <a:pPr algn="just"/>
-            <a:endParaRPr lang="en-US" sz="2400" dirty="0" smtClean="0">
+            <a:endParaRPr lang="en-US" sz="2400" dirty="0">
               <a:solidFill>
                 <a:srgbClr val="FF0000"/>
               </a:solidFill>
@@ -6069,7 +6076,7 @@
           </a:p>
           <a:p>
             <a:pPr algn="just"/>
-            <a:endParaRPr lang="en-US" dirty="0" smtClean="0">
+            <a:endParaRPr lang="en-US" dirty="0">
               <a:solidFill>
                 <a:srgbClr val="FF0000"/>
               </a:solidFill>
@@ -6150,7 +6157,7 @@
           <a:lstStyle/>
           <a:p>
             <a:r>
-              <a:rPr lang="en-US" dirty="0" smtClean="0"/>
+              <a:rPr lang="en-US" dirty="0"/>
               <a:t>Bad Code</a:t>
             </a:r>
             <a:endParaRPr lang="el-GR" dirty="0"/>
@@ -6180,7 +6187,7 @@
           <a:p>
             <a:pPr algn="just"/>
             <a:r>
-              <a:rPr lang="en-US" sz="2400" dirty="0" smtClean="0">
+              <a:rPr lang="en-US" sz="2400" dirty="0">
                 <a:solidFill>
                   <a:srgbClr val="FF0000"/>
                 </a:solidFill>
@@ -6190,7 +6197,7 @@
           </a:p>
           <a:p>
             <a:pPr algn="just"/>
-            <a:endParaRPr lang="en-US" sz="2400" dirty="0" smtClean="0">
+            <a:endParaRPr lang="en-US" sz="2400" dirty="0">
               <a:solidFill>
                 <a:srgbClr val="0070C0"/>
               </a:solidFill>
@@ -6265,7 +6272,7 @@
           <a:lstStyle/>
           <a:p>
             <a:r>
-              <a:rPr lang="en-US" dirty="0" smtClean="0"/>
+              <a:rPr lang="en-US" dirty="0"/>
               <a:t>Bad Code</a:t>
             </a:r>
             <a:endParaRPr lang="el-GR" dirty="0"/>
@@ -6295,7 +6302,7 @@
           <a:p>
             <a:pPr algn="just"/>
             <a:r>
-              <a:rPr lang="en-US" sz="2400" dirty="0" smtClean="0">
+              <a:rPr lang="en-US" sz="2400" dirty="0">
                 <a:solidFill>
                   <a:srgbClr val="0070C0"/>
                 </a:solidFill>
@@ -6305,7 +6312,7 @@
           </a:p>
           <a:p>
             <a:pPr algn="just"/>
-            <a:endParaRPr lang="en-US" sz="2400" dirty="0" smtClean="0">
+            <a:endParaRPr lang="en-US" sz="2400" dirty="0">
               <a:solidFill>
                 <a:srgbClr val="0070C0"/>
               </a:solidFill>
@@ -6314,22 +6321,22 @@
           <a:p>
             <a:pPr algn="just"/>
             <a:r>
-              <a:rPr lang="en-US" sz="2000" dirty="0" smtClean="0"/>
+              <a:rPr lang="en-US" sz="2000" dirty="0"/>
               <a:t>All developers with more than a few years experience know that previous messes slow them down.  </a:t>
             </a:r>
           </a:p>
           <a:p>
             <a:pPr algn="just"/>
-            <a:endParaRPr lang="en-US" sz="2000" dirty="0" smtClean="0"/>
+            <a:endParaRPr lang="en-US" sz="2000" dirty="0"/>
           </a:p>
           <a:p>
             <a:pPr algn="just"/>
             <a:r>
-              <a:rPr lang="en-US" sz="2000" dirty="0" smtClean="0"/>
+              <a:rPr lang="en-US" sz="2000" dirty="0"/>
               <a:t>And yet all developers </a:t>
             </a:r>
             <a:r>
-              <a:rPr lang="en-US" sz="2000" dirty="0" smtClean="0">
+              <a:rPr lang="en-US" sz="2000" dirty="0">
                 <a:solidFill>
                   <a:srgbClr val="FF0000"/>
                 </a:solidFill>
@@ -6337,11 +6344,11 @@
               <a:t>feel the pressure to make messes in order to meet deadlines</a:t>
             </a:r>
             <a:r>
-              <a:rPr lang="en-US" sz="2000" dirty="0" smtClean="0"/>
+              <a:rPr lang="en-US" sz="2000" dirty="0"/>
               <a:t> </a:t>
             </a:r>
             <a:r>
-              <a:rPr lang="en-US" sz="2000" dirty="0" smtClean="0">
+              <a:rPr lang="en-US" sz="2000" dirty="0">
                 <a:solidFill>
                   <a:srgbClr val="FF0000"/>
                 </a:solidFill>
@@ -6351,7 +6358,7 @@
           </a:p>
           <a:p>
             <a:pPr algn="just"/>
-            <a:endParaRPr lang="en-US" sz="2000" dirty="0" smtClean="0">
+            <a:endParaRPr lang="en-US" sz="2000" dirty="0">
               <a:solidFill>
                 <a:srgbClr val="FF0000"/>
               </a:solidFill>
@@ -6359,11 +6366,11 @@
           </a:p>
           <a:p>
             <a:r>
-              <a:rPr lang="fr-FR" sz="2000" dirty="0" smtClean="0"/>
+              <a:rPr lang="fr-FR" sz="2000" dirty="0"/>
               <a:t>In practice, …. </a:t>
             </a:r>
             <a:r>
-              <a:rPr lang="en-US" sz="2000" dirty="0" smtClean="0">
+              <a:rPr lang="en-US" sz="2000" dirty="0">
                 <a:solidFill>
                   <a:srgbClr val="FF0000"/>
                 </a:solidFill>
@@ -6371,19 +6378,19 @@
               <a:t>the mess will slow you down instantly</a:t>
             </a:r>
             <a:r>
-              <a:rPr lang="en-US" sz="2000" dirty="0" smtClean="0"/>
+              <a:rPr lang="en-US" sz="2000" dirty="0"/>
               <a:t>, and will force you to miss the deadline. The </a:t>
             </a:r>
             <a:r>
-              <a:rPr lang="en-US" sz="2000" i="1" dirty="0" smtClean="0"/>
+              <a:rPr lang="en-US" sz="2000" i="1" dirty="0"/>
               <a:t>only way to make the deadline—the only way to </a:t>
             </a:r>
             <a:r>
-              <a:rPr lang="en-US" sz="2000" dirty="0" smtClean="0"/>
+              <a:rPr lang="en-US" sz="2000" dirty="0"/>
               <a:t>go fast—is to </a:t>
             </a:r>
             <a:r>
-              <a:rPr lang="en-US" sz="2000" dirty="0" smtClean="0">
+              <a:rPr lang="en-US" sz="2000" dirty="0">
                 <a:solidFill>
                   <a:srgbClr val="FF0000"/>
                 </a:solidFill>
@@ -6391,10 +6398,10 @@
               <a:t>keep the code as clean as possible</a:t>
             </a:r>
             <a:r>
-              <a:rPr lang="en-US" sz="2000" dirty="0" smtClean="0"/>
+              <a:rPr lang="en-US" sz="2000" dirty="0"/>
               <a:t> at all times.</a:t>
             </a:r>
-            <a:endParaRPr lang="en-US" sz="2000" dirty="0" smtClean="0">
+            <a:endParaRPr lang="en-US" sz="2000" dirty="0">
               <a:solidFill>
                 <a:srgbClr val="FF0000"/>
               </a:solidFill>
@@ -6495,7 +6502,7 @@
           <a:lstStyle/>
           <a:p>
             <a:r>
-              <a:rPr lang="en-US" dirty="0" smtClean="0"/>
+              <a:rPr lang="en-US" dirty="0"/>
               <a:t>Clean Code</a:t>
             </a:r>
             <a:endParaRPr lang="el-GR" dirty="0"/>
@@ -6525,7 +6532,7 @@
           <a:p>
             <a:pPr algn="just"/>
             <a:r>
-              <a:rPr lang="en-US" sz="2400" b="1" dirty="0" smtClean="0">
+              <a:rPr lang="en-US" sz="2400" b="1" dirty="0">
                 <a:solidFill>
                   <a:srgbClr val="FF0000"/>
                 </a:solidFill>
@@ -6535,7 +6542,7 @@
           </a:p>
           <a:p>
             <a:pPr algn="just"/>
-            <a:endParaRPr lang="en-US" sz="2400" dirty="0" smtClean="0">
+            <a:endParaRPr lang="en-US" sz="2400" dirty="0">
               <a:solidFill>
                 <a:srgbClr val="0070C0"/>
               </a:solidFill>
@@ -6544,13 +6551,13 @@
           <a:p>
             <a:pPr algn="just"/>
             <a:r>
-              <a:rPr lang="en-US" dirty="0" smtClean="0"/>
+              <a:rPr lang="en-US" dirty="0"/>
               <a:t> </a:t>
             </a:r>
           </a:p>
           <a:p>
             <a:pPr algn="just"/>
-            <a:endParaRPr lang="en-US" sz="2400" dirty="0" smtClean="0">
+            <a:endParaRPr lang="en-US" sz="2400" dirty="0">
               <a:solidFill>
                 <a:srgbClr val="0070C0"/>
               </a:solidFill>
@@ -6625,7 +6632,7 @@
           <a:lstStyle/>
           <a:p>
             <a:r>
-              <a:rPr lang="en-US" dirty="0" smtClean="0"/>
+              <a:rPr lang="en-US" dirty="0"/>
               <a:t>Clean Code</a:t>
             </a:r>
             <a:endParaRPr lang="el-GR" dirty="0"/>
@@ -6655,7 +6662,7 @@
           <a:p>
             <a:pPr algn="just"/>
             <a:r>
-              <a:rPr lang="en-US" sz="2400" dirty="0" smtClean="0">
+              <a:rPr lang="en-US" sz="2400" dirty="0">
                 <a:solidFill>
                   <a:srgbClr val="0070C0"/>
                 </a:solidFill>
@@ -6665,7 +6672,7 @@
           </a:p>
           <a:p>
             <a:pPr algn="just"/>
-            <a:endParaRPr lang="en-US" sz="2400" dirty="0" smtClean="0">
+            <a:endParaRPr lang="en-US" sz="2400" dirty="0">
               <a:solidFill>
                 <a:srgbClr val="0070C0"/>
               </a:solidFill>
@@ -6674,33 +6681,33 @@
           <a:p>
             <a:pPr algn="just"/>
             <a:r>
-              <a:rPr lang="en-US" sz="2000" dirty="0" smtClean="0"/>
+              <a:rPr lang="en-US" sz="2000" dirty="0"/>
               <a:t>Probably as many definitions as programmers !!!</a:t>
             </a:r>
           </a:p>
           <a:p>
             <a:pPr algn="just"/>
-            <a:endParaRPr lang="en-US" sz="2000" dirty="0" smtClean="0"/>
+            <a:endParaRPr lang="en-US" sz="2000" dirty="0"/>
           </a:p>
           <a:p>
             <a:pPr algn="just"/>
             <a:r>
-              <a:rPr lang="en-US" sz="2000" dirty="0" smtClean="0"/>
+              <a:rPr lang="en-US" sz="2000" dirty="0"/>
               <a:t>But, still the baseline is the same, </a:t>
             </a:r>
           </a:p>
           <a:p>
             <a:pPr algn="just"/>
-            <a:endParaRPr lang="en-US" sz="2000" dirty="0" smtClean="0"/>
+            <a:endParaRPr lang="en-US" sz="2000" dirty="0"/>
           </a:p>
           <a:p>
             <a:pPr algn="just"/>
             <a:r>
-              <a:rPr lang="en-US" sz="2000" dirty="0" smtClean="0"/>
+              <a:rPr lang="en-US" sz="2000" dirty="0"/>
               <a:t>code is </a:t>
             </a:r>
             <a:r>
-              <a:rPr lang="en-US" sz="2000" dirty="0" smtClean="0">
+              <a:rPr lang="en-US" sz="2000" dirty="0">
                 <a:solidFill>
                   <a:srgbClr val="FF0000"/>
                 </a:solidFill>
@@ -6708,11 +6715,11 @@
               <a:t>clean</a:t>
             </a:r>
             <a:r>
-              <a:rPr lang="en-US" sz="2000" dirty="0" smtClean="0"/>
+              <a:rPr lang="en-US" sz="2000" dirty="0"/>
               <a:t> if its can be </a:t>
             </a:r>
             <a:r>
-              <a:rPr lang="en-US" sz="2000" dirty="0" smtClean="0">
+              <a:rPr lang="en-US" sz="2000" dirty="0">
                 <a:solidFill>
                   <a:srgbClr val="FF0000"/>
                 </a:solidFill>
@@ -6720,11 +6727,11 @@
               <a:t>easily understood</a:t>
             </a:r>
             <a:r>
-              <a:rPr lang="en-US" sz="2000" dirty="0" smtClean="0"/>
+              <a:rPr lang="en-US" sz="2000" dirty="0"/>
               <a:t>, </a:t>
             </a:r>
             <a:r>
-              <a:rPr lang="en-US" sz="2000" dirty="0" smtClean="0">
+              <a:rPr lang="en-US" sz="2000" dirty="0">
                 <a:solidFill>
                   <a:srgbClr val="FF0000"/>
                 </a:solidFill>
@@ -6732,11 +6739,11 @@
               <a:t>tested</a:t>
             </a:r>
             <a:r>
-              <a:rPr lang="en-US" sz="2000" dirty="0" smtClean="0"/>
+              <a:rPr lang="en-US" sz="2000" dirty="0"/>
               <a:t> and </a:t>
             </a:r>
             <a:r>
-              <a:rPr lang="en-US" sz="2000" dirty="0" smtClean="0">
+              <a:rPr lang="en-US" sz="2000" dirty="0">
                 <a:solidFill>
                   <a:srgbClr val="FF0000"/>
                 </a:solidFill>
@@ -6744,20 +6751,20 @@
               <a:t>maintained</a:t>
             </a:r>
             <a:r>
-              <a:rPr lang="en-US" sz="2000" dirty="0" smtClean="0"/>
+              <a:rPr lang="en-US" sz="2000" dirty="0"/>
               <a:t>….</a:t>
             </a:r>
           </a:p>
           <a:p>
             <a:pPr algn="just"/>
             <a:r>
-              <a:rPr lang="en-US" sz="2000" dirty="0" smtClean="0"/>
+              <a:rPr lang="en-US" sz="2000" dirty="0"/>
               <a:t> </a:t>
             </a:r>
           </a:p>
           <a:p>
             <a:pPr algn="just"/>
-            <a:endParaRPr lang="en-US" sz="2400" dirty="0" smtClean="0">
+            <a:endParaRPr lang="en-US" sz="2400" dirty="0">
               <a:solidFill>
                 <a:srgbClr val="0070C0"/>
               </a:solidFill>
@@ -6806,7 +6813,7 @@
           <a:lstStyle/>
           <a:p>
             <a:r>
-              <a:rPr lang="en-US" dirty="0" smtClean="0"/>
+              <a:rPr lang="en-US" dirty="0"/>
               <a:t>Clean Code</a:t>
             </a:r>
             <a:endParaRPr lang="el-GR" dirty="0"/>
@@ -6836,37 +6843,37 @@
           <a:p>
             <a:pPr algn="just"/>
             <a:r>
-              <a:rPr lang="en-US" b="1" dirty="0" smtClean="0"/>
+              <a:rPr lang="en-US" b="1" dirty="0"/>
               <a:t>Grady </a:t>
             </a:r>
             <a:r>
-              <a:rPr lang="en-US" b="1" dirty="0" err="1" smtClean="0"/>
+              <a:rPr lang="en-US" b="1" dirty="0" err="1"/>
               <a:t>Booch</a:t>
             </a:r>
             <a:r>
-              <a:rPr lang="en-US" b="1" dirty="0" smtClean="0"/>
+              <a:rPr lang="en-US" b="1" dirty="0"/>
               <a:t>, author of </a:t>
             </a:r>
             <a:r>
-              <a:rPr lang="en-US" b="1" i="1" dirty="0" smtClean="0"/>
+              <a:rPr lang="en-US" b="1" i="1" dirty="0"/>
               <a:t>Object Oriented Analysis and Design with </a:t>
             </a:r>
             <a:r>
-              <a:rPr lang="fr-FR" b="1" i="1" dirty="0" smtClean="0"/>
+              <a:rPr lang="fr-FR" b="1" i="1" dirty="0"/>
               <a:t>Applications</a:t>
             </a:r>
           </a:p>
           <a:p>
-            <a:endParaRPr lang="fr-FR" b="1" i="1" dirty="0" smtClean="0"/>
+            <a:endParaRPr lang="fr-FR" b="1" i="1" dirty="0"/>
           </a:p>
           <a:p>
             <a:pPr algn="just"/>
             <a:r>
-              <a:rPr lang="en-US" i="1" dirty="0" smtClean="0"/>
+              <a:rPr lang="en-US" i="1" dirty="0"/>
               <a:t>Clean code is </a:t>
             </a:r>
             <a:r>
-              <a:rPr lang="en-US" i="1" dirty="0" smtClean="0">
+              <a:rPr lang="en-US" i="1" dirty="0">
                 <a:solidFill>
                   <a:srgbClr val="FF0000"/>
                 </a:solidFill>
@@ -6874,11 +6881,11 @@
               <a:t>simple</a:t>
             </a:r>
             <a:r>
-              <a:rPr lang="en-US" i="1" dirty="0" smtClean="0"/>
+              <a:rPr lang="en-US" i="1" dirty="0"/>
               <a:t> and </a:t>
             </a:r>
             <a:r>
-              <a:rPr lang="en-US" i="1" dirty="0" smtClean="0">
+              <a:rPr lang="en-US" i="1" dirty="0">
                 <a:solidFill>
                   <a:srgbClr val="FF0000"/>
                 </a:solidFill>
@@ -6886,11 +6893,11 @@
               <a:t>direct</a:t>
             </a:r>
             <a:r>
-              <a:rPr lang="en-US" i="1" dirty="0" smtClean="0"/>
+              <a:rPr lang="en-US" i="1" dirty="0"/>
               <a:t>. Clean code </a:t>
             </a:r>
             <a:r>
-              <a:rPr lang="en-US" b="1" i="1" dirty="0" smtClean="0">
+              <a:rPr lang="en-US" b="1" i="1" dirty="0">
                 <a:solidFill>
                   <a:srgbClr val="FF0000"/>
                 </a:solidFill>
@@ -6898,11 +6905,11 @@
               <a:t>reads</a:t>
             </a:r>
             <a:r>
-              <a:rPr lang="en-US" i="1" dirty="0" smtClean="0"/>
+              <a:rPr lang="en-US" i="1" dirty="0"/>
               <a:t> like </a:t>
             </a:r>
             <a:r>
-              <a:rPr lang="en-US" i="1" dirty="0" smtClean="0">
+              <a:rPr lang="en-US" i="1" dirty="0">
                 <a:solidFill>
                   <a:srgbClr val="FF0000"/>
                 </a:solidFill>
@@ -6910,7 +6917,7 @@
               <a:t>well-written</a:t>
             </a:r>
             <a:r>
-              <a:rPr lang="en-US" i="1" dirty="0" smtClean="0"/>
+              <a:rPr lang="en-US" i="1" dirty="0"/>
               <a:t> prose….</a:t>
             </a:r>
             <a:endParaRPr lang="el-GR" dirty="0"/>
@@ -6992,7 +6999,7 @@
           <a:lstStyle/>
           <a:p>
             <a:r>
-              <a:rPr lang="en-US" dirty="0" smtClean="0"/>
+              <a:rPr lang="en-US" dirty="0"/>
               <a:t>What are the general objectives of the course?</a:t>
             </a:r>
             <a:endParaRPr lang="el-GR" dirty="0"/>
@@ -7016,15 +7023,15 @@
           </a:bodyPr>
           <a:lstStyle/>
           <a:p>
-            <a:endParaRPr lang="en-US" dirty="0" smtClean="0"/>
-          </a:p>
-          <a:p>
-            <a:r>
-              <a:rPr lang="en-US" dirty="0" smtClean="0"/>
+            <a:endParaRPr lang="en-US" dirty="0"/>
+          </a:p>
+          <a:p>
+            <a:r>
+              <a:rPr lang="en-US" dirty="0"/>
               <a:t>Identify </a:t>
             </a:r>
             <a:r>
-              <a:rPr lang="en-US" dirty="0" smtClean="0">
+              <a:rPr lang="en-US" dirty="0">
                 <a:solidFill>
                   <a:srgbClr val="FF0000"/>
                 </a:solidFill>
@@ -7032,11 +7039,11 @@
               <a:t>issues</a:t>
             </a:r>
             <a:r>
-              <a:rPr lang="en-US" dirty="0" smtClean="0"/>
+              <a:rPr lang="en-US" dirty="0"/>
               <a:t> of </a:t>
             </a:r>
             <a:r>
-              <a:rPr lang="en-US" dirty="0" smtClean="0">
+              <a:rPr lang="en-US" dirty="0">
                 <a:solidFill>
                   <a:srgbClr val="FF0000"/>
                 </a:solidFill>
@@ -7044,11 +7051,11 @@
               <a:t>poor</a:t>
             </a:r>
             <a:r>
-              <a:rPr lang="en-US" dirty="0" smtClean="0"/>
+              <a:rPr lang="en-US" dirty="0"/>
               <a:t> software </a:t>
             </a:r>
             <a:r>
-              <a:rPr lang="en-US" dirty="0" smtClean="0">
+              <a:rPr lang="en-US" dirty="0">
                 <a:solidFill>
                   <a:srgbClr val="FF0000"/>
                 </a:solidFill>
@@ -7056,17 +7063,17 @@
               <a:t>design/implementation</a:t>
             </a:r>
             <a:r>
-              <a:rPr lang="en-US" dirty="0" smtClean="0"/>
+              <a:rPr lang="en-US" dirty="0"/>
               <a:t>. </a:t>
             </a:r>
           </a:p>
           <a:p>
             <a:r>
-              <a:rPr lang="en-US" dirty="0" smtClean="0"/>
+              <a:rPr lang="en-US" dirty="0"/>
               <a:t>Improve the quality of software that suffers from issues of poor software design/implementation by applying </a:t>
             </a:r>
             <a:r>
-              <a:rPr lang="en-US" dirty="0" smtClean="0">
+              <a:rPr lang="en-US" dirty="0">
                 <a:solidFill>
                   <a:srgbClr val="FF0000"/>
                 </a:solidFill>
@@ -7074,11 +7081,11 @@
               <a:t>good practices</a:t>
             </a:r>
             <a:r>
-              <a:rPr lang="en-US" dirty="0" smtClean="0"/>
+              <a:rPr lang="en-US" dirty="0"/>
               <a:t>, </a:t>
             </a:r>
             <a:r>
-              <a:rPr lang="en-US" dirty="0" smtClean="0">
+              <a:rPr lang="en-US" dirty="0">
                 <a:solidFill>
                   <a:srgbClr val="FF0000"/>
                 </a:solidFill>
@@ -7086,11 +7093,11 @@
               <a:t>refactoring</a:t>
             </a:r>
             <a:r>
-              <a:rPr lang="en-US" dirty="0" smtClean="0"/>
+              <a:rPr lang="en-US" dirty="0"/>
               <a:t>, </a:t>
             </a:r>
             <a:r>
-              <a:rPr lang="en-US" dirty="0" smtClean="0">
+              <a:rPr lang="en-US" dirty="0">
                 <a:solidFill>
                   <a:srgbClr val="FF0000"/>
                 </a:solidFill>
@@ -7098,7 +7105,7 @@
               <a:t>patterns</a:t>
             </a:r>
             <a:r>
-              <a:rPr lang="en-US" dirty="0" smtClean="0"/>
+              <a:rPr lang="en-US" dirty="0"/>
               <a:t>.</a:t>
             </a:r>
           </a:p>
@@ -7145,7 +7152,7 @@
           <a:lstStyle/>
           <a:p>
             <a:r>
-              <a:rPr lang="en-US" dirty="0" smtClean="0"/>
+              <a:rPr lang="en-US" dirty="0"/>
               <a:t>Clean Code</a:t>
             </a:r>
             <a:endParaRPr lang="el-GR" dirty="0"/>
@@ -7207,39 +7214,39 @@
           <a:p>
             <a:pPr algn="just"/>
             <a:r>
-              <a:rPr lang="en-US" b="1" dirty="0" err="1" smtClean="0"/>
+              <a:rPr lang="en-US" b="1" dirty="0" err="1"/>
               <a:t>Bjarne</a:t>
             </a:r>
             <a:r>
-              <a:rPr lang="en-US" b="1" dirty="0" smtClean="0"/>
+              <a:rPr lang="en-US" b="1" dirty="0"/>
               <a:t> </a:t>
             </a:r>
             <a:r>
-              <a:rPr lang="en-US" b="1" dirty="0" err="1" smtClean="0"/>
+              <a:rPr lang="en-US" b="1" dirty="0" err="1"/>
               <a:t>Stroustrup</a:t>
             </a:r>
             <a:r>
-              <a:rPr lang="en-US" b="1" dirty="0" smtClean="0"/>
+              <a:rPr lang="en-US" b="1" dirty="0"/>
               <a:t>, inventor of C++ and author of </a:t>
             </a:r>
             <a:r>
-              <a:rPr lang="en-US" b="1" i="1" dirty="0" smtClean="0"/>
+              <a:rPr lang="en-US" b="1" i="1" dirty="0"/>
               <a:t>The C++ Programming </a:t>
             </a:r>
             <a:r>
-              <a:rPr lang="fr-FR" b="1" i="1" dirty="0" err="1" smtClean="0"/>
+              <a:rPr lang="fr-FR" b="1" i="1" dirty="0" err="1"/>
               <a:t>Language</a:t>
             </a:r>
-            <a:endParaRPr lang="fr-FR" b="1" i="1" dirty="0" smtClean="0"/>
+            <a:endParaRPr lang="fr-FR" b="1" i="1" dirty="0"/>
           </a:p>
           <a:p>
             <a:pPr algn="just"/>
-            <a:endParaRPr lang="en-US" i="1" dirty="0" smtClean="0"/>
+            <a:endParaRPr lang="en-US" i="1" dirty="0"/>
           </a:p>
           <a:p>
             <a:pPr algn="just"/>
             <a:r>
-              <a:rPr lang="en-US" i="1" dirty="0" smtClean="0">
+              <a:rPr lang="en-US" i="1" dirty="0">
                 <a:solidFill>
                   <a:srgbClr val="FF0000"/>
                 </a:solidFill>
@@ -7247,11 +7254,11 @@
               <a:t>…elegant</a:t>
             </a:r>
             <a:r>
-              <a:rPr lang="en-US" i="1" dirty="0" smtClean="0"/>
+              <a:rPr lang="en-US" i="1" dirty="0"/>
               <a:t> and </a:t>
             </a:r>
             <a:r>
-              <a:rPr lang="en-US" i="1" dirty="0" smtClean="0">
+              <a:rPr lang="en-US" i="1" dirty="0">
                 <a:solidFill>
                   <a:srgbClr val="FF0000"/>
                 </a:solidFill>
@@ -7259,22 +7266,22 @@
               <a:t>efficient</a:t>
             </a:r>
             <a:r>
-              <a:rPr lang="en-US" i="1" dirty="0" smtClean="0"/>
+              <a:rPr lang="en-US" i="1" dirty="0"/>
               <a:t>. </a:t>
             </a:r>
           </a:p>
           <a:p>
             <a:pPr algn="just"/>
-            <a:endParaRPr lang="en-US" i="1" dirty="0" smtClean="0"/>
+            <a:endParaRPr lang="en-US" i="1" dirty="0"/>
           </a:p>
           <a:p>
             <a:pPr algn="just"/>
             <a:r>
-              <a:rPr lang="en-US" i="1" dirty="0" smtClean="0"/>
+              <a:rPr lang="en-US" i="1" dirty="0"/>
               <a:t>The </a:t>
             </a:r>
             <a:r>
-              <a:rPr lang="en-US" i="1" dirty="0" smtClean="0">
+              <a:rPr lang="en-US" i="1" dirty="0">
                 <a:solidFill>
                   <a:srgbClr val="FF0000"/>
                 </a:solidFill>
@@ -7282,11 +7289,11 @@
               <a:t>logic</a:t>
             </a:r>
             <a:r>
-              <a:rPr lang="en-US" i="1" dirty="0" smtClean="0"/>
+              <a:rPr lang="en-US" i="1" dirty="0"/>
               <a:t> should be </a:t>
             </a:r>
             <a:r>
-              <a:rPr lang="en-US" i="1" dirty="0" smtClean="0">
+              <a:rPr lang="en-US" i="1" dirty="0">
                 <a:solidFill>
                   <a:srgbClr val="FF0000"/>
                 </a:solidFill>
@@ -7294,22 +7301,22 @@
               <a:t>straightforward</a:t>
             </a:r>
             <a:r>
-              <a:rPr lang="en-US" i="1" dirty="0" smtClean="0"/>
+              <a:rPr lang="en-US" i="1" dirty="0"/>
               <a:t> to make it hard for bugs to hide, </a:t>
             </a:r>
           </a:p>
           <a:p>
             <a:pPr algn="just"/>
-            <a:endParaRPr lang="en-US" i="1" dirty="0" smtClean="0"/>
+            <a:endParaRPr lang="en-US" i="1" dirty="0"/>
           </a:p>
           <a:p>
             <a:pPr algn="just"/>
             <a:r>
-              <a:rPr lang="en-US" i="1" dirty="0" smtClean="0"/>
+              <a:rPr lang="en-US" i="1" dirty="0"/>
               <a:t>the </a:t>
             </a:r>
             <a:r>
-              <a:rPr lang="en-US" i="1" dirty="0" smtClean="0">
+              <a:rPr lang="en-US" i="1" dirty="0">
                 <a:solidFill>
                   <a:srgbClr val="FF0000"/>
                 </a:solidFill>
@@ -7317,7 +7324,7 @@
               <a:t>dependencies</a:t>
             </a:r>
             <a:r>
-              <a:rPr lang="en-US" i="1" u="sng" dirty="0" smtClean="0">
+              <a:rPr lang="en-US" i="1" u="sng" dirty="0">
                 <a:solidFill>
                   <a:srgbClr val="FF0000"/>
                 </a:solidFill>
@@ -7325,7 +7332,7 @@
               <a:t> </a:t>
             </a:r>
             <a:r>
-              <a:rPr lang="en-US" i="1" dirty="0" smtClean="0">
+              <a:rPr lang="en-US" i="1" dirty="0">
                 <a:solidFill>
                   <a:srgbClr val="FF0000"/>
                 </a:solidFill>
@@ -7333,7 +7340,7 @@
               <a:t>minimal</a:t>
             </a:r>
             <a:r>
-              <a:rPr lang="en-US" i="1" u="sng" dirty="0" smtClean="0">
+              <a:rPr lang="en-US" i="1" u="sng" dirty="0">
                 <a:solidFill>
                   <a:srgbClr val="FF0000"/>
                 </a:solidFill>
@@ -7341,11 +7348,11 @@
               <a:t> </a:t>
             </a:r>
             <a:r>
-              <a:rPr lang="en-US" i="1" dirty="0" smtClean="0"/>
+              <a:rPr lang="en-US" i="1" dirty="0"/>
               <a:t>to ease maintenance, error handling complete according to an articulated strategy, and </a:t>
             </a:r>
             <a:r>
-              <a:rPr lang="en-US" i="1" dirty="0" smtClean="0">
+              <a:rPr lang="en-US" i="1" dirty="0">
                 <a:solidFill>
                   <a:srgbClr val="FF0000"/>
                 </a:solidFill>
@@ -7353,22 +7360,22 @@
               <a:t>performance</a:t>
             </a:r>
             <a:r>
-              <a:rPr lang="en-US" i="1" dirty="0" smtClean="0"/>
+              <a:rPr lang="en-US" i="1" dirty="0"/>
               <a:t> close to optimal so as not to tempt people to make the code messy with unprincipled optimizations. </a:t>
             </a:r>
           </a:p>
           <a:p>
             <a:pPr algn="just"/>
-            <a:endParaRPr lang="en-US" i="1" dirty="0" smtClean="0"/>
+            <a:endParaRPr lang="en-US" i="1" dirty="0"/>
           </a:p>
           <a:p>
             <a:pPr algn="just"/>
             <a:r>
-              <a:rPr lang="en-US" i="1" dirty="0" smtClean="0"/>
+              <a:rPr lang="en-US" i="1" dirty="0"/>
               <a:t>Clean code </a:t>
             </a:r>
             <a:r>
-              <a:rPr lang="en-US" i="1" dirty="0" smtClean="0">
+              <a:rPr lang="en-US" i="1" dirty="0">
                 <a:solidFill>
                   <a:srgbClr val="FF0000"/>
                 </a:solidFill>
@@ -7376,11 +7383,11 @@
               <a:t>does one thing </a:t>
             </a:r>
             <a:r>
-              <a:rPr lang="fr-FR" i="1" dirty="0" err="1" smtClean="0"/>
+              <a:rPr lang="fr-FR" i="1" dirty="0" err="1"/>
               <a:t>well</a:t>
             </a:r>
             <a:r>
-              <a:rPr lang="fr-FR" i="1" dirty="0" smtClean="0"/>
+              <a:rPr lang="fr-FR" i="1" dirty="0"/>
               <a:t>.</a:t>
             </a:r>
             <a:endParaRPr lang="el-GR" dirty="0"/>
@@ -7428,7 +7435,7 @@
           <a:lstStyle/>
           <a:p>
             <a:r>
-              <a:rPr lang="en-US" dirty="0" smtClean="0"/>
+              <a:rPr lang="en-US" dirty="0"/>
               <a:t>Clean Code</a:t>
             </a:r>
             <a:endParaRPr lang="el-GR" dirty="0"/>
@@ -7457,35 +7464,35 @@
           <a:lstStyle/>
           <a:p>
             <a:r>
-              <a:rPr lang="fr-FR" b="1" dirty="0" smtClean="0"/>
+              <a:rPr lang="fr-FR" b="1" dirty="0"/>
               <a:t>Dave Thomas, </a:t>
             </a:r>
             <a:r>
-              <a:rPr lang="en-US" b="1" dirty="0" smtClean="0"/>
+              <a:rPr lang="en-US" b="1" dirty="0"/>
               <a:t>godfather of the</a:t>
             </a:r>
           </a:p>
           <a:p>
             <a:r>
-              <a:rPr lang="fr-FR" b="1" dirty="0" smtClean="0"/>
+              <a:rPr lang="fr-FR" b="1" dirty="0"/>
               <a:t>Eclipse </a:t>
             </a:r>
             <a:r>
-              <a:rPr lang="fr-FR" b="1" dirty="0" err="1" smtClean="0"/>
+              <a:rPr lang="fr-FR" b="1" dirty="0" err="1"/>
               <a:t>strategy</a:t>
             </a:r>
-            <a:endParaRPr lang="fr-FR" b="1" dirty="0" smtClean="0"/>
-          </a:p>
-          <a:p>
-            <a:endParaRPr lang="fr-FR" b="1" dirty="0" smtClean="0"/>
-          </a:p>
-          <a:p>
-            <a:r>
-              <a:rPr lang="en-US" i="1" dirty="0" smtClean="0"/>
+            <a:endParaRPr lang="fr-FR" b="1" dirty="0"/>
+          </a:p>
+          <a:p>
+            <a:endParaRPr lang="fr-FR" b="1" dirty="0"/>
+          </a:p>
+          <a:p>
+            <a:r>
+              <a:rPr lang="en-US" i="1" dirty="0"/>
               <a:t>Clean code can be </a:t>
             </a:r>
             <a:r>
-              <a:rPr lang="en-US" b="1" i="1" dirty="0" smtClean="0">
+              <a:rPr lang="en-US" b="1" i="1" dirty="0">
                 <a:solidFill>
                   <a:srgbClr val="FF0000"/>
                 </a:solidFill>
@@ -7493,11 +7500,11 @@
               <a:t>read</a:t>
             </a:r>
             <a:r>
-              <a:rPr lang="en-US" i="1" dirty="0" smtClean="0"/>
+              <a:rPr lang="en-US" i="1" dirty="0"/>
               <a:t>, and </a:t>
             </a:r>
             <a:r>
-              <a:rPr lang="en-US" i="1" dirty="0" smtClean="0">
+              <a:rPr lang="en-US" i="1" dirty="0">
                 <a:solidFill>
                   <a:srgbClr val="FF0000"/>
                 </a:solidFill>
@@ -7505,11 +7512,11 @@
               <a:t>enhanced</a:t>
             </a:r>
             <a:r>
-              <a:rPr lang="en-US" i="1" dirty="0" smtClean="0"/>
+              <a:rPr lang="en-US" i="1" dirty="0"/>
               <a:t> by a </a:t>
             </a:r>
             <a:r>
-              <a:rPr lang="en-US" b="1" i="1" dirty="0" smtClean="0">
+              <a:rPr lang="en-US" b="1" i="1" dirty="0">
                 <a:solidFill>
                   <a:srgbClr val="FF0000"/>
                 </a:solidFill>
@@ -7517,20 +7524,20 @@
               <a:t>developer other than its original author</a:t>
             </a:r>
             <a:r>
-              <a:rPr lang="en-US" i="1" dirty="0" smtClean="0"/>
+              <a:rPr lang="en-US" i="1" dirty="0"/>
               <a:t>. </a:t>
             </a:r>
           </a:p>
           <a:p>
-            <a:endParaRPr lang="en-US" i="1" dirty="0" smtClean="0"/>
-          </a:p>
-          <a:p>
-            <a:r>
-              <a:rPr lang="en-US" i="1" dirty="0" smtClean="0"/>
+            <a:endParaRPr lang="en-US" i="1" dirty="0"/>
+          </a:p>
+          <a:p>
+            <a:r>
+              <a:rPr lang="en-US" i="1" dirty="0"/>
               <a:t>It has unit and acceptance </a:t>
             </a:r>
             <a:r>
-              <a:rPr lang="en-US" i="1" dirty="0" smtClean="0">
+              <a:rPr lang="en-US" i="1" dirty="0">
                 <a:solidFill>
                   <a:srgbClr val="FF0000"/>
                 </a:solidFill>
@@ -7538,21 +7545,21 @@
               <a:t>tests</a:t>
             </a:r>
             <a:r>
-              <a:rPr lang="en-US" i="1" dirty="0" smtClean="0"/>
+              <a:rPr lang="en-US" i="1" dirty="0"/>
               <a:t>. </a:t>
             </a:r>
-            <a:endParaRPr lang="el-GR" i="1" dirty="0" smtClean="0"/>
-          </a:p>
-          <a:p>
-            <a:endParaRPr lang="el-GR" i="1" dirty="0" smtClean="0"/>
-          </a:p>
-          <a:p>
-            <a:r>
-              <a:rPr lang="en-US" i="1" dirty="0" smtClean="0"/>
+            <a:endParaRPr lang="el-GR" i="1" dirty="0"/>
+          </a:p>
+          <a:p>
+            <a:endParaRPr lang="el-GR" i="1" dirty="0"/>
+          </a:p>
+          <a:p>
+            <a:r>
+              <a:rPr lang="en-US" i="1" dirty="0"/>
               <a:t>It has </a:t>
             </a:r>
             <a:r>
-              <a:rPr lang="en-US" i="1" dirty="0" smtClean="0">
+              <a:rPr lang="en-US" i="1" dirty="0">
                 <a:solidFill>
                   <a:srgbClr val="FF0000"/>
                 </a:solidFill>
@@ -7560,20 +7567,20 @@
               <a:t>meaningful names</a:t>
             </a:r>
             <a:r>
-              <a:rPr lang="en-US" i="1" dirty="0" smtClean="0"/>
+              <a:rPr lang="en-US" i="1" dirty="0"/>
               <a:t>. </a:t>
             </a:r>
           </a:p>
           <a:p>
-            <a:endParaRPr lang="en-US" i="1" dirty="0" smtClean="0"/>
-          </a:p>
-          <a:p>
-            <a:r>
-              <a:rPr lang="en-US" i="1" dirty="0" smtClean="0"/>
+            <a:endParaRPr lang="en-US" i="1" dirty="0"/>
+          </a:p>
+          <a:p>
+            <a:r>
+              <a:rPr lang="en-US" i="1" dirty="0"/>
               <a:t>It provides </a:t>
             </a:r>
             <a:r>
-              <a:rPr lang="en-US" i="1" dirty="0" smtClean="0">
+              <a:rPr lang="en-US" i="1" dirty="0">
                 <a:solidFill>
                   <a:srgbClr val="FF0000"/>
                 </a:solidFill>
@@ -7581,11 +7588,11 @@
               <a:t>one way</a:t>
             </a:r>
             <a:r>
-              <a:rPr lang="en-US" i="1" dirty="0" smtClean="0"/>
+              <a:rPr lang="en-US" i="1" dirty="0"/>
               <a:t> rather than many ways for doing </a:t>
             </a:r>
             <a:r>
-              <a:rPr lang="en-US" i="1" dirty="0" smtClean="0">
+              <a:rPr lang="en-US" i="1" dirty="0">
                 <a:solidFill>
                   <a:srgbClr val="FF0000"/>
                 </a:solidFill>
@@ -7593,20 +7600,20 @@
               <a:t>one thing</a:t>
             </a:r>
             <a:r>
-              <a:rPr lang="en-US" i="1" dirty="0" smtClean="0"/>
+              <a:rPr lang="en-US" i="1" dirty="0"/>
               <a:t>. </a:t>
             </a:r>
           </a:p>
           <a:p>
-            <a:endParaRPr lang="en-US" i="1" dirty="0" smtClean="0"/>
-          </a:p>
-          <a:p>
-            <a:r>
-              <a:rPr lang="en-US" i="1" dirty="0" smtClean="0"/>
+            <a:endParaRPr lang="en-US" i="1" dirty="0"/>
+          </a:p>
+          <a:p>
+            <a:r>
+              <a:rPr lang="en-US" i="1" dirty="0"/>
               <a:t>It has </a:t>
             </a:r>
             <a:r>
-              <a:rPr lang="en-US" i="1" dirty="0" smtClean="0">
+              <a:rPr lang="en-US" i="1" dirty="0">
                 <a:solidFill>
                   <a:srgbClr val="FF0000"/>
                 </a:solidFill>
@@ -7614,7 +7621,7 @@
               <a:t>minimal dependencies</a:t>
             </a:r>
             <a:r>
-              <a:rPr lang="en-US" i="1" dirty="0" smtClean="0"/>
+              <a:rPr lang="en-US" i="1" dirty="0"/>
               <a:t>, which are explicitly defined, and provides a clear and minimal API.….</a:t>
             </a:r>
             <a:endParaRPr lang="el-GR" dirty="0"/>
@@ -7694,7 +7701,7 @@
           <a:lstStyle/>
           <a:p>
             <a:r>
-              <a:rPr lang="en-US" dirty="0" smtClean="0"/>
+              <a:rPr lang="en-US" dirty="0"/>
               <a:t>Clean Code</a:t>
             </a:r>
             <a:endParaRPr lang="el-GR" dirty="0"/>
@@ -7724,49 +7731,49 @@
           <a:p>
             <a:pPr algn="just"/>
             <a:r>
-              <a:rPr lang="en-US" b="1" dirty="0" smtClean="0"/>
+              <a:rPr lang="en-US" b="1" dirty="0"/>
               <a:t>Michael Feathers, author of </a:t>
             </a:r>
             <a:r>
-              <a:rPr lang="en-US" b="1" i="1" dirty="0" smtClean="0"/>
+              <a:rPr lang="en-US" b="1" i="1" dirty="0"/>
               <a:t>Working </a:t>
             </a:r>
             <a:r>
-              <a:rPr lang="fr-FR" b="1" i="1" dirty="0" err="1" smtClean="0"/>
+              <a:rPr lang="fr-FR" b="1" i="1" dirty="0" err="1"/>
               <a:t>Effectively</a:t>
             </a:r>
             <a:r>
-              <a:rPr lang="fr-FR" b="1" i="1" dirty="0" smtClean="0"/>
+              <a:rPr lang="fr-FR" b="1" i="1" dirty="0"/>
               <a:t> </a:t>
             </a:r>
             <a:r>
-              <a:rPr lang="fr-FR" b="1" i="1" dirty="0" err="1" smtClean="0"/>
+              <a:rPr lang="fr-FR" b="1" i="1" dirty="0" err="1"/>
               <a:t>with</a:t>
             </a:r>
             <a:r>
-              <a:rPr lang="fr-FR" b="1" i="1" dirty="0" smtClean="0"/>
+              <a:rPr lang="fr-FR" b="1" i="1" dirty="0"/>
               <a:t> </a:t>
             </a:r>
             <a:r>
-              <a:rPr lang="fr-FR" b="1" i="1" dirty="0" err="1" smtClean="0"/>
+              <a:rPr lang="fr-FR" b="1" i="1" dirty="0" err="1"/>
               <a:t>Legacy</a:t>
             </a:r>
             <a:r>
-              <a:rPr lang="fr-FR" b="1" i="1" dirty="0" smtClean="0"/>
+              <a:rPr lang="fr-FR" b="1" i="1" dirty="0"/>
               <a:t> Code</a:t>
             </a:r>
           </a:p>
           <a:p>
-            <a:endParaRPr lang="en-US" i="1" dirty="0" smtClean="0"/>
+            <a:endParaRPr lang="en-US" i="1" dirty="0"/>
           </a:p>
           <a:p>
             <a:pPr algn="just"/>
             <a:r>
-              <a:rPr lang="en-US" i="1" dirty="0" smtClean="0"/>
+              <a:rPr lang="en-US" i="1" dirty="0"/>
               <a:t>….. </a:t>
             </a:r>
             <a:r>
-              <a:rPr lang="en-US" i="1" dirty="0" smtClean="0">
+              <a:rPr lang="en-US" i="1" dirty="0">
                 <a:solidFill>
                   <a:srgbClr val="FF0000"/>
                 </a:solidFill>
@@ -7774,7 +7781,7 @@
               <a:t>Clean code always looks like it was written by someone who cares</a:t>
             </a:r>
             <a:r>
-              <a:rPr lang="en-US" i="1" dirty="0" smtClean="0"/>
+              <a:rPr lang="en-US" i="1" dirty="0"/>
               <a:t>….</a:t>
             </a:r>
           </a:p>
@@ -7853,7 +7860,7 @@
           <a:lstStyle/>
           <a:p>
             <a:r>
-              <a:rPr lang="en-US" dirty="0" smtClean="0"/>
+              <a:rPr lang="en-US" dirty="0"/>
               <a:t>Clean Code</a:t>
             </a:r>
             <a:endParaRPr lang="el-GR" dirty="0"/>
@@ -7883,74 +7890,74 @@
           <a:p>
             <a:pPr algn="just"/>
             <a:r>
-              <a:rPr lang="en-US" b="1" dirty="0" smtClean="0"/>
+              <a:rPr lang="en-US" b="1" dirty="0"/>
               <a:t>Ron Jeffries, author of </a:t>
             </a:r>
             <a:r>
-              <a:rPr lang="en-US" b="1" i="1" dirty="0" smtClean="0"/>
+              <a:rPr lang="en-US" b="1" i="1" dirty="0"/>
               <a:t>Extreme Programming </a:t>
             </a:r>
             <a:r>
-              <a:rPr lang="fr-FR" b="1" i="1" dirty="0" err="1" smtClean="0"/>
+              <a:rPr lang="fr-FR" b="1" i="1" dirty="0" err="1"/>
               <a:t>Installed</a:t>
             </a:r>
             <a:r>
-              <a:rPr lang="fr-FR" b="1" i="1" dirty="0" smtClean="0"/>
+              <a:rPr lang="fr-FR" b="1" i="1" dirty="0"/>
               <a:t> and </a:t>
             </a:r>
             <a:r>
-              <a:rPr lang="fr-FR" b="1" i="1" dirty="0" err="1" smtClean="0"/>
+              <a:rPr lang="fr-FR" b="1" i="1" dirty="0" err="1"/>
               <a:t>Extreme</a:t>
             </a:r>
             <a:r>
-              <a:rPr lang="fr-FR" b="1" i="1" dirty="0" smtClean="0"/>
+              <a:rPr lang="fr-FR" b="1" i="1" dirty="0"/>
               <a:t> </a:t>
             </a:r>
             <a:r>
-              <a:rPr lang="fr-FR" b="1" i="1" dirty="0" err="1" smtClean="0"/>
+              <a:rPr lang="fr-FR" b="1" i="1" dirty="0" err="1"/>
               <a:t>Programming</a:t>
             </a:r>
             <a:r>
-              <a:rPr lang="fr-FR" b="1" i="1" dirty="0" smtClean="0"/>
+              <a:rPr lang="fr-FR" b="1" i="1" dirty="0"/>
               <a:t> </a:t>
             </a:r>
             <a:r>
-              <a:rPr lang="fr-FR" b="1" i="1" dirty="0" err="1" smtClean="0"/>
+              <a:rPr lang="fr-FR" b="1" i="1" dirty="0" err="1"/>
               <a:t>Adventures</a:t>
             </a:r>
             <a:r>
-              <a:rPr lang="fr-FR" b="1" i="1" dirty="0" smtClean="0"/>
+              <a:rPr lang="fr-FR" b="1" i="1" dirty="0"/>
               <a:t> in C#</a:t>
             </a:r>
           </a:p>
           <a:p>
-            <a:endParaRPr lang="en-US" dirty="0" smtClean="0"/>
-          </a:p>
-          <a:p>
-            <a:r>
-              <a:rPr lang="en-US" dirty="0" smtClean="0"/>
+            <a:endParaRPr lang="en-US" dirty="0"/>
+          </a:p>
+          <a:p>
+            <a:r>
+              <a:rPr lang="en-US" dirty="0"/>
               <a:t>S</a:t>
             </a:r>
             <a:r>
-              <a:rPr lang="en-US" i="1" dirty="0" smtClean="0"/>
+              <a:rPr lang="en-US" i="1" dirty="0"/>
               <a:t>imple code:</a:t>
             </a:r>
           </a:p>
           <a:p>
             <a:r>
-              <a:rPr lang="fr-FR" i="1" dirty="0" smtClean="0"/>
+              <a:rPr lang="fr-FR" i="1" dirty="0"/>
               <a:t>• </a:t>
             </a:r>
             <a:r>
-              <a:rPr lang="fr-FR" i="1" dirty="0" err="1" smtClean="0"/>
+              <a:rPr lang="fr-FR" i="1" dirty="0" err="1"/>
               <a:t>Runs</a:t>
             </a:r>
             <a:r>
-              <a:rPr lang="fr-FR" i="1" dirty="0" smtClean="0"/>
+              <a:rPr lang="fr-FR" i="1" dirty="0"/>
               <a:t> </a:t>
             </a:r>
             <a:r>
-              <a:rPr lang="fr-FR" i="1" dirty="0" smtClean="0">
+              <a:rPr lang="fr-FR" i="1" dirty="0">
                 <a:solidFill>
                   <a:srgbClr val="FF0000"/>
                 </a:solidFill>
@@ -7958,25 +7965,25 @@
               <a:t>all the tests</a:t>
             </a:r>
             <a:r>
-              <a:rPr lang="fr-FR" i="1" dirty="0" smtClean="0"/>
+              <a:rPr lang="fr-FR" i="1" dirty="0"/>
               <a:t>;</a:t>
             </a:r>
           </a:p>
           <a:p>
             <a:r>
-              <a:rPr lang="fr-FR" i="1" dirty="0" smtClean="0"/>
+              <a:rPr lang="fr-FR" i="1" dirty="0"/>
               <a:t>• </a:t>
             </a:r>
             <a:r>
-              <a:rPr lang="fr-FR" i="1" dirty="0" err="1" smtClean="0"/>
+              <a:rPr lang="fr-FR" i="1" dirty="0" err="1"/>
               <a:t>Contains</a:t>
             </a:r>
             <a:r>
-              <a:rPr lang="fr-FR" i="1" dirty="0" smtClean="0"/>
+              <a:rPr lang="fr-FR" i="1" dirty="0"/>
               <a:t> </a:t>
             </a:r>
             <a:r>
-              <a:rPr lang="fr-FR" i="1" dirty="0" smtClean="0">
+              <a:rPr lang="fr-FR" i="1" dirty="0">
                 <a:solidFill>
                   <a:srgbClr val="FF0000"/>
                 </a:solidFill>
@@ -7984,17 +7991,17 @@
               <a:t>no duplication</a:t>
             </a:r>
             <a:r>
-              <a:rPr lang="fr-FR" i="1" dirty="0" smtClean="0"/>
+              <a:rPr lang="fr-FR" i="1" dirty="0"/>
               <a:t>;</a:t>
             </a:r>
           </a:p>
           <a:p>
             <a:r>
-              <a:rPr lang="en-US" i="1" dirty="0" smtClean="0"/>
+              <a:rPr lang="en-US" i="1" dirty="0"/>
               <a:t>• Expresses </a:t>
             </a:r>
             <a:r>
-              <a:rPr lang="en-US" i="1" dirty="0" smtClean="0">
+              <a:rPr lang="en-US" i="1" dirty="0">
                 <a:solidFill>
                   <a:srgbClr val="FF0000"/>
                 </a:solidFill>
@@ -8002,21 +8009,21 @@
               <a:t>all the design ideas </a:t>
             </a:r>
             <a:r>
-              <a:rPr lang="en-US" i="1" dirty="0" smtClean="0"/>
+              <a:rPr lang="en-US" i="1" dirty="0"/>
               <a:t>that are in the </a:t>
             </a:r>
             <a:r>
-              <a:rPr lang="fr-FR" i="1" dirty="0" smtClean="0"/>
+              <a:rPr lang="fr-FR" i="1" dirty="0"/>
               <a:t>system;</a:t>
             </a:r>
           </a:p>
           <a:p>
             <a:r>
-              <a:rPr lang="en-US" i="1" dirty="0" smtClean="0"/>
+              <a:rPr lang="en-US" i="1" dirty="0"/>
               <a:t>• </a:t>
             </a:r>
             <a:r>
-              <a:rPr lang="en-US" i="1" dirty="0" smtClean="0">
+              <a:rPr lang="en-US" i="1" dirty="0">
                 <a:solidFill>
                   <a:srgbClr val="FF0000"/>
                 </a:solidFill>
@@ -8024,11 +8031,11 @@
               <a:t>Minimizes</a:t>
             </a:r>
             <a:r>
-              <a:rPr lang="en-US" i="1" dirty="0" smtClean="0"/>
+              <a:rPr lang="en-US" i="1" dirty="0"/>
               <a:t> the number of </a:t>
             </a:r>
             <a:r>
-              <a:rPr lang="en-US" i="1" dirty="0" smtClean="0">
+              <a:rPr lang="en-US" i="1" dirty="0">
                 <a:solidFill>
                   <a:srgbClr val="FF0000"/>
                 </a:solidFill>
@@ -8036,7 +8043,7 @@
               <a:t>entities</a:t>
             </a:r>
             <a:r>
-              <a:rPr lang="en-US" i="1" dirty="0" smtClean="0"/>
+              <a:rPr lang="en-US" i="1" dirty="0"/>
               <a:t> such as classes, methods, functions, and the like.</a:t>
             </a:r>
             <a:endParaRPr lang="el-GR" dirty="0"/>
@@ -8116,7 +8123,7 @@
           <a:lstStyle/>
           <a:p>
             <a:r>
-              <a:rPr lang="en-US" dirty="0" smtClean="0"/>
+              <a:rPr lang="en-US" dirty="0"/>
               <a:t>Clean Code</a:t>
             </a:r>
             <a:endParaRPr lang="el-GR" dirty="0"/>
@@ -8177,36 +8184,36 @@
           <a:lstStyle/>
           <a:p>
             <a:r>
-              <a:rPr lang="en-US" b="1" dirty="0" smtClean="0"/>
+              <a:rPr lang="en-US" b="1" dirty="0"/>
               <a:t>Ward Cunningham, </a:t>
             </a:r>
             <a:r>
-              <a:rPr lang="fr-FR" b="1" dirty="0" smtClean="0"/>
+              <a:rPr lang="fr-FR" b="1" dirty="0"/>
               <a:t>motive force </a:t>
             </a:r>
             <a:r>
-              <a:rPr lang="fr-FR" b="1" dirty="0" err="1" smtClean="0"/>
+              <a:rPr lang="fr-FR" b="1" dirty="0" err="1"/>
               <a:t>behind</a:t>
             </a:r>
             <a:r>
-              <a:rPr lang="fr-FR" b="1" dirty="0" smtClean="0"/>
+              <a:rPr lang="fr-FR" b="1" dirty="0"/>
               <a:t> </a:t>
             </a:r>
             <a:r>
-              <a:rPr lang="en-US" b="1" dirty="0" smtClean="0"/>
+              <a:rPr lang="en-US" b="1" dirty="0"/>
               <a:t>Design Patterns.  The godfather of all those who care about code.</a:t>
             </a:r>
           </a:p>
           <a:p>
-            <a:endParaRPr lang="en-US" i="1" dirty="0" smtClean="0"/>
-          </a:p>
-          <a:p>
-            <a:r>
-              <a:rPr lang="en-US" i="1" dirty="0" smtClean="0"/>
+            <a:endParaRPr lang="en-US" i="1" dirty="0"/>
+          </a:p>
+          <a:p>
+            <a:r>
+              <a:rPr lang="en-US" i="1" dirty="0"/>
               <a:t>You know you are working on clean code when </a:t>
             </a:r>
             <a:r>
-              <a:rPr lang="en-US" i="1" dirty="0" smtClean="0">
+              <a:rPr lang="en-US" i="1" dirty="0">
                 <a:solidFill>
                   <a:srgbClr val="FF0000"/>
                 </a:solidFill>
@@ -8216,7 +8223,7 @@
           </a:p>
           <a:p>
             <a:r>
-              <a:rPr lang="en-US" i="1" dirty="0" smtClean="0">
+              <a:rPr lang="en-US" i="1" dirty="0">
                 <a:solidFill>
                   <a:srgbClr val="FF0000"/>
                 </a:solidFill>
@@ -8224,11 +8231,11 @@
               <a:t>routine you read</a:t>
             </a:r>
             <a:r>
-              <a:rPr lang="en-US" i="1" dirty="0" smtClean="0"/>
+              <a:rPr lang="en-US" i="1" dirty="0"/>
               <a:t> turns out to be </a:t>
             </a:r>
             <a:r>
-              <a:rPr lang="en-US" i="1" dirty="0" smtClean="0">
+              <a:rPr lang="en-US" i="1" dirty="0">
                 <a:solidFill>
                   <a:srgbClr val="FF0000"/>
                 </a:solidFill>
@@ -8238,7 +8245,7 @@
           </a:p>
           <a:p>
             <a:r>
-              <a:rPr lang="en-US" i="1" dirty="0" smtClean="0">
+              <a:rPr lang="en-US" i="1" dirty="0">
                 <a:solidFill>
                   <a:srgbClr val="FF0000"/>
                 </a:solidFill>
@@ -8246,7 +8253,7 @@
               <a:t>you expected</a:t>
             </a:r>
             <a:r>
-              <a:rPr lang="en-US" i="1" dirty="0" smtClean="0"/>
+              <a:rPr lang="en-US" i="1" dirty="0"/>
               <a:t>….</a:t>
             </a:r>
             <a:endParaRPr lang="el-GR" dirty="0"/>
@@ -8294,7 +8301,7 @@
           <a:lstStyle/>
           <a:p>
             <a:r>
-              <a:rPr lang="en-US" dirty="0" smtClean="0"/>
+              <a:rPr lang="en-US" dirty="0"/>
               <a:t>Clean Code</a:t>
             </a:r>
             <a:endParaRPr lang="el-GR" dirty="0"/>
@@ -8324,22 +8331,22 @@
           <a:p>
             <a:pPr algn="just"/>
             <a:r>
-              <a:rPr lang="en-US" b="1" dirty="0" smtClean="0"/>
+              <a:rPr lang="en-US" b="1" dirty="0"/>
               <a:t>R. C. Martin, a.k.a. “Uncle Bob”</a:t>
             </a:r>
           </a:p>
           <a:p>
             <a:pPr algn="just"/>
-            <a:endParaRPr lang="en-US" b="1" dirty="0" smtClean="0"/>
+            <a:endParaRPr lang="en-US" b="1" dirty="0"/>
           </a:p>
           <a:p>
             <a:pPr algn="just"/>
             <a:r>
-              <a:rPr lang="en-US" dirty="0" smtClean="0"/>
+              <a:rPr lang="en-US" dirty="0"/>
               <a:t>The next time you write a line of code, remember </a:t>
             </a:r>
             <a:r>
-              <a:rPr lang="en-US" dirty="0" smtClean="0">
+              <a:rPr lang="en-US" dirty="0">
                 <a:solidFill>
                   <a:srgbClr val="FF0000"/>
                 </a:solidFill>
@@ -8347,11 +8354,11 @@
               <a:t>you are an author</a:t>
             </a:r>
             <a:r>
-              <a:rPr lang="en-US" dirty="0" smtClean="0"/>
+              <a:rPr lang="en-US" dirty="0"/>
               <a:t>, writing for </a:t>
             </a:r>
             <a:r>
-              <a:rPr lang="en-US" dirty="0" smtClean="0">
+              <a:rPr lang="en-US" dirty="0">
                 <a:solidFill>
                   <a:srgbClr val="FF0000"/>
                 </a:solidFill>
@@ -8359,41 +8366,41 @@
               <a:t>readers</a:t>
             </a:r>
             <a:r>
-              <a:rPr lang="en-US" dirty="0" smtClean="0"/>
+              <a:rPr lang="en-US" dirty="0"/>
               <a:t> who will judge your effort.</a:t>
             </a:r>
           </a:p>
           <a:p>
             <a:pPr algn="just"/>
-            <a:endParaRPr lang="en-US" dirty="0" smtClean="0"/>
+            <a:endParaRPr lang="en-US" dirty="0"/>
           </a:p>
           <a:p>
             <a:pPr algn="just"/>
             <a:r>
-              <a:rPr lang="en-US" dirty="0" smtClean="0"/>
+              <a:rPr lang="en-US" dirty="0"/>
               <a:t>It’s not enough to write the code well. The code has to be </a:t>
             </a:r>
             <a:r>
-              <a:rPr lang="en-US" i="1" dirty="0" smtClean="0"/>
+              <a:rPr lang="en-US" i="1" dirty="0"/>
               <a:t>kept clean over time. We’ve all </a:t>
             </a:r>
             <a:r>
-              <a:rPr lang="en-US" dirty="0" smtClean="0"/>
+              <a:rPr lang="en-US" dirty="0"/>
               <a:t>seen code rot and degrade as time passes. </a:t>
             </a:r>
           </a:p>
           <a:p>
             <a:pPr algn="just"/>
-            <a:endParaRPr lang="en-US" dirty="0" smtClean="0"/>
+            <a:endParaRPr lang="en-US" dirty="0"/>
           </a:p>
           <a:p>
             <a:pPr algn="just"/>
             <a:r>
-              <a:rPr lang="en-US" dirty="0" smtClean="0"/>
+              <a:rPr lang="en-US" dirty="0"/>
               <a:t>The </a:t>
             </a:r>
             <a:r>
-              <a:rPr lang="en-US" dirty="0" smtClean="0">
+              <a:rPr lang="en-US" dirty="0">
                 <a:solidFill>
                   <a:srgbClr val="FF0000"/>
                 </a:solidFill>
@@ -8401,11 +8408,11 @@
               <a:t>Boy Scouts</a:t>
             </a:r>
             <a:r>
-              <a:rPr lang="en-US" dirty="0" smtClean="0"/>
+              <a:rPr lang="en-US" dirty="0"/>
               <a:t> have a </a:t>
             </a:r>
             <a:r>
-              <a:rPr lang="en-US" dirty="0" smtClean="0">
+              <a:rPr lang="en-US" dirty="0">
                 <a:solidFill>
                   <a:srgbClr val="FF0000"/>
                 </a:solidFill>
@@ -8413,25 +8420,25 @@
               <a:t>simple rule </a:t>
             </a:r>
             <a:r>
-              <a:rPr lang="en-US" dirty="0" smtClean="0"/>
+              <a:rPr lang="en-US" dirty="0"/>
               <a:t>that we can apply to our profession.</a:t>
             </a:r>
           </a:p>
           <a:p>
             <a:pPr algn="just"/>
-            <a:endParaRPr lang="en-US" i="1" dirty="0" smtClean="0"/>
+            <a:endParaRPr lang="en-US" i="1" dirty="0"/>
           </a:p>
           <a:p>
             <a:pPr algn="just"/>
             <a:r>
-              <a:rPr lang="en-US" b="1" i="1" dirty="0" smtClean="0">
+              <a:rPr lang="en-US" b="1" i="1" dirty="0">
                 <a:solidFill>
                   <a:srgbClr val="FF0000"/>
                 </a:solidFill>
               </a:rPr>
               <a:t>Leave the campground cleaner than you found it.</a:t>
             </a:r>
-            <a:endParaRPr lang="en-US" b="1" dirty="0" smtClean="0">
+            <a:endParaRPr lang="en-US" b="1" dirty="0">
               <a:solidFill>
                 <a:srgbClr val="FF0000"/>
               </a:solidFill>
@@ -8512,7 +8519,7 @@
           <a:lstStyle/>
           <a:p>
             <a:r>
-              <a:rPr lang="en-US" dirty="0" smtClean="0"/>
+              <a:rPr lang="en-US" dirty="0"/>
               <a:t>What will we study ?</a:t>
             </a:r>
             <a:endParaRPr lang="el-GR" dirty="0"/>
@@ -8534,53 +8541,46 @@
           <a:bodyPr/>
           <a:lstStyle/>
           <a:p>
-            <a:endParaRPr lang="en-US" dirty="0" smtClean="0"/>
-          </a:p>
-          <a:p>
-            <a:r>
-              <a:rPr lang="en-US" dirty="0" smtClean="0"/>
+            <a:endParaRPr lang="en-US" dirty="0"/>
+          </a:p>
+          <a:p>
+            <a:r>
+              <a:rPr lang="en-US" dirty="0"/>
               <a:t>Clean Code Rules</a:t>
             </a:r>
           </a:p>
           <a:p>
             <a:pPr lvl="1"/>
             <a:r>
-              <a:rPr lang="en-US" dirty="0" smtClean="0"/>
+              <a:rPr lang="en-US" dirty="0"/>
               <a:t>Meaningful Names</a:t>
             </a:r>
           </a:p>
           <a:p>
             <a:pPr lvl="1"/>
             <a:r>
-              <a:rPr lang="en-US" dirty="0" smtClean="0"/>
+              <a:rPr lang="en-US" dirty="0"/>
               <a:t>Comments</a:t>
             </a:r>
           </a:p>
           <a:p>
             <a:pPr lvl="1"/>
             <a:r>
-              <a:rPr lang="en-US" dirty="0" smtClean="0"/>
+              <a:rPr lang="en-US" dirty="0"/>
               <a:t>Formatting</a:t>
             </a:r>
           </a:p>
           <a:p>
             <a:pPr lvl="1"/>
             <a:r>
-              <a:rPr lang="en-US" dirty="0" smtClean="0"/>
+              <a:rPr lang="en-US" dirty="0"/>
               <a:t>Functions/Methods</a:t>
             </a:r>
           </a:p>
           <a:p>
             <a:pPr lvl="1"/>
             <a:r>
-              <a:rPr lang="en-US" dirty="0" smtClean="0"/>
-              <a:t>Error Handling</a:t>
-            </a:r>
-          </a:p>
-          <a:p>
-            <a:pPr lvl="1"/>
-            <a:r>
-              <a:rPr lang="en-US" dirty="0" smtClean="0"/>
+              <a:rPr lang="en-US" dirty="0"/>
               <a:t>Classes</a:t>
             </a:r>
           </a:p>
@@ -8653,10 +8653,9 @@
           <a:lstStyle/>
           <a:p>
             <a:r>
-              <a:rPr lang="en-US" dirty="0" smtClean="0"/>
+              <a:rPr lang="en-US" dirty="0"/>
               <a:t>What will we study ?</a:t>
             </a:r>
-            <a:endParaRPr lang="en-US" dirty="0"/>
           </a:p>
         </p:txBody>
       </p:sp>
@@ -8683,92 +8682,92 @@
           <a:lstStyle/>
           <a:p>
             <a:r>
-              <a:rPr lang="en-US" dirty="0" smtClean="0"/>
+              <a:rPr lang="en-US" dirty="0"/>
               <a:t>Code Smells</a:t>
             </a:r>
           </a:p>
           <a:p>
             <a:pPr lvl="1"/>
             <a:r>
-              <a:rPr lang="en-US" dirty="0" smtClean="0"/>
+              <a:rPr lang="en-US" dirty="0"/>
               <a:t>Long Method</a:t>
             </a:r>
           </a:p>
           <a:p>
             <a:pPr lvl="1"/>
             <a:r>
-              <a:rPr lang="en-US" dirty="0" smtClean="0"/>
+              <a:rPr lang="en-US" dirty="0"/>
               <a:t>God Class</a:t>
             </a:r>
           </a:p>
           <a:p>
             <a:pPr lvl="1"/>
             <a:r>
-              <a:rPr lang="en-US" dirty="0" smtClean="0"/>
+              <a:rPr lang="en-US" dirty="0"/>
               <a:t>Long </a:t>
             </a:r>
             <a:r>
-              <a:rPr lang="en-US" dirty="0" err="1" smtClean="0"/>
+              <a:rPr lang="en-US" dirty="0" err="1"/>
               <a:t>Param</a:t>
             </a:r>
             <a:r>
-              <a:rPr lang="en-US" dirty="0" smtClean="0"/>
+              <a:rPr lang="en-US" dirty="0"/>
               <a:t> List</a:t>
             </a:r>
           </a:p>
           <a:p>
             <a:pPr lvl="1"/>
             <a:r>
-              <a:rPr lang="en-US" dirty="0" smtClean="0"/>
+              <a:rPr lang="en-US" dirty="0"/>
               <a:t>Primitive Obsession</a:t>
             </a:r>
           </a:p>
           <a:p>
             <a:pPr lvl="1"/>
             <a:r>
-              <a:rPr lang="en-US" dirty="0" smtClean="0"/>
+              <a:rPr lang="en-US" dirty="0"/>
               <a:t>Data Container</a:t>
             </a:r>
           </a:p>
           <a:p>
             <a:pPr lvl="1"/>
             <a:r>
-              <a:rPr lang="en-US" dirty="0" smtClean="0"/>
+              <a:rPr lang="en-US" dirty="0"/>
               <a:t>Duplication</a:t>
             </a:r>
           </a:p>
           <a:p>
             <a:pPr lvl="1"/>
             <a:r>
-              <a:rPr lang="en-US" dirty="0" smtClean="0"/>
+              <a:rPr lang="en-US" dirty="0"/>
               <a:t>Feature Envy</a:t>
             </a:r>
           </a:p>
           <a:p>
             <a:pPr lvl="1"/>
             <a:r>
-              <a:rPr lang="en-US" dirty="0" smtClean="0"/>
+              <a:rPr lang="en-US" dirty="0"/>
               <a:t>Shotgun Surgery  </a:t>
             </a:r>
           </a:p>
           <a:p>
             <a:pPr lvl="1"/>
             <a:r>
-              <a:rPr lang="en-US" dirty="0" smtClean="0"/>
+              <a:rPr lang="en-US" dirty="0"/>
               <a:t>Message Chains</a:t>
             </a:r>
           </a:p>
           <a:p>
             <a:pPr lvl="1"/>
             <a:r>
-              <a:rPr lang="en-US" dirty="0" smtClean="0"/>
+              <a:rPr lang="en-US" dirty="0"/>
               <a:t>Middle Man</a:t>
             </a:r>
           </a:p>
           <a:p>
             <a:pPr lvl="1"/>
             <a:r>
-              <a:rPr lang="en-US" dirty="0" smtClean="0"/>
+              <a:rPr lang="en-US" dirty="0"/>
               <a:t>……..</a:t>
             </a:r>
           </a:p>
@@ -8797,42 +8796,42 @@
           <a:lstStyle/>
           <a:p>
             <a:r>
-              <a:rPr lang="en-US" dirty="0" smtClean="0"/>
+              <a:rPr lang="en-US" dirty="0"/>
               <a:t>Refactoring Techniques</a:t>
             </a:r>
           </a:p>
           <a:p>
             <a:pPr lvl="1"/>
             <a:r>
-              <a:rPr lang="en-US" dirty="0" smtClean="0"/>
+              <a:rPr lang="en-US" dirty="0"/>
               <a:t>Composing Methods</a:t>
             </a:r>
           </a:p>
           <a:p>
             <a:pPr lvl="1"/>
             <a:r>
-              <a:rPr lang="en-US" dirty="0" smtClean="0"/>
+              <a:rPr lang="en-US" dirty="0"/>
               <a:t>Simplifying Conditionals</a:t>
             </a:r>
           </a:p>
           <a:p>
             <a:pPr lvl="1"/>
             <a:r>
-              <a:rPr lang="en-US" dirty="0" smtClean="0"/>
+              <a:rPr lang="en-US" dirty="0"/>
               <a:t>Moving Features</a:t>
             </a:r>
           </a:p>
           <a:p>
             <a:pPr lvl="1"/>
             <a:r>
-              <a:rPr lang="en-US" dirty="0" smtClean="0"/>
+              <a:rPr lang="en-US" dirty="0"/>
               <a:t>Generalization</a:t>
             </a:r>
           </a:p>
           <a:p>
             <a:pPr lvl="1"/>
             <a:r>
-              <a:rPr lang="en-US" dirty="0" smtClean="0"/>
+              <a:rPr lang="en-US" dirty="0"/>
               <a:t>Simplifying Method Calls</a:t>
             </a:r>
           </a:p>
@@ -8911,7 +8910,7 @@
           <a:lstStyle/>
           <a:p>
             <a:r>
-              <a:rPr lang="en-US" dirty="0" smtClean="0"/>
+              <a:rPr lang="en-US" dirty="0"/>
               <a:t>Readings </a:t>
             </a:r>
             <a:endParaRPr lang="el-GR" dirty="0"/>
@@ -8930,20 +8929,22 @@
         </p:nvSpPr>
         <p:spPr/>
         <p:txBody>
-          <a:bodyPr/>
-          <a:lstStyle/>
-          <a:p>
-            <a:endParaRPr lang="en-US" dirty="0" smtClean="0"/>
-          </a:p>
-          <a:p>
-            <a:r>
-              <a:rPr lang="el-GR" dirty="0" err="1" smtClean="0">
+          <a:bodyPr>
+            <a:normAutofit/>
+          </a:bodyPr>
+          <a:lstStyle/>
+          <a:p>
+            <a:endParaRPr lang="en-US" dirty="0"/>
+          </a:p>
+          <a:p>
+            <a:r>
+              <a:rPr lang="el-GR" sz="2400" dirty="0" err="1">
                 <a:latin typeface="Gill Sans MT" pitchFamily="34" charset="0"/>
               </a:rPr>
               <a:t>Αντικειμενοστρεφής</a:t>
             </a:r>
             <a:r>
-              <a:rPr lang="el-GR" dirty="0" smtClean="0">
+              <a:rPr lang="el-GR" sz="2400" dirty="0">
                 <a:latin typeface="Gill Sans MT" pitchFamily="34" charset="0"/>
               </a:rPr>
               <a:t> Σχεδίαση, Α. Χατζηγεωργίου</a:t>
@@ -8951,96 +8952,151 @@
           </a:p>
           <a:p>
             <a:r>
-              <a:rPr lang="el-GR" dirty="0" smtClean="0">
+              <a:rPr lang="el-GR" sz="2400" dirty="0">
                 <a:latin typeface="Gill Sans MT" pitchFamily="34" charset="0"/>
               </a:rPr>
               <a:t>Ανάπτυξη Προγραμμάτων σε </a:t>
             </a:r>
             <a:r>
-              <a:rPr lang="en-US" dirty="0" smtClean="0">
+              <a:rPr lang="en-US" sz="2400" dirty="0">
                 <a:latin typeface="Gill Sans MT" pitchFamily="34" charset="0"/>
               </a:rPr>
               <a:t>Java, B. </a:t>
             </a:r>
             <a:r>
-              <a:rPr lang="en-US" dirty="0" err="1" smtClean="0">
+              <a:rPr lang="en-US" sz="2400" dirty="0" err="1">
                 <a:latin typeface="Gill Sans MT" pitchFamily="34" charset="0"/>
               </a:rPr>
               <a:t>Liskov</a:t>
             </a:r>
             <a:r>
-              <a:rPr lang="en-US" dirty="0" smtClean="0">
+              <a:rPr lang="en-US" sz="2400" dirty="0">
                 <a:latin typeface="Gill Sans MT" pitchFamily="34" charset="0"/>
               </a:rPr>
               <a:t>, J </a:t>
             </a:r>
             <a:r>
-              <a:rPr lang="en-US" dirty="0" err="1" smtClean="0">
+              <a:rPr lang="en-US" sz="2400" dirty="0" err="1">
                 <a:latin typeface="Gill Sans MT" pitchFamily="34" charset="0"/>
               </a:rPr>
               <a:t>Guttag</a:t>
             </a:r>
-            <a:endParaRPr lang="en-US" dirty="0" smtClean="0">
+            <a:endParaRPr lang="en-US" sz="2400" dirty="0">
               <a:latin typeface="Gill Sans MT" pitchFamily="34" charset="0"/>
             </a:endParaRPr>
           </a:p>
           <a:p>
-            <a:endParaRPr lang="fr-FR" dirty="0" smtClean="0">
+            <a:endParaRPr lang="fr-FR" sz="2400" dirty="0">
               <a:latin typeface="Gill Sans MT" pitchFamily="34" charset="0"/>
             </a:endParaRPr>
           </a:p>
           <a:p>
             <a:r>
-              <a:rPr lang="fr-FR" dirty="0" smtClean="0"/>
+              <a:rPr lang="fr-FR" sz="2400" dirty="0">
+                <a:latin typeface="Gill Sans MT" pitchFamily="34" charset="0"/>
+              </a:rPr>
               <a:t>Clean Code - A </a:t>
             </a:r>
             <a:r>
-              <a:rPr lang="fr-FR" dirty="0" err="1" smtClean="0"/>
+              <a:rPr lang="fr-FR" sz="2400" dirty="0" err="1">
+                <a:latin typeface="Gill Sans MT" pitchFamily="34" charset="0"/>
+              </a:rPr>
               <a:t>Handbook</a:t>
             </a:r>
             <a:r>
-              <a:rPr lang="fr-FR" dirty="0" smtClean="0"/>
+              <a:rPr lang="fr-FR" sz="2400" dirty="0">
+                <a:latin typeface="Gill Sans MT" pitchFamily="34" charset="0"/>
+              </a:rPr>
               <a:t> of Agile Software </a:t>
             </a:r>
             <a:r>
-              <a:rPr lang="fr-FR" dirty="0" err="1" smtClean="0"/>
+              <a:rPr lang="fr-FR" sz="2400" dirty="0" err="1">
+                <a:latin typeface="Gill Sans MT" pitchFamily="34" charset="0"/>
+              </a:rPr>
               <a:t>Craftsmanship</a:t>
             </a:r>
             <a:r>
-              <a:rPr lang="fr-FR" dirty="0" smtClean="0"/>
+              <a:rPr lang="fr-FR" sz="2400" dirty="0">
+                <a:latin typeface="Gill Sans MT" pitchFamily="34" charset="0"/>
+              </a:rPr>
               <a:t>, R. C. Martin</a:t>
             </a:r>
           </a:p>
           <a:p>
             <a:r>
-              <a:rPr lang="fr-FR" dirty="0" err="1" smtClean="0"/>
+              <a:rPr lang="fr-FR" sz="2400" dirty="0" err="1">
+                <a:latin typeface="Gill Sans MT" pitchFamily="34" charset="0"/>
+              </a:rPr>
               <a:t>Refactoring</a:t>
             </a:r>
             <a:r>
-              <a:rPr lang="fr-FR" dirty="0" smtClean="0"/>
+              <a:rPr lang="fr-FR" sz="2400" dirty="0">
+                <a:latin typeface="Gill Sans MT" pitchFamily="34" charset="0"/>
+              </a:rPr>
               <a:t> - </a:t>
             </a:r>
             <a:r>
-              <a:rPr lang="fr-FR" dirty="0" err="1" smtClean="0"/>
+              <a:rPr lang="fr-FR" sz="2400" dirty="0" err="1">
+                <a:latin typeface="Gill Sans MT" pitchFamily="34" charset="0"/>
+              </a:rPr>
               <a:t>Improving</a:t>
             </a:r>
             <a:r>
-              <a:rPr lang="fr-FR" dirty="0" smtClean="0"/>
+              <a:rPr lang="fr-FR" sz="2400" dirty="0">
+                <a:latin typeface="Gill Sans MT" pitchFamily="34" charset="0"/>
+              </a:rPr>
               <a:t> the Design of </a:t>
             </a:r>
             <a:r>
-              <a:rPr lang="fr-FR" dirty="0" err="1" smtClean="0"/>
+              <a:rPr lang="fr-FR" sz="2400" dirty="0" err="1">
+                <a:latin typeface="Gill Sans MT" pitchFamily="34" charset="0"/>
+              </a:rPr>
               <a:t>Existing</a:t>
             </a:r>
             <a:r>
-              <a:rPr lang="fr-FR" dirty="0" smtClean="0"/>
+              <a:rPr lang="fr-FR" sz="2400" dirty="0">
+                <a:latin typeface="Gill Sans MT" pitchFamily="34" charset="0"/>
+              </a:rPr>
               <a:t> Code, </a:t>
             </a:r>
             <a:r>
-              <a:rPr lang="fr-FR" dirty="0" err="1" smtClean="0"/>
+              <a:rPr lang="fr-FR" sz="2400" dirty="0" err="1">
+                <a:latin typeface="Gill Sans MT" pitchFamily="34" charset="0"/>
+              </a:rPr>
               <a:t>M.Fowler</a:t>
             </a:r>
-            <a:endParaRPr lang="fr-FR" dirty="0" smtClean="0"/>
+            <a:endParaRPr lang="fr-FR" sz="2400" dirty="0">
+              <a:latin typeface="Gill Sans MT" pitchFamily="34" charset="0"/>
+            </a:endParaRPr>
+          </a:p>
+          <a:p>
+            <a:r>
+              <a:rPr lang="fr-FR" sz="2400" dirty="0">
+                <a:latin typeface="Gill Sans MT" pitchFamily="34" charset="0"/>
+              </a:rPr>
+              <a:t>Object-</a:t>
+            </a:r>
+            <a:r>
+              <a:rPr lang="fr-FR" sz="2400" dirty="0" err="1">
+                <a:latin typeface="Gill Sans MT" pitchFamily="34" charset="0"/>
+              </a:rPr>
+              <a:t>Oriented</a:t>
+            </a:r>
+            <a:r>
+              <a:rPr lang="fr-FR" sz="2400" dirty="0">
+                <a:latin typeface="Gill Sans MT" pitchFamily="34" charset="0"/>
+              </a:rPr>
+              <a:t> Reengineering Patterns, Serge Demeyer, Stéphane Ducasse, Oscar </a:t>
+            </a:r>
+            <a:r>
+              <a:rPr lang="fr-FR" sz="2400" dirty="0" err="1">
+                <a:latin typeface="Gill Sans MT" pitchFamily="34" charset="0"/>
+              </a:rPr>
+              <a:t>Nierstrasz</a:t>
+            </a:r>
+            <a:endParaRPr lang="fr-FR" sz="2400" dirty="0">
+              <a:latin typeface="Gill Sans MT" pitchFamily="34" charset="0"/>
+            </a:endParaRPr>
           </a:p>
           <a:p>
             <a:endParaRPr lang="el-GR" dirty="0"/>
@@ -9088,7 +9144,7 @@
           <a:lstStyle/>
           <a:p>
             <a:r>
-              <a:rPr lang="en-US" dirty="0" smtClean="0"/>
+              <a:rPr lang="en-US" dirty="0"/>
               <a:t>Project, Final Exam &amp; Grades</a:t>
             </a:r>
             <a:endParaRPr lang="el-GR" dirty="0"/>
@@ -9118,45 +9174,33 @@
           <a:lstStyle/>
           <a:p>
             <a:r>
-              <a:rPr lang="en-US" dirty="0" smtClean="0">
+              <a:rPr lang="en-US" dirty="0">
                 <a:latin typeface="Gill Sans MT" pitchFamily="34" charset="0"/>
               </a:rPr>
-              <a:t>We will develop a project in Java in groups of up to 2 person.</a:t>
+              <a:t>We will develop a project in groups of up to 2 person.</a:t>
             </a:r>
           </a:p>
           <a:p>
             <a:pPr lvl="1"/>
             <a:r>
-              <a:rPr lang="en-US" dirty="0" smtClean="0">
+              <a:rPr lang="en-US" dirty="0">
                 <a:latin typeface="Gill Sans MT" pitchFamily="34" charset="0"/>
               </a:rPr>
-              <a:t>Review </a:t>
-            </a:r>
-            <a:r>
-              <a:rPr lang="en-US" dirty="0" smtClean="0">
+              <a:t>Review and analyze the problems of an existing software</a:t>
+            </a:r>
+          </a:p>
+          <a:p>
+            <a:pPr lvl="1"/>
+            <a:r>
+              <a:rPr lang="en-US" dirty="0">
                 <a:latin typeface="Gill Sans MT" pitchFamily="34" charset="0"/>
               </a:rPr>
-              <a:t>and analyze the problems of an existing software</a:t>
-            </a:r>
-          </a:p>
-          <a:p>
-            <a:pPr lvl="1"/>
-            <a:r>
-              <a:rPr lang="en-US" smtClean="0">
-                <a:latin typeface="Gill Sans MT" pitchFamily="34" charset="0"/>
-              </a:rPr>
-              <a:t>Refactoring </a:t>
-            </a:r>
-            <a:r>
-              <a:rPr lang="en-US" dirty="0" smtClean="0">
-                <a:latin typeface="Gill Sans MT" pitchFamily="34" charset="0"/>
-              </a:rPr>
-              <a:t>and extension of the software</a:t>
-            </a:r>
-          </a:p>
-          <a:p>
-            <a:r>
-              <a:rPr lang="en-US" dirty="0" smtClean="0"/>
+              <a:t>Refactoring and extension of the software</a:t>
+            </a:r>
+          </a:p>
+          <a:p>
+            <a:r>
+              <a:rPr lang="en-US" dirty="0"/>
               <a:t>We will have a final examination at the end of the semester</a:t>
             </a:r>
           </a:p>
@@ -9164,39 +9208,39 @@
             <a:pPr>
               <a:buNone/>
             </a:pPr>
-            <a:endParaRPr lang="en-US" dirty="0" smtClean="0"/>
-          </a:p>
-          <a:p>
-            <a:r>
-              <a:rPr lang="en-US" dirty="0" smtClean="0"/>
+            <a:endParaRPr lang="en-US" dirty="0"/>
+          </a:p>
+          <a:p>
+            <a:r>
+              <a:rPr lang="en-US" dirty="0"/>
               <a:t>Final Grade</a:t>
             </a:r>
           </a:p>
           <a:p>
             <a:pPr lvl="1"/>
             <a:r>
-              <a:rPr lang="en-US" dirty="0" smtClean="0"/>
+              <a:rPr lang="en-US" dirty="0"/>
               <a:t>if (exam &gt;= 5 and project &gt;=5) then </a:t>
             </a:r>
           </a:p>
           <a:p>
             <a:pPr lvl="2"/>
             <a:r>
-              <a:rPr lang="en-US" dirty="0" smtClean="0"/>
+              <a:rPr lang="en-US" dirty="0"/>
               <a:t>grade = 0.7 * exam + 0.3 * project</a:t>
             </a:r>
           </a:p>
           <a:p>
             <a:pPr lvl="1"/>
             <a:r>
-              <a:rPr lang="en-US" dirty="0" smtClean="0"/>
+              <a:rPr lang="en-US" dirty="0"/>
               <a:t>else</a:t>
             </a:r>
           </a:p>
           <a:p>
             <a:pPr lvl="2"/>
             <a:r>
-              <a:rPr lang="en-US" dirty="0" smtClean="0"/>
+              <a:rPr lang="en-US" dirty="0"/>
               <a:t>grade = min(exam, project)</a:t>
             </a:r>
           </a:p>
@@ -9246,7 +9290,7 @@
           <a:lstStyle/>
           <a:p>
             <a:r>
-              <a:rPr lang="en-US" dirty="0" smtClean="0"/>
+              <a:rPr lang="en-US" dirty="0"/>
               <a:t>Bad Code</a:t>
             </a:r>
             <a:endParaRPr lang="el-GR" dirty="0"/>
@@ -9275,7 +9319,7 @@
           <a:lstStyle/>
           <a:p>
             <a:r>
-              <a:rPr lang="en-US" sz="2400" dirty="0" smtClean="0">
+              <a:rPr lang="en-US" sz="2400" dirty="0">
                 <a:solidFill>
                   <a:srgbClr val="0070C0"/>
                 </a:solidFill>
@@ -9284,15 +9328,15 @@
             </a:r>
           </a:p>
           <a:p>
-            <a:endParaRPr lang="en-US" dirty="0" smtClean="0"/>
-          </a:p>
-          <a:p>
-            <a:r>
-              <a:rPr lang="en-US" dirty="0" smtClean="0"/>
+            <a:endParaRPr lang="en-US" dirty="0"/>
+          </a:p>
+          <a:p>
+            <a:r>
+              <a:rPr lang="en-US" dirty="0"/>
               <a:t>Over the span of a year or two, teams that were </a:t>
             </a:r>
             <a:r>
-              <a:rPr lang="en-US" dirty="0" smtClean="0">
+              <a:rPr lang="en-US" dirty="0">
                 <a:solidFill>
                   <a:srgbClr val="FF0000"/>
                 </a:solidFill>
@@ -9300,11 +9344,11 @@
               <a:t>moving very fast at the beginning </a:t>
             </a:r>
             <a:r>
-              <a:rPr lang="en-US" dirty="0" smtClean="0"/>
+              <a:rPr lang="en-US" dirty="0"/>
               <a:t>of a project can find themselves </a:t>
             </a:r>
             <a:r>
-              <a:rPr lang="en-US" dirty="0" smtClean="0">
+              <a:rPr lang="en-US" dirty="0">
                 <a:solidFill>
                   <a:srgbClr val="FF0000"/>
                 </a:solidFill>
@@ -9312,7 +9356,7 @@
               <a:t>moving at a snail’s </a:t>
             </a:r>
             <a:r>
-              <a:rPr lang="fr-FR" dirty="0" smtClean="0">
+              <a:rPr lang="fr-FR" dirty="0">
                 <a:solidFill>
                   <a:srgbClr val="FF0000"/>
                 </a:solidFill>
@@ -9320,17 +9364,17 @@
               <a:t>pace</a:t>
             </a:r>
             <a:r>
-              <a:rPr lang="fr-FR" dirty="0" smtClean="0"/>
+              <a:rPr lang="fr-FR" dirty="0"/>
               <a:t>.</a:t>
             </a:r>
           </a:p>
           <a:p>
-            <a:endParaRPr lang="en-US" dirty="0" smtClean="0"/>
+            <a:endParaRPr lang="en-US" dirty="0"/>
           </a:p>
           <a:p>
             <a:pPr algn="just"/>
             <a:r>
-              <a:rPr lang="en-US" dirty="0" smtClean="0">
+              <a:rPr lang="en-US" dirty="0">
                 <a:solidFill>
                   <a:srgbClr val="FF0000"/>
                 </a:solidFill>
@@ -9338,11 +9382,11 @@
               <a:t>As the mess builds</a:t>
             </a:r>
             <a:r>
-              <a:rPr lang="en-US" dirty="0" smtClean="0"/>
+              <a:rPr lang="en-US" dirty="0"/>
               <a:t>, the productivity of the team </a:t>
             </a:r>
             <a:r>
-              <a:rPr lang="en-US" dirty="0" smtClean="0">
+              <a:rPr lang="en-US" dirty="0">
                 <a:solidFill>
                   <a:srgbClr val="FF0000"/>
                 </a:solidFill>
@@ -9350,14 +9394,14 @@
               <a:t>continues to decrease</a:t>
             </a:r>
             <a:r>
-              <a:rPr lang="en-US" dirty="0" smtClean="0"/>
+              <a:rPr lang="en-US" dirty="0"/>
               <a:t>, asymptotically</a:t>
             </a:r>
           </a:p>
           <a:p>
             <a:pPr algn="just"/>
             <a:r>
-              <a:rPr lang="en-US" dirty="0" smtClean="0"/>
+              <a:rPr lang="en-US" dirty="0"/>
               <a:t>approaching zero. </a:t>
             </a:r>
           </a:p>
@@ -9436,7 +9480,7 @@
           <a:lstStyle/>
           <a:p>
             <a:r>
-              <a:rPr lang="en-US" dirty="0" smtClean="0"/>
+              <a:rPr lang="en-US" dirty="0"/>
               <a:t>Bad Code</a:t>
             </a:r>
             <a:endParaRPr lang="el-GR" dirty="0"/>
@@ -9466,7 +9510,7 @@
           <a:p>
             <a:pPr algn="just"/>
             <a:r>
-              <a:rPr lang="en-US" sz="2400" dirty="0" smtClean="0">
+              <a:rPr lang="en-US" sz="2400" dirty="0">
                 <a:solidFill>
                   <a:srgbClr val="FF0000"/>
                 </a:solidFill>
@@ -9549,7 +9593,7 @@
           <a:lstStyle/>
           <a:p>
             <a:r>
-              <a:rPr lang="en-US" dirty="0" smtClean="0"/>
+              <a:rPr lang="en-US" dirty="0"/>
               <a:t>Bad Code</a:t>
             </a:r>
             <a:endParaRPr lang="el-GR" dirty="0"/>
@@ -9579,7 +9623,7 @@
           <a:p>
             <a:pPr algn="just"/>
             <a:r>
-              <a:rPr lang="en-US" sz="2400" dirty="0" smtClean="0">
+              <a:rPr lang="en-US" sz="2400" dirty="0">
                 <a:solidFill>
                   <a:srgbClr val="0070C0"/>
                 </a:solidFill>
@@ -9587,7 +9631,7 @@
               <a:t>A managerial solution:</a:t>
             </a:r>
             <a:r>
-              <a:rPr lang="en-US" sz="2400" dirty="0" smtClean="0">
+              <a:rPr lang="en-US" sz="2400" dirty="0">
                 <a:solidFill>
                   <a:srgbClr val="FF0000"/>
                 </a:solidFill>
@@ -9597,7 +9641,7 @@
           </a:p>
           <a:p>
             <a:pPr algn="just"/>
-            <a:endParaRPr lang="en-US" dirty="0" smtClean="0">
+            <a:endParaRPr lang="en-US" dirty="0">
               <a:solidFill>
                 <a:srgbClr val="FF0000"/>
               </a:solidFill>
@@ -9606,11 +9650,11 @@
           <a:p>
             <a:pPr algn="just"/>
             <a:r>
-              <a:rPr lang="en-US" sz="2000" dirty="0" smtClean="0"/>
+              <a:rPr lang="en-US" sz="2000" dirty="0"/>
               <a:t>As productivity decreases, management does the only thing they can; they </a:t>
             </a:r>
             <a:r>
-              <a:rPr lang="en-US" sz="2000" dirty="0" smtClean="0">
+              <a:rPr lang="en-US" sz="2000" dirty="0">
                 <a:solidFill>
                   <a:srgbClr val="FF0000"/>
                 </a:solidFill>
@@ -9618,22 +9662,22 @@
               <a:t>add more staff to the project </a:t>
             </a:r>
             <a:r>
-              <a:rPr lang="en-US" sz="2000" smtClean="0"/>
+              <a:rPr lang="en-US" sz="2000"/>
               <a:t>in hope </a:t>
             </a:r>
             <a:r>
-              <a:rPr lang="en-US" sz="2000" dirty="0" smtClean="0"/>
+              <a:rPr lang="en-US" sz="2000" dirty="0"/>
               <a:t>of increasing productivity. </a:t>
             </a:r>
           </a:p>
           <a:p>
             <a:pPr algn="just"/>
-            <a:endParaRPr lang="en-US" dirty="0" smtClean="0"/>
+            <a:endParaRPr lang="en-US" dirty="0"/>
           </a:p>
           <a:p>
             <a:pPr algn="just"/>
             <a:r>
-              <a:rPr lang="en-US" sz="2000" b="1" dirty="0" smtClean="0">
+              <a:rPr lang="en-US" sz="2000" b="1" dirty="0">
                 <a:solidFill>
                   <a:srgbClr val="FF0000"/>
                 </a:solidFill>

--- a/soft-dev-2-intro.pptx
+++ b/soft-dev-2-intro.pptx
@@ -5,10 +5,10 @@
     <p:sldMasterId id="2147483912" r:id="rId1"/>
   </p:sldMasterIdLst>
   <p:notesMasterIdLst>
-    <p:notesMasterId r:id="rId27"/>
+    <p:notesMasterId r:id="rId23"/>
   </p:notesMasterIdLst>
   <p:handoutMasterIdLst>
-    <p:handoutMasterId r:id="rId28"/>
+    <p:handoutMasterId r:id="rId24"/>
   </p:handoutMasterIdLst>
   <p:sldIdLst>
     <p:sldId id="256" r:id="rId2"/>
@@ -18,24 +18,20 @@
     <p:sldId id="287" r:id="rId6"/>
     <p:sldId id="288" r:id="rId7"/>
     <p:sldId id="260" r:id="rId8"/>
-    <p:sldId id="261" r:id="rId9"/>
-    <p:sldId id="276" r:id="rId10"/>
-    <p:sldId id="277" r:id="rId11"/>
-    <p:sldId id="262" r:id="rId12"/>
-    <p:sldId id="278" r:id="rId13"/>
-    <p:sldId id="279" r:id="rId14"/>
-    <p:sldId id="263" r:id="rId15"/>
-    <p:sldId id="264" r:id="rId16"/>
-    <p:sldId id="280" r:id="rId17"/>
-    <p:sldId id="265" r:id="rId18"/>
-    <p:sldId id="281" r:id="rId19"/>
-    <p:sldId id="266" r:id="rId20"/>
-    <p:sldId id="271" r:id="rId21"/>
-    <p:sldId id="267" r:id="rId22"/>
-    <p:sldId id="268" r:id="rId23"/>
-    <p:sldId id="269" r:id="rId24"/>
-    <p:sldId id="270" r:id="rId25"/>
-    <p:sldId id="272" r:id="rId26"/>
+    <p:sldId id="277" r:id="rId9"/>
+    <p:sldId id="278" r:id="rId10"/>
+    <p:sldId id="279" r:id="rId11"/>
+    <p:sldId id="263" r:id="rId12"/>
+    <p:sldId id="280" r:id="rId13"/>
+    <p:sldId id="265" r:id="rId14"/>
+    <p:sldId id="281" r:id="rId15"/>
+    <p:sldId id="266" r:id="rId16"/>
+    <p:sldId id="271" r:id="rId17"/>
+    <p:sldId id="267" r:id="rId18"/>
+    <p:sldId id="268" r:id="rId19"/>
+    <p:sldId id="269" r:id="rId20"/>
+    <p:sldId id="270" r:id="rId21"/>
+    <p:sldId id="272" r:id="rId22"/>
   </p:sldIdLst>
   <p:sldSz cx="9144000" cy="6858000" type="screen4x3"/>
   <p:notesSz cx="7099300" cy="10234613"/>
@@ -236,7 +232,7 @@
             <a:fld id="{9C7200FD-C438-496B-A78D-3816F97A74F0}" type="datetimeFigureOut">
               <a:rPr lang="el-GR" smtClean="0"/>
               <a:pPr/>
-              <a:t>1/10/2024</a:t>
+              <a:t>1/10/2026</a:t>
             </a:fld>
             <a:endParaRPr lang="en-US"/>
           </a:p>
@@ -403,7 +399,7 @@
             <a:fld id="{2313A616-81EC-4D71-A13E-8040CCC87A8F}" type="datetimeFigureOut">
               <a:rPr lang="el-GR" smtClean="0"/>
               <a:pPr/>
-              <a:t>1/10/2024</a:t>
+              <a:t>1/10/2026</a:t>
             </a:fld>
             <a:endParaRPr lang="el-GR"/>
           </a:p>
@@ -981,7 +977,7 @@
             <a:fld id="{44DC1CA9-72BA-4648-A9C1-A848CB0896B4}" type="slidenum">
               <a:rPr lang="el-GR" smtClean="0"/>
               <a:pPr/>
-              <a:t>12</a:t>
+              <a:t>9</a:t>
             </a:fld>
             <a:endParaRPr lang="el-GR"/>
           </a:p>
@@ -1071,7 +1067,7 @@
             <a:fld id="{44DC1CA9-72BA-4648-A9C1-A848CB0896B4}" type="slidenum">
               <a:rPr lang="el-GR" smtClean="0"/>
               <a:pPr/>
-              <a:t>14</a:t>
+              <a:t>11</a:t>
             </a:fld>
             <a:endParaRPr lang="el-GR"/>
           </a:p>
@@ -1133,20 +1129,43 @@
           <a:p>
             <a:r>
               <a:rPr lang="el-GR" dirty="0"/>
-              <a:t>γιατί</a:t>
-            </a:r>
-            <a:r>
-              <a:rPr lang="el-GR" baseline="0" dirty="0"/>
-              <a:t> ο κώδικας που φτιάχνουμε είναι κακός ?</a:t>
-            </a:r>
-          </a:p>
-          <a:p>
-            <a:endParaRPr lang="el-GR" baseline="0" dirty="0"/>
-          </a:p>
-          <a:p>
-            <a:r>
-              <a:rPr lang="el-GR" baseline="0" dirty="0"/>
-              <a:t>όλοι ξέρουμε ότι αυτό μπορεί να έχει πολύ δυσάρεστες συνέπειες …</a:t>
+              <a:t>απλός και άμεσος </a:t>
+            </a:r>
+          </a:p>
+          <a:p>
+            <a:endParaRPr lang="el-GR" dirty="0"/>
+          </a:p>
+          <a:p>
+            <a:endParaRPr lang="el-GR" dirty="0"/>
+          </a:p>
+          <a:p>
+            <a:r>
+              <a:rPr lang="el-GR" dirty="0"/>
+              <a:t>(</a:t>
+            </a:r>
+            <a:r>
+              <a:rPr lang="en-US" dirty="0" err="1"/>
+              <a:t>booch</a:t>
+            </a:r>
+            <a:r>
+              <a:rPr lang="en-US" baseline="0" dirty="0"/>
+              <a:t>, </a:t>
+            </a:r>
+            <a:r>
+              <a:rPr lang="en-US" baseline="0" dirty="0" err="1"/>
+              <a:t>rumbaugh</a:t>
+            </a:r>
+            <a:r>
+              <a:rPr lang="en-US" baseline="0" dirty="0"/>
+              <a:t>, </a:t>
+            </a:r>
+            <a:r>
+              <a:rPr lang="en-US" baseline="0" dirty="0" err="1"/>
+              <a:t>jacobson</a:t>
+            </a:r>
+            <a:r>
+              <a:rPr lang="en-US" baseline="0" dirty="0"/>
+              <a:t>)</a:t>
             </a:r>
             <a:endParaRPr lang="el-GR" dirty="0"/>
           </a:p>
@@ -1232,45 +1251,8 @@
           <a:p>
             <a:r>
               <a:rPr lang="el-GR" dirty="0"/>
-              <a:t>απλός και άμεσος </a:t>
-            </a:r>
-          </a:p>
-          <a:p>
-            <a:endParaRPr lang="el-GR" dirty="0"/>
-          </a:p>
-          <a:p>
-            <a:endParaRPr lang="el-GR" dirty="0"/>
-          </a:p>
-          <a:p>
-            <a:r>
-              <a:rPr lang="el-GR" dirty="0"/>
-              <a:t>(</a:t>
-            </a:r>
-            <a:r>
-              <a:rPr lang="en-US" dirty="0" err="1"/>
-              <a:t>booch</a:t>
-            </a:r>
-            <a:r>
-              <a:rPr lang="en-US" baseline="0" dirty="0"/>
-              <a:t>, </a:t>
-            </a:r>
-            <a:r>
-              <a:rPr lang="en-US" baseline="0" dirty="0" err="1"/>
-              <a:t>rumbaugh</a:t>
-            </a:r>
-            <a:r>
-              <a:rPr lang="en-US" baseline="0" dirty="0"/>
-              <a:t>, </a:t>
-            </a:r>
-            <a:r>
-              <a:rPr lang="en-US" baseline="0" dirty="0" err="1"/>
-              <a:t>jacobson</a:t>
-            </a:r>
-            <a:r>
-              <a:rPr lang="en-US" baseline="0" dirty="0"/>
-              <a:t>)</a:t>
-            </a:r>
-            <a:endParaRPr lang="el-GR" dirty="0"/>
+              <a:t>αποδοτικός και κομψός</a:t>
+            </a:r>
           </a:p>
         </p:txBody>
       </p:sp>
@@ -1292,92 +1274,7 @@
             <a:fld id="{44DC1CA9-72BA-4648-A9C1-A848CB0896B4}" type="slidenum">
               <a:rPr lang="el-GR" smtClean="0"/>
               <a:pPr/>
-              <a:t>19</a:t>
-            </a:fld>
-            <a:endParaRPr lang="el-GR"/>
-          </a:p>
-        </p:txBody>
-      </p:sp>
-    </p:spTree>
-  </p:cSld>
-  <p:clrMapOvr>
-    <a:masterClrMapping/>
-  </p:clrMapOvr>
-</p:notes>
-</file>
-
-<file path=ppt/notesSlides/notesSlide7.xml><?xml version="1.0" encoding="utf-8"?>
-<p:notes xmlns:a="http://schemas.openxmlformats.org/drawingml/2006/main" xmlns:r="http://schemas.openxmlformats.org/officeDocument/2006/relationships" xmlns:p="http://schemas.openxmlformats.org/presentationml/2006/main">
-  <p:cSld>
-    <p:spTree>
-      <p:nvGrpSpPr>
-        <p:cNvPr id="1" name=""/>
-        <p:cNvGrpSpPr/>
-        <p:nvPr/>
-      </p:nvGrpSpPr>
-      <p:grpSpPr>
-        <a:xfrm>
-          <a:off x="0" y="0"/>
-          <a:ext cx="0" cy="0"/>
-          <a:chOff x="0" y="0"/>
-          <a:chExt cx="0" cy="0"/>
-        </a:xfrm>
-      </p:grpSpPr>
-      <p:sp>
-        <p:nvSpPr>
-          <p:cNvPr id="2" name="Slide Image Placeholder 1"/>
-          <p:cNvSpPr>
-            <a:spLocks noGrp="1" noRot="1" noChangeAspect="1"/>
-          </p:cNvSpPr>
-          <p:nvPr>
-            <p:ph type="sldImg"/>
-          </p:nvPr>
-        </p:nvSpPr>
-        <p:spPr/>
-      </p:sp>
-      <p:sp>
-        <p:nvSpPr>
-          <p:cNvPr id="3" name="Notes Placeholder 2"/>
-          <p:cNvSpPr>
-            <a:spLocks noGrp="1"/>
-          </p:cNvSpPr>
-          <p:nvPr>
-            <p:ph type="body" idx="1"/>
-          </p:nvPr>
-        </p:nvSpPr>
-        <p:spPr/>
-        <p:txBody>
-          <a:bodyPr>
-            <a:normAutofit/>
-          </a:bodyPr>
-          <a:lstStyle/>
-          <a:p>
-            <a:r>
-              <a:rPr lang="el-GR" dirty="0"/>
-              <a:t>αποδοτικός και κομψός</a:t>
-            </a:r>
-          </a:p>
-        </p:txBody>
-      </p:sp>
-      <p:sp>
-        <p:nvSpPr>
-          <p:cNvPr id="4" name="Slide Number Placeholder 3"/>
-          <p:cNvSpPr>
-            <a:spLocks noGrp="1"/>
-          </p:cNvSpPr>
-          <p:nvPr>
-            <p:ph type="sldNum" sz="quarter" idx="10"/>
-          </p:nvPr>
-        </p:nvSpPr>
-        <p:spPr/>
-        <p:txBody>
-          <a:bodyPr/>
-          <a:lstStyle/>
-          <a:p>
-            <a:fld id="{44DC1CA9-72BA-4648-A9C1-A848CB0896B4}" type="slidenum">
-              <a:rPr lang="el-GR" smtClean="0"/>
-              <a:pPr/>
-              <a:t>20</a:t>
+              <a:t>16</a:t>
             </a:fld>
             <a:endParaRPr lang="el-GR"/>
           </a:p>
@@ -1533,7 +1430,7 @@
             <a:fld id="{1D8BD707-D9CF-40AE-B4C6-C98DA3205C09}" type="datetimeFigureOut">
               <a:rPr lang="en-US" smtClean="0"/>
               <a:pPr/>
-              <a:t>10/1/2024</a:t>
+              <a:t>10/1/2026</a:t>
             </a:fld>
             <a:endParaRPr lang="en-US"/>
           </a:p>
@@ -1893,7 +1790,7 @@
             <a:fld id="{1D8BD707-D9CF-40AE-B4C6-C98DA3205C09}" type="datetimeFigureOut">
               <a:rPr lang="en-US" smtClean="0"/>
               <a:pPr/>
-              <a:t>10/1/2024</a:t>
+              <a:t>10/1/2026</a:t>
             </a:fld>
             <a:endParaRPr lang="en-US"/>
           </a:p>
@@ -2069,7 +1966,7 @@
             <a:fld id="{1D8BD707-D9CF-40AE-B4C6-C98DA3205C09}" type="datetimeFigureOut">
               <a:rPr lang="en-US" smtClean="0"/>
               <a:pPr/>
-              <a:t>10/1/2024</a:t>
+              <a:t>10/1/2026</a:t>
             </a:fld>
             <a:endParaRPr lang="en-US"/>
           </a:p>
@@ -2305,7 +2202,7 @@
             <a:fld id="{1D8BD707-D9CF-40AE-B4C6-C98DA3205C09}" type="datetimeFigureOut">
               <a:rPr lang="en-US" smtClean="0"/>
               <a:pPr/>
-              <a:t>10/1/2024</a:t>
+              <a:t>10/1/2026</a:t>
             </a:fld>
             <a:endParaRPr lang="en-US"/>
           </a:p>
@@ -2575,7 +2472,7 @@
             <a:fld id="{1D8BD707-D9CF-40AE-B4C6-C98DA3205C09}" type="datetimeFigureOut">
               <a:rPr lang="en-US" smtClean="0"/>
               <a:pPr/>
-              <a:t>10/1/2024</a:t>
+              <a:t>10/1/2026</a:t>
             </a:fld>
             <a:endParaRPr lang="en-US"/>
           </a:p>
@@ -2796,7 +2693,7 @@
             <a:fld id="{1D8BD707-D9CF-40AE-B4C6-C98DA3205C09}" type="datetimeFigureOut">
               <a:rPr lang="en-US" smtClean="0"/>
               <a:pPr/>
-              <a:t>10/1/2024</a:t>
+              <a:t>10/1/2026</a:t>
             </a:fld>
             <a:endParaRPr lang="en-US"/>
           </a:p>
@@ -3149,7 +3046,7 @@
             <a:fld id="{1D8BD707-D9CF-40AE-B4C6-C98DA3205C09}" type="datetimeFigureOut">
               <a:rPr lang="en-US" smtClean="0"/>
               <a:pPr/>
-              <a:t>10/1/2024</a:t>
+              <a:t>10/1/2026</a:t>
             </a:fld>
             <a:endParaRPr lang="en-US"/>
           </a:p>
@@ -3382,7 +3279,7 @@
             <a:fld id="{1D8BD707-D9CF-40AE-B4C6-C98DA3205C09}" type="datetimeFigureOut">
               <a:rPr lang="en-US" smtClean="0"/>
               <a:pPr/>
-              <a:t>10/1/2024</a:t>
+              <a:t>10/1/2026</a:t>
             </a:fld>
             <a:endParaRPr lang="en-US"/>
           </a:p>
@@ -3524,7 +3421,7 @@
             <a:fld id="{1D8BD707-D9CF-40AE-B4C6-C98DA3205C09}" type="datetimeFigureOut">
               <a:rPr lang="en-US" smtClean="0"/>
               <a:pPr/>
-              <a:t>10/1/2024</a:t>
+              <a:t>10/1/2026</a:t>
             </a:fld>
             <a:endParaRPr lang="en-US"/>
           </a:p>
@@ -3802,7 +3699,7 @@
             <a:fld id="{1D8BD707-D9CF-40AE-B4C6-C98DA3205C09}" type="datetimeFigureOut">
               <a:rPr lang="en-US" smtClean="0"/>
               <a:pPr/>
-              <a:t>10/1/2024</a:t>
+              <a:t>10/1/2026</a:t>
             </a:fld>
             <a:endParaRPr lang="en-US"/>
           </a:p>
@@ -4210,7 +4107,7 @@
             <a:fld id="{1D8BD707-D9CF-40AE-B4C6-C98DA3205C09}" type="datetimeFigureOut">
               <a:rPr lang="en-US" smtClean="0"/>
               <a:pPr/>
-              <a:t>10/1/2024</a:t>
+              <a:t>10/1/2026</a:t>
             </a:fld>
             <a:endParaRPr lang="en-US"/>
           </a:p>
@@ -4548,7 +4445,7 @@
             <a:fld id="{1D8BD707-D9CF-40AE-B4C6-C98DA3205C09}" type="datetimeFigureOut">
               <a:rPr lang="en-US" smtClean="0"/>
               <a:pPr/>
-              <a:t>10/1/2024</a:t>
+              <a:t>10/1/2026</a:t>
             </a:fld>
             <a:endParaRPr lang="en-US"/>
           </a:p>
@@ -5239,8 +5136,8 @@
         </p:nvSpPr>
         <p:spPr>
           <a:xfrm>
-            <a:off x="457200" y="2590800"/>
-            <a:ext cx="8153400" cy="3816429"/>
+            <a:off x="381000" y="2362200"/>
+            <a:ext cx="8534400" cy="3816429"/>
           </a:xfrm>
           <a:prstGeom prst="rect">
             <a:avLst/>
@@ -5259,7 +5156,7 @@
                   <a:srgbClr val="0070C0"/>
                 </a:solidFill>
               </a:rPr>
-              <a:t>A managerial solution:</a:t>
+              <a:t>A technical solution:</a:t>
             </a:r>
             <a:r>
               <a:rPr lang="en-US" sz="2400" dirty="0">
@@ -5271,18 +5168,13 @@
             </a:r>
           </a:p>
           <a:p>
+            <a:endParaRPr lang="fr-FR" dirty="0"/>
+          </a:p>
+          <a:p>
             <a:pPr algn="just"/>
-            <a:endParaRPr lang="en-US" dirty="0">
-              <a:solidFill>
-                <a:srgbClr val="FF0000"/>
-              </a:solidFill>
-            </a:endParaRPr>
-          </a:p>
-          <a:p>
-            <a:pPr algn="just"/>
             <a:r>
               <a:rPr lang="en-US" sz="2000" dirty="0"/>
-              <a:t>As </a:t>
+              <a:t>Now the </a:t>
             </a:r>
             <a:r>
               <a:rPr lang="en-US" sz="2000" dirty="0">
@@ -5290,23 +5182,11 @@
                   <a:srgbClr val="FF0000"/>
                 </a:solidFill>
               </a:rPr>
-              <a:t>productivity decreases</a:t>
+              <a:t>two teams are in a race</a:t>
             </a:r>
             <a:r>
               <a:rPr lang="en-US" sz="2000" dirty="0"/>
-              <a:t>, management does the only thing they can; they </a:t>
-            </a:r>
-            <a:r>
-              <a:rPr lang="en-US" sz="2000" dirty="0">
-                <a:solidFill>
-                  <a:srgbClr val="FF0000"/>
-                </a:solidFill>
-              </a:rPr>
-              <a:t>add more staff to the project </a:t>
-            </a:r>
-            <a:r>
-              <a:rPr lang="en-US" sz="2000" dirty="0"/>
-              <a:t>in hopes of increasing productivity. </a:t>
+              <a:t>. </a:t>
             </a:r>
           </a:p>
           <a:p>
@@ -5317,7 +5197,7 @@
             <a:pPr algn="just"/>
             <a:r>
               <a:rPr lang="en-US" sz="2000" dirty="0"/>
-              <a:t>But that </a:t>
+              <a:t>The tiger team must </a:t>
             </a:r>
             <a:r>
               <a:rPr lang="en-US" sz="2000" dirty="0">
@@ -5325,11 +5205,11 @@
                   <a:srgbClr val="FF0000"/>
                 </a:solidFill>
               </a:rPr>
-              <a:t>new staff is not versed in the design of the system</a:t>
+              <a:t>build a new system</a:t>
             </a:r>
             <a:r>
               <a:rPr lang="en-US" sz="2000" dirty="0"/>
-              <a:t>. </a:t>
+              <a:t> that does everything that the old system does. </a:t>
             </a:r>
           </a:p>
           <a:p>
@@ -5340,34 +5220,28 @@
             <a:pPr algn="just"/>
             <a:r>
               <a:rPr lang="en-US" sz="2000" dirty="0"/>
-              <a:t>They, and everyone else on the team, are under horrific </a:t>
-            </a:r>
-            <a:r>
-              <a:rPr lang="en-US" sz="2000" b="1" dirty="0">
+              <a:t>Not only that, they have to </a:t>
+            </a:r>
+            <a:r>
+              <a:rPr lang="en-US" sz="2000" dirty="0">
                 <a:solidFill>
                   <a:srgbClr val="FF0000"/>
                 </a:solidFill>
               </a:rPr>
-              <a:t>pressure to increase productivity</a:t>
-            </a:r>
-            <a:r>
-              <a:rPr lang="en-US" sz="2000" b="1" dirty="0"/>
-              <a:t>.</a:t>
+              <a:t>keep up with the changes </a:t>
             </a:r>
             <a:r>
               <a:rPr lang="en-US" sz="2000" dirty="0"/>
-              <a:t> </a:t>
-            </a:r>
-          </a:p>
-          <a:p>
-            <a:pPr algn="just"/>
+              <a:t>that are continuously being made to the old system !!!!</a:t>
+            </a:r>
+          </a:p>
+          <a:p>
             <a:endParaRPr lang="en-US" sz="2000" dirty="0"/>
           </a:p>
           <a:p>
-            <a:pPr algn="just"/>
             <a:r>
               <a:rPr lang="en-US" sz="2000" dirty="0"/>
-              <a:t>So they all make </a:t>
+              <a:t>And by the time it’s done, the tiger team members are demanding that the new system be redesigned because </a:t>
             </a:r>
             <a:r>
               <a:rPr lang="en-US" sz="2000" dirty="0">
@@ -5375,13 +5249,8 @@
                   <a:srgbClr val="FF0000"/>
                 </a:solidFill>
               </a:rPr>
-              <a:t>more and more messes (!!!!!)</a:t>
-            </a:r>
-            <a:r>
-              <a:rPr lang="en-US" sz="2000" dirty="0"/>
-              <a:t>, driving the productivity ever further toward zero.</a:t>
-            </a:r>
-            <a:endParaRPr lang="el-GR" sz="2000" dirty="0"/>
+              <a:t>it’s such a mess !!!!</a:t>
+            </a:r>
           </a:p>
         </p:txBody>
       </p:sp>
@@ -5473,8 +5342,8 @@
         </p:nvSpPr>
         <p:spPr>
           <a:xfrm>
-            <a:off x="381000" y="2743200"/>
-            <a:ext cx="5943600" cy="830997"/>
+            <a:off x="381000" y="2362200"/>
+            <a:ext cx="8534400" cy="2092881"/>
           </a:xfrm>
           <a:prstGeom prst="rect">
             <a:avLst/>
@@ -5490,11 +5359,76 @@
             <a:r>
               <a:rPr lang="en-US" sz="2400" dirty="0">
                 <a:solidFill>
+                  <a:srgbClr val="0070C0"/>
+                </a:solidFill>
+              </a:rPr>
+              <a:t>The moral:</a:t>
+            </a:r>
+            <a:r>
+              <a:rPr lang="en-US" sz="2400" dirty="0">
+                <a:solidFill>
                   <a:srgbClr val="FF0000"/>
                 </a:solidFill>
               </a:rPr>
-              <a:t>What would you do if you were a developer in such a project ??</a:t>
-            </a:r>
+              <a:t> </a:t>
+            </a:r>
+          </a:p>
+          <a:p>
+            <a:pPr algn="just"/>
+            <a:endParaRPr lang="en-US" sz="2400" dirty="0">
+              <a:solidFill>
+                <a:srgbClr val="FF0000"/>
+              </a:solidFill>
+            </a:endParaRPr>
+          </a:p>
+          <a:p>
+            <a:r>
+              <a:rPr lang="en-US" sz="2000" dirty="0"/>
+              <a:t>Spending time </a:t>
+            </a:r>
+            <a:r>
+              <a:rPr lang="en-US" sz="2000" dirty="0">
+                <a:solidFill>
+                  <a:srgbClr val="FF0000"/>
+                </a:solidFill>
+              </a:rPr>
+              <a:t>keeping your code</a:t>
+            </a:r>
+            <a:r>
+              <a:rPr lang="en-US" sz="2000" dirty="0"/>
+              <a:t> clean is not just </a:t>
+            </a:r>
+            <a:r>
+              <a:rPr lang="en-US" sz="2000" dirty="0">
+                <a:solidFill>
+                  <a:srgbClr val="FF0000"/>
+                </a:solidFill>
+              </a:rPr>
+              <a:t>cost effective</a:t>
+            </a:r>
+            <a:r>
+              <a:rPr lang="en-US" sz="2000" dirty="0"/>
+              <a:t>; it’s a matter of </a:t>
+            </a:r>
+            <a:r>
+              <a:rPr lang="en-US" sz="2000" dirty="0">
+                <a:solidFill>
+                  <a:srgbClr val="FF0000"/>
+                </a:solidFill>
+              </a:rPr>
+              <a:t>professional survival !!!!</a:t>
+            </a:r>
+          </a:p>
+          <a:p>
+            <a:pPr algn="just"/>
+            <a:endParaRPr lang="en-US" sz="2400" dirty="0">
+              <a:solidFill>
+                <a:srgbClr val="FF0000"/>
+              </a:solidFill>
+            </a:endParaRPr>
+          </a:p>
+          <a:p>
+            <a:pPr algn="just"/>
             <a:endParaRPr lang="en-US" dirty="0">
               <a:solidFill>
                 <a:srgbClr val="FF0000"/>
@@ -5512,7 +5446,7 @@
           <p:nvPr/>
         </p:nvPicPr>
         <p:blipFill>
-          <a:blip r:embed="rId2" cstate="print"/>
+          <a:blip r:embed="rId3" cstate="print"/>
           <a:srcRect/>
           <a:stretch>
             <a:fillRect/>
@@ -5591,702 +5525,6 @@
         </p:nvSpPr>
         <p:spPr>
           <a:xfrm>
-            <a:off x="381000" y="2362200"/>
-            <a:ext cx="8534400" cy="3293209"/>
-          </a:xfrm>
-          <a:prstGeom prst="rect">
-            <a:avLst/>
-          </a:prstGeom>
-        </p:spPr>
-        <p:txBody>
-          <a:bodyPr wrap="square">
-            <a:spAutoFit/>
-          </a:bodyPr>
-          <a:lstStyle/>
-          <a:p>
-            <a:pPr algn="just"/>
-            <a:r>
-              <a:rPr lang="en-US" sz="2400" dirty="0">
-                <a:solidFill>
-                  <a:srgbClr val="0070C0"/>
-                </a:solidFill>
-              </a:rPr>
-              <a:t>A technical solution:</a:t>
-            </a:r>
-            <a:r>
-              <a:rPr lang="en-US" sz="2400" dirty="0">
-                <a:solidFill>
-                  <a:srgbClr val="FF0000"/>
-                </a:solidFill>
-              </a:rPr>
-              <a:t> </a:t>
-            </a:r>
-          </a:p>
-          <a:p>
-            <a:pPr algn="just"/>
-            <a:endParaRPr lang="en-US" sz="2400" dirty="0">
-              <a:solidFill>
-                <a:srgbClr val="FF0000"/>
-              </a:solidFill>
-            </a:endParaRPr>
-          </a:p>
-          <a:p>
-            <a:pPr algn="just"/>
-            <a:r>
-              <a:rPr lang="en-US" sz="2000" dirty="0"/>
-              <a:t>Eventually the team rebels. They demand a </a:t>
-            </a:r>
-            <a:r>
-              <a:rPr lang="en-US" sz="2000" dirty="0">
-                <a:solidFill>
-                  <a:srgbClr val="FF0000"/>
-                </a:solidFill>
-              </a:rPr>
-              <a:t>redesign</a:t>
-            </a:r>
-            <a:r>
-              <a:rPr lang="en-US" sz="2000" dirty="0"/>
-              <a:t>.  Management eventually bend to the demands of the developers and authorize the grand redesign in the sky.</a:t>
-            </a:r>
-          </a:p>
-          <a:p>
-            <a:endParaRPr lang="en-US" sz="2000" dirty="0"/>
-          </a:p>
-          <a:p>
-            <a:pPr algn="just"/>
-            <a:r>
-              <a:rPr lang="en-US" sz="2000" dirty="0"/>
-              <a:t>A </a:t>
-            </a:r>
-            <a:r>
-              <a:rPr lang="en-US" sz="2000" dirty="0">
-                <a:solidFill>
-                  <a:srgbClr val="FF0000"/>
-                </a:solidFill>
-              </a:rPr>
-              <a:t>new tiger team </a:t>
-            </a:r>
-            <a:r>
-              <a:rPr lang="en-US" sz="2000" dirty="0"/>
-              <a:t>is selected. Everyone else must continue to maintain the </a:t>
-            </a:r>
-            <a:r>
-              <a:rPr lang="fr-FR" sz="2000" dirty="0" err="1"/>
-              <a:t>current</a:t>
-            </a:r>
-            <a:r>
-              <a:rPr lang="fr-FR" sz="2000" dirty="0"/>
-              <a:t> system.</a:t>
-            </a:r>
-          </a:p>
-          <a:p>
-            <a:endParaRPr lang="fr-FR" sz="2000" dirty="0"/>
-          </a:p>
-          <a:p>
-            <a:pPr algn="just"/>
-            <a:r>
-              <a:rPr lang="en-US" sz="2000" b="1" dirty="0">
-                <a:solidFill>
-                  <a:srgbClr val="FF0000"/>
-                </a:solidFill>
-              </a:rPr>
-              <a:t>Would that work ??</a:t>
-            </a:r>
-          </a:p>
-        </p:txBody>
-      </p:sp>
-      <p:pic>
-        <p:nvPicPr>
-          <p:cNvPr id="2050" name="Picture 2"/>
-          <p:cNvPicPr>
-            <a:picLocks noChangeAspect="1" noChangeArrowheads="1"/>
-          </p:cNvPicPr>
-          <p:nvPr/>
-        </p:nvPicPr>
-        <p:blipFill>
-          <a:blip r:embed="rId3" cstate="print"/>
-          <a:srcRect/>
-          <a:stretch>
-            <a:fillRect/>
-          </a:stretch>
-        </p:blipFill>
-        <p:spPr bwMode="auto">
-          <a:xfrm>
-            <a:off x="3962400" y="685800"/>
-            <a:ext cx="4248150" cy="1857524"/>
-          </a:xfrm>
-          <a:prstGeom prst="rect">
-            <a:avLst/>
-          </a:prstGeom>
-          <a:noFill/>
-          <a:ln w="9525">
-            <a:noFill/>
-            <a:miter lim="800000"/>
-            <a:headEnd/>
-            <a:tailEnd/>
-          </a:ln>
-        </p:spPr>
-      </p:pic>
-    </p:spTree>
-  </p:cSld>
-  <p:clrMapOvr>
-    <a:masterClrMapping/>
-  </p:clrMapOvr>
-</p:sld>
-</file>
-
-<file path=ppt/slides/slide13.xml><?xml version="1.0" encoding="utf-8"?>
-<p:sld xmlns:a="http://schemas.openxmlformats.org/drawingml/2006/main" xmlns:r="http://schemas.openxmlformats.org/officeDocument/2006/relationships" xmlns:p="http://schemas.openxmlformats.org/presentationml/2006/main" showMasterSp="0">
-  <p:cSld>
-    <p:spTree>
-      <p:nvGrpSpPr>
-        <p:cNvPr id="1" name=""/>
-        <p:cNvGrpSpPr/>
-        <p:nvPr/>
-      </p:nvGrpSpPr>
-      <p:grpSpPr>
-        <a:xfrm>
-          <a:off x="0" y="0"/>
-          <a:ext cx="0" cy="0"/>
-          <a:chOff x="0" y="0"/>
-          <a:chExt cx="0" cy="0"/>
-        </a:xfrm>
-      </p:grpSpPr>
-      <p:sp>
-        <p:nvSpPr>
-          <p:cNvPr id="2" name="Title 1"/>
-          <p:cNvSpPr>
-            <a:spLocks noGrp="1"/>
-          </p:cNvSpPr>
-          <p:nvPr>
-            <p:ph type="title"/>
-          </p:nvPr>
-        </p:nvSpPr>
-        <p:spPr/>
-        <p:txBody>
-          <a:bodyPr/>
-          <a:lstStyle/>
-          <a:p>
-            <a:r>
-              <a:rPr lang="en-US" dirty="0"/>
-              <a:t>Bad Code</a:t>
-            </a:r>
-            <a:endParaRPr lang="el-GR" dirty="0"/>
-          </a:p>
-        </p:txBody>
-      </p:sp>
-      <p:sp>
-        <p:nvSpPr>
-          <p:cNvPr id="3" name="Rectangle 2"/>
-          <p:cNvSpPr/>
-          <p:nvPr/>
-        </p:nvSpPr>
-        <p:spPr>
-          <a:xfrm>
-            <a:off x="381000" y="2362200"/>
-            <a:ext cx="8534400" cy="3816429"/>
-          </a:xfrm>
-          <a:prstGeom prst="rect">
-            <a:avLst/>
-          </a:prstGeom>
-        </p:spPr>
-        <p:txBody>
-          <a:bodyPr wrap="square">
-            <a:spAutoFit/>
-          </a:bodyPr>
-          <a:lstStyle/>
-          <a:p>
-            <a:pPr algn="just"/>
-            <a:r>
-              <a:rPr lang="en-US" sz="2400" dirty="0">
-                <a:solidFill>
-                  <a:srgbClr val="0070C0"/>
-                </a:solidFill>
-              </a:rPr>
-              <a:t>A technical solution:</a:t>
-            </a:r>
-            <a:r>
-              <a:rPr lang="en-US" sz="2400" dirty="0">
-                <a:solidFill>
-                  <a:srgbClr val="FF0000"/>
-                </a:solidFill>
-              </a:rPr>
-              <a:t> </a:t>
-            </a:r>
-          </a:p>
-          <a:p>
-            <a:endParaRPr lang="fr-FR" dirty="0"/>
-          </a:p>
-          <a:p>
-            <a:pPr algn="just"/>
-            <a:r>
-              <a:rPr lang="en-US" sz="2000" dirty="0"/>
-              <a:t>Now the </a:t>
-            </a:r>
-            <a:r>
-              <a:rPr lang="en-US" sz="2000" dirty="0">
-                <a:solidFill>
-                  <a:srgbClr val="FF0000"/>
-                </a:solidFill>
-              </a:rPr>
-              <a:t>two teams are in a race</a:t>
-            </a:r>
-            <a:r>
-              <a:rPr lang="en-US" sz="2000" dirty="0"/>
-              <a:t>. </a:t>
-            </a:r>
-          </a:p>
-          <a:p>
-            <a:pPr algn="just"/>
-            <a:endParaRPr lang="en-US" sz="2000" dirty="0"/>
-          </a:p>
-          <a:p>
-            <a:pPr algn="just"/>
-            <a:r>
-              <a:rPr lang="en-US" sz="2000" dirty="0"/>
-              <a:t>The tiger team must </a:t>
-            </a:r>
-            <a:r>
-              <a:rPr lang="en-US" sz="2000" dirty="0">
-                <a:solidFill>
-                  <a:srgbClr val="FF0000"/>
-                </a:solidFill>
-              </a:rPr>
-              <a:t>build a new system</a:t>
-            </a:r>
-            <a:r>
-              <a:rPr lang="en-US" sz="2000" dirty="0"/>
-              <a:t> that does everything that the old system does. </a:t>
-            </a:r>
-          </a:p>
-          <a:p>
-            <a:pPr algn="just"/>
-            <a:endParaRPr lang="en-US" sz="2000" dirty="0"/>
-          </a:p>
-          <a:p>
-            <a:pPr algn="just"/>
-            <a:r>
-              <a:rPr lang="en-US" sz="2000" dirty="0"/>
-              <a:t>Not only that, they have to </a:t>
-            </a:r>
-            <a:r>
-              <a:rPr lang="en-US" sz="2000" dirty="0">
-                <a:solidFill>
-                  <a:srgbClr val="FF0000"/>
-                </a:solidFill>
-              </a:rPr>
-              <a:t>keep up with the changes </a:t>
-            </a:r>
-            <a:r>
-              <a:rPr lang="en-US" sz="2000" dirty="0"/>
-              <a:t>that are continuously being made to the old system !!!!</a:t>
-            </a:r>
-          </a:p>
-          <a:p>
-            <a:endParaRPr lang="en-US" sz="2000" dirty="0"/>
-          </a:p>
-          <a:p>
-            <a:r>
-              <a:rPr lang="en-US" sz="2000" dirty="0"/>
-              <a:t>And by the time it’s done, the tiger team members are demanding that the new system be redesigned because </a:t>
-            </a:r>
-            <a:r>
-              <a:rPr lang="en-US" sz="2000" dirty="0">
-                <a:solidFill>
-                  <a:srgbClr val="FF0000"/>
-                </a:solidFill>
-              </a:rPr>
-              <a:t>it’s such a mess !!!!</a:t>
-            </a:r>
-          </a:p>
-        </p:txBody>
-      </p:sp>
-      <p:pic>
-        <p:nvPicPr>
-          <p:cNvPr id="2050" name="Picture 2"/>
-          <p:cNvPicPr>
-            <a:picLocks noChangeAspect="1" noChangeArrowheads="1"/>
-          </p:cNvPicPr>
-          <p:nvPr/>
-        </p:nvPicPr>
-        <p:blipFill>
-          <a:blip r:embed="rId2" cstate="print"/>
-          <a:srcRect/>
-          <a:stretch>
-            <a:fillRect/>
-          </a:stretch>
-        </p:blipFill>
-        <p:spPr bwMode="auto">
-          <a:xfrm>
-            <a:off x="3962400" y="685800"/>
-            <a:ext cx="4248150" cy="1857524"/>
-          </a:xfrm>
-          <a:prstGeom prst="rect">
-            <a:avLst/>
-          </a:prstGeom>
-          <a:noFill/>
-          <a:ln w="9525">
-            <a:noFill/>
-            <a:miter lim="800000"/>
-            <a:headEnd/>
-            <a:tailEnd/>
-          </a:ln>
-        </p:spPr>
-      </p:pic>
-    </p:spTree>
-  </p:cSld>
-  <p:clrMapOvr>
-    <a:masterClrMapping/>
-  </p:clrMapOvr>
-</p:sld>
-</file>
-
-<file path=ppt/slides/slide14.xml><?xml version="1.0" encoding="utf-8"?>
-<p:sld xmlns:a="http://schemas.openxmlformats.org/drawingml/2006/main" xmlns:r="http://schemas.openxmlformats.org/officeDocument/2006/relationships" xmlns:p="http://schemas.openxmlformats.org/presentationml/2006/main" showMasterSp="0">
-  <p:cSld>
-    <p:spTree>
-      <p:nvGrpSpPr>
-        <p:cNvPr id="1" name=""/>
-        <p:cNvGrpSpPr/>
-        <p:nvPr/>
-      </p:nvGrpSpPr>
-      <p:grpSpPr>
-        <a:xfrm>
-          <a:off x="0" y="0"/>
-          <a:ext cx="0" cy="0"/>
-          <a:chOff x="0" y="0"/>
-          <a:chExt cx="0" cy="0"/>
-        </a:xfrm>
-      </p:grpSpPr>
-      <p:sp>
-        <p:nvSpPr>
-          <p:cNvPr id="2" name="Title 1"/>
-          <p:cNvSpPr>
-            <a:spLocks noGrp="1"/>
-          </p:cNvSpPr>
-          <p:nvPr>
-            <p:ph type="title"/>
-          </p:nvPr>
-        </p:nvSpPr>
-        <p:spPr/>
-        <p:txBody>
-          <a:bodyPr/>
-          <a:lstStyle/>
-          <a:p>
-            <a:r>
-              <a:rPr lang="en-US" dirty="0"/>
-              <a:t>Bad Code</a:t>
-            </a:r>
-            <a:endParaRPr lang="el-GR" dirty="0"/>
-          </a:p>
-        </p:txBody>
-      </p:sp>
-      <p:sp>
-        <p:nvSpPr>
-          <p:cNvPr id="3" name="Rectangle 2"/>
-          <p:cNvSpPr/>
-          <p:nvPr/>
-        </p:nvSpPr>
-        <p:spPr>
-          <a:xfrm>
-            <a:off x="381000" y="2362200"/>
-            <a:ext cx="8534400" cy="2092881"/>
-          </a:xfrm>
-          <a:prstGeom prst="rect">
-            <a:avLst/>
-          </a:prstGeom>
-        </p:spPr>
-        <p:txBody>
-          <a:bodyPr wrap="square">
-            <a:spAutoFit/>
-          </a:bodyPr>
-          <a:lstStyle/>
-          <a:p>
-            <a:pPr algn="just"/>
-            <a:r>
-              <a:rPr lang="en-US" sz="2400" dirty="0">
-                <a:solidFill>
-                  <a:srgbClr val="0070C0"/>
-                </a:solidFill>
-              </a:rPr>
-              <a:t>The moral:</a:t>
-            </a:r>
-            <a:r>
-              <a:rPr lang="en-US" sz="2400" dirty="0">
-                <a:solidFill>
-                  <a:srgbClr val="FF0000"/>
-                </a:solidFill>
-              </a:rPr>
-              <a:t> </a:t>
-            </a:r>
-          </a:p>
-          <a:p>
-            <a:pPr algn="just"/>
-            <a:endParaRPr lang="en-US" sz="2400" dirty="0">
-              <a:solidFill>
-                <a:srgbClr val="FF0000"/>
-              </a:solidFill>
-            </a:endParaRPr>
-          </a:p>
-          <a:p>
-            <a:r>
-              <a:rPr lang="en-US" sz="2000" dirty="0"/>
-              <a:t>Spending time </a:t>
-            </a:r>
-            <a:r>
-              <a:rPr lang="en-US" sz="2000" dirty="0">
-                <a:solidFill>
-                  <a:srgbClr val="FF0000"/>
-                </a:solidFill>
-              </a:rPr>
-              <a:t>keeping your code</a:t>
-            </a:r>
-            <a:r>
-              <a:rPr lang="en-US" sz="2000" dirty="0"/>
-              <a:t> clean is not just </a:t>
-            </a:r>
-            <a:r>
-              <a:rPr lang="en-US" sz="2000" dirty="0">
-                <a:solidFill>
-                  <a:srgbClr val="FF0000"/>
-                </a:solidFill>
-              </a:rPr>
-              <a:t>cost effective</a:t>
-            </a:r>
-            <a:r>
-              <a:rPr lang="en-US" sz="2000" dirty="0"/>
-              <a:t>; it’s a matter of </a:t>
-            </a:r>
-            <a:r>
-              <a:rPr lang="en-US" sz="2000" dirty="0">
-                <a:solidFill>
-                  <a:srgbClr val="FF0000"/>
-                </a:solidFill>
-              </a:rPr>
-              <a:t>professional survival !!!!</a:t>
-            </a:r>
-          </a:p>
-          <a:p>
-            <a:pPr algn="just"/>
-            <a:endParaRPr lang="en-US" sz="2400" dirty="0">
-              <a:solidFill>
-                <a:srgbClr val="FF0000"/>
-              </a:solidFill>
-            </a:endParaRPr>
-          </a:p>
-          <a:p>
-            <a:pPr algn="just"/>
-            <a:endParaRPr lang="en-US" dirty="0">
-              <a:solidFill>
-                <a:srgbClr val="FF0000"/>
-              </a:solidFill>
-            </a:endParaRPr>
-          </a:p>
-        </p:txBody>
-      </p:sp>
-      <p:pic>
-        <p:nvPicPr>
-          <p:cNvPr id="2050" name="Picture 2"/>
-          <p:cNvPicPr>
-            <a:picLocks noChangeAspect="1" noChangeArrowheads="1"/>
-          </p:cNvPicPr>
-          <p:nvPr/>
-        </p:nvPicPr>
-        <p:blipFill>
-          <a:blip r:embed="rId3" cstate="print"/>
-          <a:srcRect/>
-          <a:stretch>
-            <a:fillRect/>
-          </a:stretch>
-        </p:blipFill>
-        <p:spPr bwMode="auto">
-          <a:xfrm>
-            <a:off x="3962400" y="685800"/>
-            <a:ext cx="4248150" cy="1857524"/>
-          </a:xfrm>
-          <a:prstGeom prst="rect">
-            <a:avLst/>
-          </a:prstGeom>
-          <a:noFill/>
-          <a:ln w="9525">
-            <a:noFill/>
-            <a:miter lim="800000"/>
-            <a:headEnd/>
-            <a:tailEnd/>
-          </a:ln>
-        </p:spPr>
-      </p:pic>
-    </p:spTree>
-  </p:cSld>
-  <p:clrMapOvr>
-    <a:masterClrMapping/>
-  </p:clrMapOvr>
-</p:sld>
-</file>
-
-<file path=ppt/slides/slide15.xml><?xml version="1.0" encoding="utf-8"?>
-<p:sld xmlns:a="http://schemas.openxmlformats.org/drawingml/2006/main" xmlns:r="http://schemas.openxmlformats.org/officeDocument/2006/relationships" xmlns:p="http://schemas.openxmlformats.org/presentationml/2006/main" showMasterSp="0">
-  <p:cSld>
-    <p:spTree>
-      <p:nvGrpSpPr>
-        <p:cNvPr id="1" name=""/>
-        <p:cNvGrpSpPr/>
-        <p:nvPr/>
-      </p:nvGrpSpPr>
-      <p:grpSpPr>
-        <a:xfrm>
-          <a:off x="0" y="0"/>
-          <a:ext cx="0" cy="0"/>
-          <a:chOff x="0" y="0"/>
-          <a:chExt cx="0" cy="0"/>
-        </a:xfrm>
-      </p:grpSpPr>
-      <p:sp>
-        <p:nvSpPr>
-          <p:cNvPr id="2" name="Title 1"/>
-          <p:cNvSpPr>
-            <a:spLocks noGrp="1"/>
-          </p:cNvSpPr>
-          <p:nvPr>
-            <p:ph type="title"/>
-          </p:nvPr>
-        </p:nvSpPr>
-        <p:spPr/>
-        <p:txBody>
-          <a:bodyPr/>
-          <a:lstStyle/>
-          <a:p>
-            <a:r>
-              <a:rPr lang="en-US" dirty="0"/>
-              <a:t>Bad Code</a:t>
-            </a:r>
-            <a:endParaRPr lang="el-GR" dirty="0"/>
-          </a:p>
-        </p:txBody>
-      </p:sp>
-      <p:sp>
-        <p:nvSpPr>
-          <p:cNvPr id="3" name="Rectangle 2"/>
-          <p:cNvSpPr/>
-          <p:nvPr/>
-        </p:nvSpPr>
-        <p:spPr>
-          <a:xfrm>
-            <a:off x="304800" y="2362200"/>
-            <a:ext cx="4495800" cy="1200329"/>
-          </a:xfrm>
-          <a:prstGeom prst="rect">
-            <a:avLst/>
-          </a:prstGeom>
-        </p:spPr>
-        <p:txBody>
-          <a:bodyPr wrap="square">
-            <a:spAutoFit/>
-          </a:bodyPr>
-          <a:lstStyle/>
-          <a:p>
-            <a:pPr algn="just"/>
-            <a:r>
-              <a:rPr lang="en-US" sz="2400" dirty="0">
-                <a:solidFill>
-                  <a:srgbClr val="FF0000"/>
-                </a:solidFill>
-              </a:rPr>
-              <a:t>Why does good code turn into bad code ???</a:t>
-            </a:r>
-          </a:p>
-          <a:p>
-            <a:pPr algn="just"/>
-            <a:endParaRPr lang="en-US" sz="2400" dirty="0">
-              <a:solidFill>
-                <a:srgbClr val="0070C0"/>
-              </a:solidFill>
-            </a:endParaRPr>
-          </a:p>
-        </p:txBody>
-      </p:sp>
-      <p:pic>
-        <p:nvPicPr>
-          <p:cNvPr id="6" name="Picture 2" descr="https://encrypted-tbn2.gstatic.com/images?q=tbn:ANd9GcSljz_dhcZftjxDiBvcYmczXZrPA8nAbyzFk-gRQ3Fvsgr7u7fz"/>
-          <p:cNvPicPr>
-            <a:picLocks noChangeAspect="1" noChangeArrowheads="1"/>
-          </p:cNvPicPr>
-          <p:nvPr/>
-        </p:nvPicPr>
-        <p:blipFill>
-          <a:blip r:embed="rId3" cstate="print"/>
-          <a:srcRect/>
-          <a:stretch>
-            <a:fillRect/>
-          </a:stretch>
-        </p:blipFill>
-        <p:spPr bwMode="auto">
-          <a:xfrm>
-            <a:off x="6248400" y="762000"/>
-            <a:ext cx="2057400" cy="2782288"/>
-          </a:xfrm>
-          <a:prstGeom prst="rect">
-            <a:avLst/>
-          </a:prstGeom>
-          <a:noFill/>
-        </p:spPr>
-      </p:pic>
-    </p:spTree>
-  </p:cSld>
-  <p:clrMapOvr>
-    <a:masterClrMapping/>
-  </p:clrMapOvr>
-</p:sld>
-</file>
-
-<file path=ppt/slides/slide16.xml><?xml version="1.0" encoding="utf-8"?>
-<p:sld xmlns:a="http://schemas.openxmlformats.org/drawingml/2006/main" xmlns:r="http://schemas.openxmlformats.org/officeDocument/2006/relationships" xmlns:p="http://schemas.openxmlformats.org/presentationml/2006/main" showMasterSp="0">
-  <p:cSld>
-    <p:spTree>
-      <p:nvGrpSpPr>
-        <p:cNvPr id="1" name=""/>
-        <p:cNvGrpSpPr/>
-        <p:nvPr/>
-      </p:nvGrpSpPr>
-      <p:grpSpPr>
-        <a:xfrm>
-          <a:off x="0" y="0"/>
-          <a:ext cx="0" cy="0"/>
-          <a:chOff x="0" y="0"/>
-          <a:chExt cx="0" cy="0"/>
-        </a:xfrm>
-      </p:grpSpPr>
-      <p:sp>
-        <p:nvSpPr>
-          <p:cNvPr id="2" name="Title 1"/>
-          <p:cNvSpPr>
-            <a:spLocks noGrp="1"/>
-          </p:cNvSpPr>
-          <p:nvPr>
-            <p:ph type="title"/>
-          </p:nvPr>
-        </p:nvSpPr>
-        <p:spPr/>
-        <p:txBody>
-          <a:bodyPr/>
-          <a:lstStyle/>
-          <a:p>
-            <a:r>
-              <a:rPr lang="en-US" dirty="0"/>
-              <a:t>Bad Code</a:t>
-            </a:r>
-            <a:endParaRPr lang="el-GR" dirty="0"/>
-          </a:p>
-        </p:txBody>
-      </p:sp>
-      <p:sp>
-        <p:nvSpPr>
-          <p:cNvPr id="3" name="Rectangle 2"/>
-          <p:cNvSpPr/>
-          <p:nvPr/>
-        </p:nvSpPr>
-        <p:spPr>
-          <a:xfrm>
             <a:off x="381000" y="1676400"/>
             <a:ext cx="4953000" cy="4893647"/>
           </a:xfrm>
@@ -6443,7 +5681,7 @@
 </p:sld>
 </file>
 
-<file path=ppt/slides/slide17.xml><?xml version="1.0" encoding="utf-8"?>
+<file path=ppt/slides/slide13.xml><?xml version="1.0" encoding="utf-8"?>
 <p:sld xmlns:a="http://schemas.openxmlformats.org/drawingml/2006/main" xmlns:r="http://schemas.openxmlformats.org/officeDocument/2006/relationships" xmlns:p="http://schemas.openxmlformats.org/presentationml/2006/main" showMasterSp="0">
   <p:cSld>
     <p:spTree>
@@ -6573,7 +5811,7 @@
 </p:sld>
 </file>
 
-<file path=ppt/slides/slide18.xml><?xml version="1.0" encoding="utf-8"?>
+<file path=ppt/slides/slide14.xml><?xml version="1.0" encoding="utf-8"?>
 <p:sld xmlns:a="http://schemas.openxmlformats.org/drawingml/2006/main" xmlns:r="http://schemas.openxmlformats.org/officeDocument/2006/relationships" xmlns:p="http://schemas.openxmlformats.org/presentationml/2006/main" showMasterSp="0">
   <p:cSld>
     <p:spTree>
@@ -6780,7 +6018,7 @@
 </p:sld>
 </file>
 
-<file path=ppt/slides/slide19.xml><?xml version="1.0" encoding="utf-8"?>
+<file path=ppt/slides/slide15.xml><?xml version="1.0" encoding="utf-8"?>
 <p:sld xmlns:a="http://schemas.openxmlformats.org/drawingml/2006/main" xmlns:r="http://schemas.openxmlformats.org/officeDocument/2006/relationships" xmlns:p="http://schemas.openxmlformats.org/presentationml/2006/main" showMasterSp="0">
   <p:cSld>
     <p:spTree>
@@ -6964,162 +6202,7 @@
 </p:sld>
 </file>
 
-<file path=ppt/slides/slide2.xml><?xml version="1.0" encoding="utf-8"?>
-<p:sld xmlns:a="http://schemas.openxmlformats.org/drawingml/2006/main" xmlns:r="http://schemas.openxmlformats.org/officeDocument/2006/relationships" xmlns:p="http://schemas.openxmlformats.org/presentationml/2006/main" showMasterSp="0">
-  <p:cSld>
-    <p:spTree>
-      <p:nvGrpSpPr>
-        <p:cNvPr id="1" name=""/>
-        <p:cNvGrpSpPr/>
-        <p:nvPr/>
-      </p:nvGrpSpPr>
-      <p:grpSpPr>
-        <a:xfrm>
-          <a:off x="0" y="0"/>
-          <a:ext cx="0" cy="0"/>
-          <a:chOff x="0" y="0"/>
-          <a:chExt cx="0" cy="0"/>
-        </a:xfrm>
-      </p:grpSpPr>
-      <p:sp>
-        <p:nvSpPr>
-          <p:cNvPr id="2" name="Title 1"/>
-          <p:cNvSpPr>
-            <a:spLocks noGrp="1"/>
-          </p:cNvSpPr>
-          <p:nvPr>
-            <p:ph type="title"/>
-          </p:nvPr>
-        </p:nvSpPr>
-        <p:spPr/>
-        <p:txBody>
-          <a:bodyPr>
-            <a:normAutofit fontScale="90000"/>
-          </a:bodyPr>
-          <a:lstStyle/>
-          <a:p>
-            <a:r>
-              <a:rPr lang="en-US" dirty="0"/>
-              <a:t>What are the general objectives of the course?</a:t>
-            </a:r>
-            <a:endParaRPr lang="el-GR" dirty="0"/>
-          </a:p>
-        </p:txBody>
-      </p:sp>
-      <p:sp>
-        <p:nvSpPr>
-          <p:cNvPr id="3" name="Content Placeholder 2"/>
-          <p:cNvSpPr>
-            <a:spLocks noGrp="1"/>
-          </p:cNvSpPr>
-          <p:nvPr>
-            <p:ph sz="quarter" idx="1"/>
-          </p:nvPr>
-        </p:nvSpPr>
-        <p:spPr/>
-        <p:txBody>
-          <a:bodyPr>
-            <a:normAutofit/>
-          </a:bodyPr>
-          <a:lstStyle/>
-          <a:p>
-            <a:endParaRPr lang="en-US" dirty="0"/>
-          </a:p>
-          <a:p>
-            <a:r>
-              <a:rPr lang="en-US" dirty="0"/>
-              <a:t>Identify </a:t>
-            </a:r>
-            <a:r>
-              <a:rPr lang="en-US" dirty="0">
-                <a:solidFill>
-                  <a:srgbClr val="FF0000"/>
-                </a:solidFill>
-              </a:rPr>
-              <a:t>issues</a:t>
-            </a:r>
-            <a:r>
-              <a:rPr lang="en-US" dirty="0"/>
-              <a:t> of </a:t>
-            </a:r>
-            <a:r>
-              <a:rPr lang="en-US" dirty="0">
-                <a:solidFill>
-                  <a:srgbClr val="FF0000"/>
-                </a:solidFill>
-              </a:rPr>
-              <a:t>poor</a:t>
-            </a:r>
-            <a:r>
-              <a:rPr lang="en-US" dirty="0"/>
-              <a:t> software </a:t>
-            </a:r>
-            <a:r>
-              <a:rPr lang="en-US" dirty="0">
-                <a:solidFill>
-                  <a:srgbClr val="FF0000"/>
-                </a:solidFill>
-              </a:rPr>
-              <a:t>design/implementation</a:t>
-            </a:r>
-            <a:r>
-              <a:rPr lang="en-US" dirty="0"/>
-              <a:t>. </a:t>
-            </a:r>
-          </a:p>
-          <a:p>
-            <a:r>
-              <a:rPr lang="en-US" dirty="0"/>
-              <a:t>Improve the quality of software that suffers from issues of poor software design/implementation by applying </a:t>
-            </a:r>
-            <a:r>
-              <a:rPr lang="en-US" dirty="0">
-                <a:solidFill>
-                  <a:srgbClr val="FF0000"/>
-                </a:solidFill>
-              </a:rPr>
-              <a:t>good practices</a:t>
-            </a:r>
-            <a:r>
-              <a:rPr lang="en-US" dirty="0"/>
-              <a:t>, </a:t>
-            </a:r>
-            <a:r>
-              <a:rPr lang="en-US" dirty="0">
-                <a:solidFill>
-                  <a:srgbClr val="FF0000"/>
-                </a:solidFill>
-              </a:rPr>
-              <a:t>refactoring</a:t>
-            </a:r>
-            <a:r>
-              <a:rPr lang="en-US" dirty="0"/>
-              <a:t>, </a:t>
-            </a:r>
-            <a:r>
-              <a:rPr lang="en-US" dirty="0">
-                <a:solidFill>
-                  <a:srgbClr val="FF0000"/>
-                </a:solidFill>
-              </a:rPr>
-              <a:t>patterns</a:t>
-            </a:r>
-            <a:r>
-              <a:rPr lang="en-US" dirty="0"/>
-              <a:t>.</a:t>
-            </a:r>
-          </a:p>
-        </p:txBody>
-      </p:sp>
-    </p:spTree>
-  </p:cSld>
-  <p:clrMapOvr>
-    <a:masterClrMapping/>
-  </p:clrMapOvr>
-</p:sld>
-</file>
-
-<file path=ppt/slides/slide20.xml><?xml version="1.0" encoding="utf-8"?>
+<file path=ppt/slides/slide16.xml><?xml version="1.0" encoding="utf-8"?>
 <p:sld xmlns:a="http://schemas.openxmlformats.org/drawingml/2006/main" xmlns:r="http://schemas.openxmlformats.org/officeDocument/2006/relationships" xmlns:p="http://schemas.openxmlformats.org/presentationml/2006/main" showMasterSp="0">
   <p:cSld>
     <p:spTree>
@@ -7402,7 +6485,7 @@
 </p:sld>
 </file>
 
-<file path=ppt/slides/slide21.xml><?xml version="1.0" encoding="utf-8"?>
+<file path=ppt/slides/slide17.xml><?xml version="1.0" encoding="utf-8"?>
 <p:sld xmlns:a="http://schemas.openxmlformats.org/drawingml/2006/main" xmlns:r="http://schemas.openxmlformats.org/officeDocument/2006/relationships" xmlns:p="http://schemas.openxmlformats.org/presentationml/2006/main" showMasterSp="0">
   <p:cSld>
     <p:spTree>
@@ -7668,7 +6751,7 @@
 </p:sld>
 </file>
 
-<file path=ppt/slides/slide22.xml><?xml version="1.0" encoding="utf-8"?>
+<file path=ppt/slides/slide18.xml><?xml version="1.0" encoding="utf-8"?>
 <p:sld xmlns:a="http://schemas.openxmlformats.org/drawingml/2006/main" xmlns:r="http://schemas.openxmlformats.org/officeDocument/2006/relationships" xmlns:p="http://schemas.openxmlformats.org/presentationml/2006/main" showMasterSp="0">
   <p:cSld>
     <p:spTree>
@@ -7827,7 +6910,7 @@
 </p:sld>
 </file>
 
-<file path=ppt/slides/slide23.xml><?xml version="1.0" encoding="utf-8"?>
+<file path=ppt/slides/slide19.xml><?xml version="1.0" encoding="utf-8"?>
 <p:sld xmlns:a="http://schemas.openxmlformats.org/drawingml/2006/main" xmlns:r="http://schemas.openxmlformats.org/officeDocument/2006/relationships" xmlns:p="http://schemas.openxmlformats.org/presentationml/2006/main" showMasterSp="0">
   <p:cSld>
     <p:spTree>
@@ -8090,7 +7173,162 @@
 </p:sld>
 </file>
 
-<file path=ppt/slides/slide24.xml><?xml version="1.0" encoding="utf-8"?>
+<file path=ppt/slides/slide2.xml><?xml version="1.0" encoding="utf-8"?>
+<p:sld xmlns:a="http://schemas.openxmlformats.org/drawingml/2006/main" xmlns:r="http://schemas.openxmlformats.org/officeDocument/2006/relationships" xmlns:p="http://schemas.openxmlformats.org/presentationml/2006/main" showMasterSp="0">
+  <p:cSld>
+    <p:spTree>
+      <p:nvGrpSpPr>
+        <p:cNvPr id="1" name=""/>
+        <p:cNvGrpSpPr/>
+        <p:nvPr/>
+      </p:nvGrpSpPr>
+      <p:grpSpPr>
+        <a:xfrm>
+          <a:off x="0" y="0"/>
+          <a:ext cx="0" cy="0"/>
+          <a:chOff x="0" y="0"/>
+          <a:chExt cx="0" cy="0"/>
+        </a:xfrm>
+      </p:grpSpPr>
+      <p:sp>
+        <p:nvSpPr>
+          <p:cNvPr id="2" name="Title 1"/>
+          <p:cNvSpPr>
+            <a:spLocks noGrp="1"/>
+          </p:cNvSpPr>
+          <p:nvPr>
+            <p:ph type="title"/>
+          </p:nvPr>
+        </p:nvSpPr>
+        <p:spPr/>
+        <p:txBody>
+          <a:bodyPr>
+            <a:normAutofit fontScale="90000"/>
+          </a:bodyPr>
+          <a:lstStyle/>
+          <a:p>
+            <a:r>
+              <a:rPr lang="en-US" dirty="0"/>
+              <a:t>What are the general objectives of the course?</a:t>
+            </a:r>
+            <a:endParaRPr lang="el-GR" dirty="0"/>
+          </a:p>
+        </p:txBody>
+      </p:sp>
+      <p:sp>
+        <p:nvSpPr>
+          <p:cNvPr id="3" name="Content Placeholder 2"/>
+          <p:cNvSpPr>
+            <a:spLocks noGrp="1"/>
+          </p:cNvSpPr>
+          <p:nvPr>
+            <p:ph sz="quarter" idx="1"/>
+          </p:nvPr>
+        </p:nvSpPr>
+        <p:spPr/>
+        <p:txBody>
+          <a:bodyPr>
+            <a:normAutofit/>
+          </a:bodyPr>
+          <a:lstStyle/>
+          <a:p>
+            <a:endParaRPr lang="en-US" dirty="0"/>
+          </a:p>
+          <a:p>
+            <a:r>
+              <a:rPr lang="en-US" dirty="0"/>
+              <a:t>Identify </a:t>
+            </a:r>
+            <a:r>
+              <a:rPr lang="en-US" dirty="0">
+                <a:solidFill>
+                  <a:srgbClr val="FF0000"/>
+                </a:solidFill>
+              </a:rPr>
+              <a:t>issues</a:t>
+            </a:r>
+            <a:r>
+              <a:rPr lang="en-US" dirty="0"/>
+              <a:t> of </a:t>
+            </a:r>
+            <a:r>
+              <a:rPr lang="en-US" dirty="0">
+                <a:solidFill>
+                  <a:srgbClr val="FF0000"/>
+                </a:solidFill>
+              </a:rPr>
+              <a:t>poor</a:t>
+            </a:r>
+            <a:r>
+              <a:rPr lang="en-US" dirty="0"/>
+              <a:t> software </a:t>
+            </a:r>
+            <a:r>
+              <a:rPr lang="en-US" dirty="0">
+                <a:solidFill>
+                  <a:srgbClr val="FF0000"/>
+                </a:solidFill>
+              </a:rPr>
+              <a:t>design/implementation</a:t>
+            </a:r>
+            <a:r>
+              <a:rPr lang="en-US" dirty="0"/>
+              <a:t>. </a:t>
+            </a:r>
+          </a:p>
+          <a:p>
+            <a:r>
+              <a:rPr lang="en-US" dirty="0"/>
+              <a:t>Improve the quality of software that suffers from issues of poor software design/implementation by applying </a:t>
+            </a:r>
+            <a:r>
+              <a:rPr lang="en-US" dirty="0">
+                <a:solidFill>
+                  <a:srgbClr val="FF0000"/>
+                </a:solidFill>
+              </a:rPr>
+              <a:t>good practices</a:t>
+            </a:r>
+            <a:r>
+              <a:rPr lang="en-US" dirty="0"/>
+              <a:t>, </a:t>
+            </a:r>
+            <a:r>
+              <a:rPr lang="en-US" dirty="0">
+                <a:solidFill>
+                  <a:srgbClr val="FF0000"/>
+                </a:solidFill>
+              </a:rPr>
+              <a:t>refactoring</a:t>
+            </a:r>
+            <a:r>
+              <a:rPr lang="en-US" dirty="0"/>
+              <a:t>, </a:t>
+            </a:r>
+            <a:r>
+              <a:rPr lang="en-US" dirty="0">
+                <a:solidFill>
+                  <a:srgbClr val="FF0000"/>
+                </a:solidFill>
+              </a:rPr>
+              <a:t>patterns</a:t>
+            </a:r>
+            <a:r>
+              <a:rPr lang="en-US" dirty="0"/>
+              <a:t>.</a:t>
+            </a:r>
+          </a:p>
+        </p:txBody>
+      </p:sp>
+    </p:spTree>
+  </p:cSld>
+  <p:clrMapOvr>
+    <a:masterClrMapping/>
+  </p:clrMapOvr>
+</p:sld>
+</file>
+
+<file path=ppt/slides/slide20.xml><?xml version="1.0" encoding="utf-8"?>
 <p:sld xmlns:a="http://schemas.openxmlformats.org/drawingml/2006/main" xmlns:r="http://schemas.openxmlformats.org/officeDocument/2006/relationships" xmlns:p="http://schemas.openxmlformats.org/presentationml/2006/main" showMasterSp="0">
   <p:cSld>
     <p:spTree>
@@ -8268,7 +7506,7 @@
 </p:sld>
 </file>
 
-<file path=ppt/slides/slide25.xml><?xml version="1.0" encoding="utf-8"?>
+<file path=ppt/slides/slide21.xml><?xml version="1.0" encoding="utf-8"?>
 <p:sld xmlns:a="http://schemas.openxmlformats.org/drawingml/2006/main" xmlns:r="http://schemas.openxmlformats.org/officeDocument/2006/relationships" xmlns:p="http://schemas.openxmlformats.org/presentationml/2006/main" showMasterSp="0">
   <p:cSld>
     <p:spTree>
@@ -8697,7 +7935,7 @@
             <a:pPr lvl="1"/>
             <a:r>
               <a:rPr lang="en-US" dirty="0"/>
-              <a:t>God Class</a:t>
+              <a:t>Large Class</a:t>
             </a:r>
           </a:p>
           <a:p>
@@ -9163,86 +8401,967 @@
         </p:nvSpPr>
         <p:spPr>
           <a:xfrm>
-            <a:off x="228600" y="1219200"/>
-            <a:ext cx="8915400" cy="4937760"/>
+            <a:off x="304800" y="1310640"/>
+            <a:ext cx="8534400" cy="4937760"/>
           </a:xfrm>
         </p:spPr>
         <p:txBody>
           <a:bodyPr>
-            <a:normAutofit/>
+            <a:normAutofit fontScale="77500" lnSpcReduction="20000"/>
           </a:bodyPr>
           <a:lstStyle/>
           <a:p>
-            <a:r>
-              <a:rPr lang="en-US" dirty="0">
-                <a:latin typeface="Gill Sans MT" pitchFamily="34" charset="0"/>
-              </a:rPr>
-              <a:t>We will develop a project in groups of up to 2 person.</a:t>
+            <a:pPr lvl="0"/>
+            <a:r>
+              <a:rPr lang="el-GR" dirty="0"/>
+              <a:t>The </a:t>
+            </a:r>
+            <a:r>
+              <a:rPr lang="el-GR" dirty="0" err="1"/>
+              <a:t>project</a:t>
+            </a:r>
+            <a:r>
+              <a:rPr lang="el-GR" dirty="0"/>
+              <a:t> </a:t>
+            </a:r>
+            <a:r>
+              <a:rPr lang="el-GR" dirty="0" err="1"/>
+              <a:t>will</a:t>
+            </a:r>
+            <a:r>
+              <a:rPr lang="el-GR" dirty="0"/>
+              <a:t> </a:t>
+            </a:r>
+            <a:r>
+              <a:rPr lang="el-GR" dirty="0" err="1"/>
+              <a:t>be</a:t>
+            </a:r>
+            <a:r>
+              <a:rPr lang="el-GR" dirty="0"/>
+              <a:t> </a:t>
+            </a:r>
+            <a:r>
+              <a:rPr lang="el-GR" dirty="0" err="1"/>
+              <a:t>developed</a:t>
+            </a:r>
+            <a:r>
+              <a:rPr lang="el-GR" dirty="0"/>
+              <a:t> in </a:t>
+            </a:r>
+            <a:r>
+              <a:rPr lang="el-GR" b="1" dirty="0" err="1"/>
+              <a:t>groups</a:t>
+            </a:r>
+            <a:r>
+              <a:rPr lang="el-GR" b="1" dirty="0"/>
+              <a:t> of </a:t>
+            </a:r>
+            <a:r>
+              <a:rPr lang="el-GR" b="1" dirty="0" err="1"/>
+              <a:t>up</a:t>
+            </a:r>
+            <a:r>
+              <a:rPr lang="el-GR" b="1" dirty="0"/>
+              <a:t> </a:t>
+            </a:r>
+            <a:r>
+              <a:rPr lang="el-GR" b="1" dirty="0" err="1"/>
+              <a:t>to</a:t>
+            </a:r>
+            <a:r>
+              <a:rPr lang="el-GR" b="1" dirty="0"/>
+              <a:t> 2 </a:t>
+            </a:r>
+            <a:r>
+              <a:rPr lang="el-GR" b="1" dirty="0" err="1"/>
+              <a:t>students</a:t>
+            </a:r>
+            <a:r>
+              <a:rPr lang="el-GR" dirty="0"/>
+              <a:t>.</a:t>
             </a:r>
           </a:p>
           <a:p>
             <a:pPr lvl="1"/>
             <a:r>
-              <a:rPr lang="en-US" dirty="0">
-                <a:latin typeface="Gill Sans MT" pitchFamily="34" charset="0"/>
-              </a:rPr>
-              <a:t>Review and analyze the problems of an existing software</a:t>
+              <a:rPr lang="el-GR" dirty="0" err="1">
+                <a:solidFill>
+                  <a:schemeClr val="tx1"/>
+                </a:solidFill>
+              </a:rPr>
+              <a:t>You</a:t>
+            </a:r>
+            <a:r>
+              <a:rPr lang="el-GR" dirty="0">
+                <a:solidFill>
+                  <a:schemeClr val="tx1"/>
+                </a:solidFill>
+              </a:rPr>
+              <a:t> </a:t>
+            </a:r>
+            <a:r>
+              <a:rPr lang="el-GR" dirty="0" err="1">
+                <a:solidFill>
+                  <a:schemeClr val="tx1"/>
+                </a:solidFill>
+              </a:rPr>
+              <a:t>will</a:t>
+            </a:r>
+            <a:r>
+              <a:rPr lang="el-GR" dirty="0">
+                <a:solidFill>
+                  <a:schemeClr val="tx1"/>
+                </a:solidFill>
+              </a:rPr>
+              <a:t> </a:t>
+            </a:r>
+            <a:r>
+              <a:rPr lang="el-GR" b="1" dirty="0" err="1">
+                <a:solidFill>
+                  <a:schemeClr val="tx1"/>
+                </a:solidFill>
+              </a:rPr>
+              <a:t>review</a:t>
+            </a:r>
+            <a:r>
+              <a:rPr lang="el-GR" b="1" dirty="0">
+                <a:solidFill>
+                  <a:schemeClr val="tx1"/>
+                </a:solidFill>
+              </a:rPr>
+              <a:t> and </a:t>
+            </a:r>
+            <a:r>
+              <a:rPr lang="el-GR" b="1" dirty="0" err="1">
+                <a:solidFill>
+                  <a:schemeClr val="tx1"/>
+                </a:solidFill>
+              </a:rPr>
+              <a:t>analyze</a:t>
+            </a:r>
+            <a:r>
+              <a:rPr lang="el-GR" b="1" dirty="0">
+                <a:solidFill>
+                  <a:schemeClr val="tx1"/>
+                </a:solidFill>
+              </a:rPr>
+              <a:t> </a:t>
+            </a:r>
+            <a:r>
+              <a:rPr lang="el-GR" b="1" dirty="0" err="1">
+                <a:solidFill>
+                  <a:schemeClr val="tx1"/>
+                </a:solidFill>
+              </a:rPr>
+              <a:t>an</a:t>
+            </a:r>
+            <a:r>
+              <a:rPr lang="el-GR" b="1" dirty="0">
+                <a:solidFill>
+                  <a:schemeClr val="tx1"/>
+                </a:solidFill>
+              </a:rPr>
+              <a:t> </a:t>
+            </a:r>
+            <a:r>
+              <a:rPr lang="el-GR" b="1" dirty="0" err="1">
+                <a:solidFill>
+                  <a:schemeClr val="tx1"/>
+                </a:solidFill>
+              </a:rPr>
+              <a:t>existing</a:t>
+            </a:r>
+            <a:r>
+              <a:rPr lang="el-GR" b="1" dirty="0">
+                <a:solidFill>
+                  <a:schemeClr val="tx1"/>
+                </a:solidFill>
+              </a:rPr>
+              <a:t> </a:t>
+            </a:r>
+            <a:r>
+              <a:rPr lang="el-GR" b="1" dirty="0" err="1">
+                <a:solidFill>
+                  <a:schemeClr val="tx1"/>
+                </a:solidFill>
+              </a:rPr>
+              <a:t>software</a:t>
+            </a:r>
+            <a:r>
+              <a:rPr lang="el-GR" b="1" dirty="0">
+                <a:solidFill>
+                  <a:schemeClr val="tx1"/>
+                </a:solidFill>
+              </a:rPr>
+              <a:t> </a:t>
+            </a:r>
+            <a:r>
+              <a:rPr lang="el-GR" b="1" dirty="0" err="1">
+                <a:solidFill>
+                  <a:schemeClr val="tx1"/>
+                </a:solidFill>
+              </a:rPr>
+              <a:t>system</a:t>
+            </a:r>
+            <a:r>
+              <a:rPr lang="el-GR" dirty="0">
+                <a:solidFill>
+                  <a:schemeClr val="tx1"/>
+                </a:solidFill>
+              </a:rPr>
+              <a:t>, </a:t>
+            </a:r>
+            <a:r>
+              <a:rPr lang="el-GR" dirty="0" err="1">
+                <a:solidFill>
+                  <a:schemeClr val="tx1"/>
+                </a:solidFill>
+              </a:rPr>
+              <a:t>identify</a:t>
+            </a:r>
+            <a:r>
+              <a:rPr lang="el-GR" dirty="0">
+                <a:solidFill>
+                  <a:schemeClr val="tx1"/>
+                </a:solidFill>
+              </a:rPr>
+              <a:t> </a:t>
+            </a:r>
+            <a:r>
+              <a:rPr lang="el-GR" dirty="0" err="1">
+                <a:solidFill>
+                  <a:schemeClr val="tx1"/>
+                </a:solidFill>
+              </a:rPr>
+              <a:t>its</a:t>
+            </a:r>
+            <a:r>
+              <a:rPr lang="el-GR" dirty="0">
+                <a:solidFill>
+                  <a:schemeClr val="tx1"/>
+                </a:solidFill>
+              </a:rPr>
+              <a:t> </a:t>
+            </a:r>
+            <a:r>
+              <a:rPr lang="el-GR" dirty="0" err="1">
+                <a:solidFill>
+                  <a:schemeClr val="tx1"/>
+                </a:solidFill>
+              </a:rPr>
+              <a:t>problems</a:t>
+            </a:r>
+            <a:r>
+              <a:rPr lang="el-GR" dirty="0">
+                <a:solidFill>
+                  <a:schemeClr val="tx1"/>
+                </a:solidFill>
+              </a:rPr>
+              <a:t>, and </a:t>
+            </a:r>
+            <a:r>
+              <a:rPr lang="el-GR" dirty="0" err="1">
+                <a:solidFill>
+                  <a:schemeClr val="tx1"/>
+                </a:solidFill>
+              </a:rPr>
+              <a:t>propose</a:t>
+            </a:r>
+            <a:r>
+              <a:rPr lang="el-GR" dirty="0">
+                <a:solidFill>
+                  <a:schemeClr val="tx1"/>
+                </a:solidFill>
+              </a:rPr>
+              <a:t> </a:t>
+            </a:r>
+            <a:r>
+              <a:rPr lang="el-GR" dirty="0" err="1">
+                <a:solidFill>
+                  <a:schemeClr val="tx1"/>
+                </a:solidFill>
+              </a:rPr>
+              <a:t>improvements</a:t>
+            </a:r>
+            <a:r>
+              <a:rPr lang="el-GR" dirty="0">
+                <a:solidFill>
+                  <a:schemeClr val="tx1"/>
+                </a:solidFill>
+              </a:rPr>
+              <a:t>.</a:t>
             </a:r>
           </a:p>
           <a:p>
             <a:pPr lvl="1"/>
             <a:r>
-              <a:rPr lang="en-US" dirty="0">
-                <a:latin typeface="Gill Sans MT" pitchFamily="34" charset="0"/>
-              </a:rPr>
-              <a:t>Refactoring and extension of the software</a:t>
-            </a:r>
-          </a:p>
-          <a:p>
-            <a:r>
-              <a:rPr lang="en-US" dirty="0"/>
-              <a:t>We will have a final examination at the end of the semester</a:t>
-            </a:r>
-          </a:p>
-          <a:p>
-            <a:pPr>
+              <a:rPr lang="el-GR" dirty="0" err="1">
+                <a:solidFill>
+                  <a:schemeClr val="tx1"/>
+                </a:solidFill>
+              </a:rPr>
+              <a:t>You</a:t>
+            </a:r>
+            <a:r>
+              <a:rPr lang="el-GR" dirty="0">
+                <a:solidFill>
+                  <a:schemeClr val="tx1"/>
+                </a:solidFill>
+              </a:rPr>
+              <a:t> </a:t>
+            </a:r>
+            <a:r>
+              <a:rPr lang="el-GR" dirty="0" err="1">
+                <a:solidFill>
+                  <a:schemeClr val="tx1"/>
+                </a:solidFill>
+              </a:rPr>
+              <a:t>will</a:t>
+            </a:r>
+            <a:r>
+              <a:rPr lang="el-GR" dirty="0">
+                <a:solidFill>
+                  <a:schemeClr val="tx1"/>
+                </a:solidFill>
+              </a:rPr>
+              <a:t> </a:t>
+            </a:r>
+            <a:r>
+              <a:rPr lang="el-GR" b="1" dirty="0" err="1">
+                <a:solidFill>
+                  <a:schemeClr val="tx1"/>
+                </a:solidFill>
+              </a:rPr>
+              <a:t>refactor</a:t>
+            </a:r>
+            <a:r>
+              <a:rPr lang="el-GR" b="1" dirty="0">
+                <a:solidFill>
+                  <a:schemeClr val="tx1"/>
+                </a:solidFill>
+              </a:rPr>
+              <a:t> and </a:t>
+            </a:r>
+            <a:r>
+              <a:rPr lang="el-GR" b="1" dirty="0" err="1">
+                <a:solidFill>
+                  <a:schemeClr val="tx1"/>
+                </a:solidFill>
+              </a:rPr>
+              <a:t>extend</a:t>
+            </a:r>
+            <a:r>
+              <a:rPr lang="el-GR" dirty="0">
+                <a:solidFill>
+                  <a:schemeClr val="tx1"/>
+                </a:solidFill>
+              </a:rPr>
+              <a:t> the </a:t>
+            </a:r>
+            <a:r>
+              <a:rPr lang="el-GR" dirty="0" err="1">
+                <a:solidFill>
+                  <a:schemeClr val="tx1"/>
+                </a:solidFill>
+              </a:rPr>
+              <a:t>software</a:t>
+            </a:r>
+            <a:r>
+              <a:rPr lang="el-GR" dirty="0">
+                <a:solidFill>
+                  <a:schemeClr val="tx1"/>
+                </a:solidFill>
+              </a:rPr>
+              <a:t>.</a:t>
+            </a:r>
+          </a:p>
+          <a:p>
+            <a:pPr marL="0" indent="0">
               <a:buNone/>
             </a:pPr>
             <a:endParaRPr lang="en-US" dirty="0"/>
           </a:p>
           <a:p>
             <a:r>
+              <a:rPr lang="el-GR" dirty="0" err="1"/>
+              <a:t>There</a:t>
+            </a:r>
+            <a:r>
+              <a:rPr lang="el-GR" dirty="0"/>
+              <a:t> </a:t>
+            </a:r>
+            <a:r>
+              <a:rPr lang="el-GR" dirty="0" err="1"/>
+              <a:t>will</a:t>
+            </a:r>
+            <a:r>
+              <a:rPr lang="el-GR" dirty="0"/>
+              <a:t> </a:t>
+            </a:r>
+            <a:r>
+              <a:rPr lang="el-GR" dirty="0" err="1"/>
+              <a:t>be</a:t>
+            </a:r>
+            <a:r>
+              <a:rPr lang="el-GR" dirty="0"/>
+              <a:t> a </a:t>
+            </a:r>
+            <a:r>
+              <a:rPr lang="el-GR" b="1" dirty="0" err="1"/>
+              <a:t>final</a:t>
+            </a:r>
+            <a:r>
+              <a:rPr lang="el-GR" b="1" dirty="0"/>
+              <a:t> </a:t>
+            </a:r>
+            <a:r>
+              <a:rPr lang="el-GR" b="1" dirty="0" err="1"/>
+              <a:t>examination</a:t>
+            </a:r>
+            <a:r>
+              <a:rPr lang="el-GR" dirty="0"/>
+              <a:t> </a:t>
+            </a:r>
+            <a:r>
+              <a:rPr lang="el-GR" dirty="0" err="1"/>
+              <a:t>at</a:t>
+            </a:r>
+            <a:r>
+              <a:rPr lang="el-GR" dirty="0"/>
+              <a:t> the </a:t>
+            </a:r>
+            <a:r>
+              <a:rPr lang="el-GR" dirty="0" err="1"/>
+              <a:t>end</a:t>
+            </a:r>
+            <a:r>
+              <a:rPr lang="el-GR" dirty="0"/>
+              <a:t> of the </a:t>
+            </a:r>
+            <a:r>
+              <a:rPr lang="el-GR" dirty="0" err="1"/>
+              <a:t>semester</a:t>
+            </a:r>
+            <a:r>
+              <a:rPr lang="el-GR" dirty="0"/>
+              <a:t>.</a:t>
+            </a:r>
+          </a:p>
+          <a:p>
+            <a:pPr lvl="0"/>
+            <a:endParaRPr lang="en-US" b="1" dirty="0"/>
+          </a:p>
+          <a:p>
+            <a:pPr lvl="0"/>
+            <a:r>
+              <a:rPr lang="el-GR" b="1" dirty="0"/>
+              <a:t>Project </a:t>
+            </a:r>
+            <a:r>
+              <a:rPr lang="el-GR" b="1" dirty="0" err="1"/>
+              <a:t>grades</a:t>
+            </a:r>
+            <a:r>
+              <a:rPr lang="el-GR" b="1" dirty="0"/>
+              <a:t> </a:t>
+            </a:r>
+            <a:r>
+              <a:rPr lang="el-GR" b="1" dirty="0" err="1"/>
+              <a:t>from</a:t>
+            </a:r>
+            <a:r>
+              <a:rPr lang="el-GR" b="1" dirty="0"/>
+              <a:t> </a:t>
+            </a:r>
+            <a:r>
+              <a:rPr lang="el-GR" b="1" dirty="0" err="1"/>
+              <a:t>previous</a:t>
+            </a:r>
+            <a:r>
+              <a:rPr lang="el-GR" b="1" dirty="0"/>
+              <a:t> </a:t>
+            </a:r>
+            <a:r>
+              <a:rPr lang="el-GR" b="1" dirty="0" err="1"/>
+              <a:t>years</a:t>
+            </a:r>
+            <a:r>
+              <a:rPr lang="el-GR" b="1" dirty="0"/>
+              <a:t> </a:t>
+            </a:r>
+            <a:r>
+              <a:rPr lang="el-GR" b="1" dirty="0" err="1"/>
+              <a:t>do</a:t>
+            </a:r>
+            <a:r>
+              <a:rPr lang="el-GR" b="1" dirty="0"/>
+              <a:t> </a:t>
+            </a:r>
+            <a:r>
+              <a:rPr lang="el-GR" b="1" dirty="0" err="1"/>
+              <a:t>not</a:t>
+            </a:r>
+            <a:r>
+              <a:rPr lang="el-GR" b="1" dirty="0"/>
+              <a:t> </a:t>
+            </a:r>
+            <a:r>
+              <a:rPr lang="el-GR" b="1" dirty="0" err="1"/>
+              <a:t>count</a:t>
+            </a:r>
+            <a:r>
+              <a:rPr lang="el-GR" dirty="0"/>
+              <a:t>.</a:t>
+            </a:r>
+            <a:r>
               <a:rPr lang="en-US" dirty="0"/>
-              <a:t>Final Grade</a:t>
-            </a:r>
+              <a:t> Students who submitted a </a:t>
+            </a:r>
+            <a:r>
+              <a:rPr lang="en-US" b="1" dirty="0">
+                <a:solidFill>
+                  <a:srgbClr val="FF0000"/>
+                </a:solidFill>
+              </a:rPr>
+              <a:t>project the years 2014 to 2026 </a:t>
+            </a:r>
+            <a:r>
+              <a:rPr lang="en-US" dirty="0"/>
+              <a:t>will be graded only based on their </a:t>
+            </a:r>
+            <a:r>
+              <a:rPr lang="en-US" b="1" dirty="0">
+                <a:solidFill>
+                  <a:srgbClr val="FF0000"/>
+                </a:solidFill>
+              </a:rPr>
+              <a:t>final exam.</a:t>
+            </a:r>
+            <a:r>
+              <a:rPr lang="en-US" dirty="0"/>
+              <a:t> </a:t>
+            </a:r>
+            <a:endParaRPr lang="el-GR" dirty="0"/>
+          </a:p>
+          <a:p>
+            <a:endParaRPr lang="en-US" b="1" dirty="0"/>
+          </a:p>
+          <a:p>
+            <a:r>
+              <a:rPr lang="en-US" b="1" dirty="0"/>
+              <a:t>For this year</a:t>
+            </a:r>
+            <a:endParaRPr lang="el-GR" b="1" dirty="0"/>
           </a:p>
           <a:p>
             <a:pPr lvl="1"/>
             <a:r>
-              <a:rPr lang="en-US" dirty="0"/>
-              <a:t>if (exam &gt;= 5 and project &gt;=5) then </a:t>
+              <a:rPr lang="el-GR" sz="2400" dirty="0" err="1">
+                <a:solidFill>
+                  <a:schemeClr val="tx1"/>
+                </a:solidFill>
+              </a:rPr>
+              <a:t>If</a:t>
+            </a:r>
+            <a:r>
+              <a:rPr lang="el-GR" sz="2400" dirty="0">
+                <a:solidFill>
+                  <a:schemeClr val="tx1"/>
+                </a:solidFill>
+              </a:rPr>
+              <a:t> the </a:t>
+            </a:r>
+            <a:r>
+              <a:rPr lang="el-GR" sz="2400" b="1" dirty="0" err="1">
+                <a:solidFill>
+                  <a:schemeClr val="tx1"/>
+                </a:solidFill>
+              </a:rPr>
+              <a:t>exam</a:t>
+            </a:r>
+            <a:r>
+              <a:rPr lang="el-GR" sz="2400" b="1" dirty="0">
+                <a:solidFill>
+                  <a:schemeClr val="tx1"/>
+                </a:solidFill>
+              </a:rPr>
+              <a:t> </a:t>
+            </a:r>
+            <a:r>
+              <a:rPr lang="el-GR" sz="2400" b="1" dirty="0" err="1">
+                <a:solidFill>
+                  <a:schemeClr val="tx1"/>
+                </a:solidFill>
+              </a:rPr>
+              <a:t>grade</a:t>
+            </a:r>
+            <a:r>
+              <a:rPr lang="el-GR" sz="2400" b="1" dirty="0">
+                <a:solidFill>
+                  <a:schemeClr val="tx1"/>
+                </a:solidFill>
+              </a:rPr>
+              <a:t> </a:t>
+            </a:r>
+            <a:r>
+              <a:rPr lang="el-GR" sz="2400" b="1" dirty="0" err="1">
+                <a:solidFill>
+                  <a:schemeClr val="tx1"/>
+                </a:solidFill>
+              </a:rPr>
+              <a:t>is</a:t>
+            </a:r>
+            <a:r>
+              <a:rPr lang="el-GR" sz="2400" b="1" dirty="0">
+                <a:solidFill>
+                  <a:schemeClr val="tx1"/>
+                </a:solidFill>
+              </a:rPr>
+              <a:t> </a:t>
+            </a:r>
+            <a:r>
+              <a:rPr lang="el-GR" sz="2400" b="1" dirty="0" err="1">
+                <a:solidFill>
+                  <a:schemeClr val="tx1"/>
+                </a:solidFill>
+              </a:rPr>
+              <a:t>at</a:t>
+            </a:r>
+            <a:r>
+              <a:rPr lang="el-GR" sz="2400" b="1" dirty="0">
+                <a:solidFill>
+                  <a:schemeClr val="tx1"/>
+                </a:solidFill>
+              </a:rPr>
+              <a:t> </a:t>
+            </a:r>
+            <a:r>
+              <a:rPr lang="el-GR" sz="2400" b="1" dirty="0" err="1">
+                <a:solidFill>
+                  <a:schemeClr val="tx1"/>
+                </a:solidFill>
+              </a:rPr>
+              <a:t>least</a:t>
+            </a:r>
+            <a:r>
+              <a:rPr lang="el-GR" sz="2400" b="1" dirty="0">
+                <a:solidFill>
+                  <a:schemeClr val="tx1"/>
+                </a:solidFill>
+              </a:rPr>
+              <a:t> 5</a:t>
+            </a:r>
+            <a:r>
+              <a:rPr lang="el-GR" sz="2400" dirty="0">
+                <a:solidFill>
+                  <a:schemeClr val="tx1"/>
+                </a:solidFill>
+              </a:rPr>
+              <a:t>:</a:t>
             </a:r>
           </a:p>
           <a:p>
             <a:pPr lvl="2"/>
             <a:r>
-              <a:rPr lang="en-US" dirty="0"/>
-              <a:t>grade = 0.7 * exam + 0.3 * project</a:t>
-            </a:r>
+              <a:rPr lang="el-GR" sz="2400" b="1" dirty="0" err="1">
+                <a:solidFill>
+                  <a:schemeClr val="tx1"/>
+                </a:solidFill>
+              </a:rPr>
+              <a:t>Final</a:t>
+            </a:r>
+            <a:r>
+              <a:rPr lang="el-GR" sz="2400" b="1" dirty="0">
+                <a:solidFill>
+                  <a:schemeClr val="tx1"/>
+                </a:solidFill>
+              </a:rPr>
+              <a:t> </a:t>
+            </a:r>
+            <a:r>
+              <a:rPr lang="el-GR" sz="2400" b="1" dirty="0" err="1">
+                <a:solidFill>
+                  <a:schemeClr val="tx1"/>
+                </a:solidFill>
+              </a:rPr>
+              <a:t>Grade</a:t>
+            </a:r>
+            <a:r>
+              <a:rPr lang="el-GR" sz="2400" b="1" dirty="0">
+                <a:solidFill>
+                  <a:schemeClr val="tx1"/>
+                </a:solidFill>
+              </a:rPr>
+              <a:t> = 0.</a:t>
+            </a:r>
+            <a:r>
+              <a:rPr lang="en-US" sz="2400" b="1" dirty="0"/>
+              <a:t>80</a:t>
+            </a:r>
+            <a:r>
+              <a:rPr lang="el-GR" sz="2400" b="1" dirty="0">
+                <a:solidFill>
+                  <a:schemeClr val="tx1"/>
+                </a:solidFill>
+              </a:rPr>
+              <a:t> × </a:t>
+            </a:r>
+            <a:r>
+              <a:rPr lang="el-GR" sz="2400" b="1" dirty="0" err="1">
+                <a:solidFill>
+                  <a:schemeClr val="tx1"/>
+                </a:solidFill>
+              </a:rPr>
+              <a:t>Exam</a:t>
+            </a:r>
+            <a:r>
+              <a:rPr lang="el-GR" sz="2400" b="1" dirty="0">
+                <a:solidFill>
+                  <a:schemeClr val="tx1"/>
+                </a:solidFill>
+              </a:rPr>
+              <a:t> </a:t>
+            </a:r>
+            <a:r>
+              <a:rPr lang="el-GR" sz="2400" b="1" dirty="0" err="1">
+                <a:solidFill>
+                  <a:schemeClr val="tx1"/>
+                </a:solidFill>
+              </a:rPr>
+              <a:t>Grade</a:t>
+            </a:r>
+            <a:r>
+              <a:rPr lang="el-GR" sz="2400" b="1" dirty="0">
+                <a:solidFill>
+                  <a:schemeClr val="tx1"/>
+                </a:solidFill>
+              </a:rPr>
+              <a:t> + 0.</a:t>
+            </a:r>
+            <a:r>
+              <a:rPr lang="en-US" sz="2400" b="1" dirty="0">
+                <a:solidFill>
+                  <a:schemeClr val="tx1"/>
+                </a:solidFill>
+              </a:rPr>
+              <a:t>20</a:t>
+            </a:r>
+            <a:r>
+              <a:rPr lang="el-GR" sz="2400" b="1" dirty="0">
+                <a:solidFill>
+                  <a:schemeClr val="tx1"/>
+                </a:solidFill>
+              </a:rPr>
+              <a:t> × Project </a:t>
+            </a:r>
+            <a:r>
+              <a:rPr lang="el-GR" sz="2400" b="1" dirty="0" err="1">
+                <a:solidFill>
+                  <a:schemeClr val="tx1"/>
+                </a:solidFill>
+              </a:rPr>
+              <a:t>Grade</a:t>
+            </a:r>
+            <a:endParaRPr lang="el-GR" sz="2400" dirty="0">
+              <a:solidFill>
+                <a:schemeClr val="tx1"/>
+              </a:solidFill>
+            </a:endParaRPr>
           </a:p>
           <a:p>
             <a:pPr lvl="1"/>
             <a:r>
-              <a:rPr lang="en-US" dirty="0"/>
-              <a:t>else</a:t>
+              <a:rPr lang="el-GR" sz="2400" dirty="0" err="1">
+                <a:solidFill>
+                  <a:schemeClr val="tx1"/>
+                </a:solidFill>
+              </a:rPr>
+              <a:t>If</a:t>
+            </a:r>
+            <a:r>
+              <a:rPr lang="el-GR" sz="2400" dirty="0">
+                <a:solidFill>
+                  <a:schemeClr val="tx1"/>
+                </a:solidFill>
+              </a:rPr>
+              <a:t> the </a:t>
+            </a:r>
+            <a:r>
+              <a:rPr lang="el-GR" sz="2400" b="1" dirty="0" err="1">
+                <a:solidFill>
+                  <a:schemeClr val="tx1"/>
+                </a:solidFill>
+              </a:rPr>
+              <a:t>exam</a:t>
+            </a:r>
+            <a:r>
+              <a:rPr lang="el-GR" sz="2400" b="1" dirty="0">
+                <a:solidFill>
+                  <a:schemeClr val="tx1"/>
+                </a:solidFill>
+              </a:rPr>
+              <a:t> </a:t>
+            </a:r>
+            <a:r>
+              <a:rPr lang="el-GR" sz="2400" b="1" dirty="0" err="1">
+                <a:solidFill>
+                  <a:schemeClr val="tx1"/>
+                </a:solidFill>
+              </a:rPr>
+              <a:t>grade</a:t>
+            </a:r>
+            <a:r>
+              <a:rPr lang="el-GR" sz="2400" b="1" dirty="0">
+                <a:solidFill>
+                  <a:schemeClr val="tx1"/>
+                </a:solidFill>
+              </a:rPr>
+              <a:t> </a:t>
+            </a:r>
+            <a:r>
+              <a:rPr lang="el-GR" sz="2400" b="1" dirty="0" err="1">
+                <a:solidFill>
+                  <a:schemeClr val="tx1"/>
+                </a:solidFill>
+              </a:rPr>
+              <a:t>is</a:t>
+            </a:r>
+            <a:r>
+              <a:rPr lang="el-GR" sz="2400" b="1" dirty="0">
+                <a:solidFill>
+                  <a:schemeClr val="tx1"/>
+                </a:solidFill>
+              </a:rPr>
+              <a:t> </a:t>
+            </a:r>
+            <a:r>
+              <a:rPr lang="el-GR" sz="2400" b="1" dirty="0" err="1">
+                <a:solidFill>
+                  <a:schemeClr val="tx1"/>
+                </a:solidFill>
+              </a:rPr>
+              <a:t>below</a:t>
+            </a:r>
+            <a:r>
+              <a:rPr lang="el-GR" sz="2400" b="1" dirty="0">
+                <a:solidFill>
+                  <a:schemeClr val="tx1"/>
+                </a:solidFill>
+              </a:rPr>
+              <a:t> 5</a:t>
+            </a:r>
+            <a:r>
+              <a:rPr lang="el-GR" sz="2400" dirty="0">
+                <a:solidFill>
+                  <a:schemeClr val="tx1"/>
+                </a:solidFill>
+              </a:rPr>
+              <a:t>:</a:t>
             </a:r>
           </a:p>
           <a:p>
             <a:pPr lvl="2"/>
             <a:r>
-              <a:rPr lang="en-US" dirty="0"/>
-              <a:t>grade = min(exam, project)</a:t>
-            </a:r>
+              <a:rPr lang="el-GR" sz="2400" b="1" dirty="0" err="1">
+                <a:solidFill>
+                  <a:schemeClr val="tx1"/>
+                </a:solidFill>
+              </a:rPr>
+              <a:t>Final</a:t>
+            </a:r>
+            <a:r>
+              <a:rPr lang="el-GR" sz="2400" b="1" dirty="0">
+                <a:solidFill>
+                  <a:schemeClr val="tx1"/>
+                </a:solidFill>
+              </a:rPr>
+              <a:t> </a:t>
+            </a:r>
+            <a:r>
+              <a:rPr lang="el-GR" sz="2400" b="1" dirty="0" err="1">
+                <a:solidFill>
+                  <a:schemeClr val="tx1"/>
+                </a:solidFill>
+              </a:rPr>
+              <a:t>Grade</a:t>
+            </a:r>
+            <a:r>
+              <a:rPr lang="el-GR" sz="2400" b="1" dirty="0">
+                <a:solidFill>
+                  <a:schemeClr val="tx1"/>
+                </a:solidFill>
+              </a:rPr>
+              <a:t> = </a:t>
+            </a:r>
+            <a:r>
+              <a:rPr lang="el-GR" sz="2400" b="1" dirty="0" err="1">
+                <a:solidFill>
+                  <a:schemeClr val="tx1"/>
+                </a:solidFill>
+              </a:rPr>
+              <a:t>min</a:t>
+            </a:r>
+            <a:r>
+              <a:rPr lang="el-GR" sz="2400" b="1" dirty="0">
+                <a:solidFill>
+                  <a:schemeClr val="tx1"/>
+                </a:solidFill>
+              </a:rPr>
+              <a:t>(</a:t>
+            </a:r>
+            <a:r>
+              <a:rPr lang="el-GR" sz="2400" b="1" dirty="0" err="1">
+                <a:solidFill>
+                  <a:schemeClr val="tx1"/>
+                </a:solidFill>
+              </a:rPr>
+              <a:t>Exam</a:t>
+            </a:r>
+            <a:r>
+              <a:rPr lang="el-GR" sz="2400" b="1" dirty="0">
+                <a:solidFill>
+                  <a:schemeClr val="tx1"/>
+                </a:solidFill>
+              </a:rPr>
+              <a:t> </a:t>
+            </a:r>
+            <a:r>
+              <a:rPr lang="el-GR" sz="2400" b="1" dirty="0" err="1">
+                <a:solidFill>
+                  <a:schemeClr val="tx1"/>
+                </a:solidFill>
+              </a:rPr>
+              <a:t>Grade</a:t>
+            </a:r>
+            <a:r>
+              <a:rPr lang="el-GR" sz="2400" b="1" dirty="0">
+                <a:solidFill>
+                  <a:schemeClr val="tx1"/>
+                </a:solidFill>
+              </a:rPr>
+              <a:t>, Project </a:t>
+            </a:r>
+            <a:r>
+              <a:rPr lang="el-GR" sz="2400" b="1" dirty="0" err="1">
+                <a:solidFill>
+                  <a:schemeClr val="tx1"/>
+                </a:solidFill>
+              </a:rPr>
+              <a:t>Grade</a:t>
+            </a:r>
+            <a:r>
+              <a:rPr lang="el-GR" sz="2400" b="1" dirty="0">
+                <a:solidFill>
+                  <a:schemeClr val="tx1"/>
+                </a:solidFill>
+              </a:rPr>
+              <a:t>)</a:t>
+            </a:r>
+            <a:endParaRPr lang="el-GR" sz="2400" dirty="0">
+              <a:solidFill>
+                <a:schemeClr val="tx1"/>
+              </a:solidFill>
+            </a:endParaRPr>
           </a:p>
           <a:p>
             <a:endParaRPr lang="el-GR" dirty="0"/>
@@ -9496,7 +9615,7 @@
         <p:spPr>
           <a:xfrm>
             <a:off x="457200" y="2590800"/>
-            <a:ext cx="5334000" cy="830997"/>
+            <a:ext cx="8153400" cy="3816429"/>
           </a:xfrm>
           <a:prstGeom prst="rect">
             <a:avLst/>
@@ -9512,11 +9631,132 @@
             <a:r>
               <a:rPr lang="en-US" sz="2400" dirty="0">
                 <a:solidFill>
+                  <a:srgbClr val="0070C0"/>
+                </a:solidFill>
+              </a:rPr>
+              <a:t>A managerial solution:</a:t>
+            </a:r>
+            <a:r>
+              <a:rPr lang="en-US" sz="2400" dirty="0">
+                <a:solidFill>
                   <a:srgbClr val="FF0000"/>
                 </a:solidFill>
               </a:rPr>
-              <a:t>What would you do If you were the manager of such project ??</a:t>
-            </a:r>
+              <a:t> </a:t>
+            </a:r>
+          </a:p>
+          <a:p>
+            <a:pPr algn="just"/>
+            <a:endParaRPr lang="en-US" dirty="0">
+              <a:solidFill>
+                <a:srgbClr val="FF0000"/>
+              </a:solidFill>
+            </a:endParaRPr>
+          </a:p>
+          <a:p>
+            <a:pPr algn="just"/>
+            <a:r>
+              <a:rPr lang="en-US" sz="2000" dirty="0"/>
+              <a:t>As </a:t>
+            </a:r>
+            <a:r>
+              <a:rPr lang="en-US" sz="2000" dirty="0">
+                <a:solidFill>
+                  <a:srgbClr val="FF0000"/>
+                </a:solidFill>
+              </a:rPr>
+              <a:t>productivity decreases</a:t>
+            </a:r>
+            <a:r>
+              <a:rPr lang="en-US" sz="2000" dirty="0"/>
+              <a:t>, management does the only thing they can; they </a:t>
+            </a:r>
+            <a:r>
+              <a:rPr lang="en-US" sz="2000" dirty="0">
+                <a:solidFill>
+                  <a:srgbClr val="FF0000"/>
+                </a:solidFill>
+              </a:rPr>
+              <a:t>add more staff to the project </a:t>
+            </a:r>
+            <a:r>
+              <a:rPr lang="en-US" sz="2000" dirty="0"/>
+              <a:t>in hopes of increasing productivity. </a:t>
+            </a:r>
+          </a:p>
+          <a:p>
+            <a:pPr algn="just"/>
+            <a:endParaRPr lang="en-US" sz="2000" dirty="0"/>
+          </a:p>
+          <a:p>
+            <a:pPr algn="just"/>
+            <a:r>
+              <a:rPr lang="en-US" sz="2000" dirty="0"/>
+              <a:t>But that </a:t>
+            </a:r>
+            <a:r>
+              <a:rPr lang="en-US" sz="2000" dirty="0">
+                <a:solidFill>
+                  <a:srgbClr val="FF0000"/>
+                </a:solidFill>
+              </a:rPr>
+              <a:t>new staff is not versed in the design of the system</a:t>
+            </a:r>
+            <a:r>
+              <a:rPr lang="en-US" sz="2000" dirty="0"/>
+              <a:t>. </a:t>
+            </a:r>
+          </a:p>
+          <a:p>
+            <a:pPr algn="just"/>
+            <a:endParaRPr lang="en-US" sz="2000" dirty="0"/>
+          </a:p>
+          <a:p>
+            <a:pPr algn="just"/>
+            <a:r>
+              <a:rPr lang="en-US" sz="2000" dirty="0"/>
+              <a:t>They, and everyone else on the team, are under horrific </a:t>
+            </a:r>
+            <a:r>
+              <a:rPr lang="en-US" sz="2000" b="1" dirty="0">
+                <a:solidFill>
+                  <a:srgbClr val="FF0000"/>
+                </a:solidFill>
+              </a:rPr>
+              <a:t>pressure to increase productivity</a:t>
+            </a:r>
+            <a:r>
+              <a:rPr lang="en-US" sz="2000" b="1" dirty="0"/>
+              <a:t>.</a:t>
+            </a:r>
+            <a:r>
+              <a:rPr lang="en-US" sz="2000" dirty="0"/>
+              <a:t> </a:t>
+            </a:r>
+          </a:p>
+          <a:p>
+            <a:pPr algn="just"/>
+            <a:endParaRPr lang="en-US" sz="2000" dirty="0"/>
+          </a:p>
+          <a:p>
+            <a:pPr algn="just"/>
+            <a:r>
+              <a:rPr lang="en-US" sz="2000" dirty="0"/>
+              <a:t>So they all make </a:t>
+            </a:r>
+            <a:r>
+              <a:rPr lang="en-US" sz="2000" dirty="0">
+                <a:solidFill>
+                  <a:srgbClr val="FF0000"/>
+                </a:solidFill>
+              </a:rPr>
+              <a:t>more and more messes (!!!!!)</a:t>
+            </a:r>
+            <a:r>
+              <a:rPr lang="en-US" sz="2000" dirty="0"/>
+              <a:t>, driving the productivity ever further toward zero.</a:t>
+            </a:r>
+            <a:endParaRPr lang="el-GR" sz="2000" dirty="0"/>
           </a:p>
         </p:txBody>
       </p:sp>
@@ -9608,8 +9848,8 @@
         </p:nvSpPr>
         <p:spPr>
           <a:xfrm>
-            <a:off x="457200" y="2590800"/>
-            <a:ext cx="8153400" cy="1938992"/>
+            <a:off x="381000" y="2362200"/>
+            <a:ext cx="8534400" cy="3293209"/>
           </a:xfrm>
           <a:prstGeom prst="rect">
             <a:avLst/>
@@ -9628,7 +9868,7 @@
                   <a:srgbClr val="0070C0"/>
                 </a:solidFill>
               </a:rPr>
-              <a:t>A managerial solution:</a:t>
+              <a:t>A technical solution:</a:t>
             </a:r>
             <a:r>
               <a:rPr lang="en-US" sz="2400" dirty="0">
@@ -9641,7 +9881,7 @@
           </a:p>
           <a:p>
             <a:pPr algn="just"/>
-            <a:endParaRPr lang="en-US" dirty="0">
+            <a:endParaRPr lang="en-US" sz="2400" dirty="0">
               <a:solidFill>
                 <a:srgbClr val="FF0000"/>
               </a:solidFill>
@@ -9651,7 +9891,7 @@
             <a:pPr algn="just"/>
             <a:r>
               <a:rPr lang="en-US" sz="2000" dirty="0"/>
-              <a:t>As productivity decreases, management does the only thing they can; they </a:t>
+              <a:t>Eventually the team rebels. They demand a </a:t>
             </a:r>
             <a:r>
               <a:rPr lang="en-US" sz="2000" dirty="0">
@@ -9659,20 +9899,45 @@
                   <a:srgbClr val="FF0000"/>
                 </a:solidFill>
               </a:rPr>
-              <a:t>add more staff to the project </a:t>
-            </a:r>
-            <a:r>
-              <a:rPr lang="en-US" sz="2000"/>
-              <a:t>in hope </a:t>
+              <a:t>redesign</a:t>
             </a:r>
             <a:r>
               <a:rPr lang="en-US" sz="2000" dirty="0"/>
-              <a:t>of increasing productivity. </a:t>
-            </a:r>
+              <a:t>.  Management eventually bend to the demands of the developers and authorize the grand redesign in the sky.</a:t>
+            </a:r>
+          </a:p>
+          <a:p>
+            <a:endParaRPr lang="en-US" sz="2000" dirty="0"/>
           </a:p>
           <a:p>
             <a:pPr algn="just"/>
-            <a:endParaRPr lang="en-US" dirty="0"/>
+            <a:r>
+              <a:rPr lang="en-US" sz="2000" dirty="0"/>
+              <a:t>A </a:t>
+            </a:r>
+            <a:r>
+              <a:rPr lang="en-US" sz="2000" dirty="0">
+                <a:solidFill>
+                  <a:srgbClr val="FF0000"/>
+                </a:solidFill>
+              </a:rPr>
+              <a:t>new tiger team </a:t>
+            </a:r>
+            <a:r>
+              <a:rPr lang="en-US" sz="2000" dirty="0"/>
+              <a:t>is selected. Everyone else must continue to maintain the </a:t>
+            </a:r>
+            <a:r>
+              <a:rPr lang="fr-FR" sz="2000" dirty="0" err="1"/>
+              <a:t>current</a:t>
+            </a:r>
+            <a:r>
+              <a:rPr lang="fr-FR" sz="2000" dirty="0"/>
+              <a:t> system.</a:t>
+            </a:r>
+          </a:p>
+          <a:p>
+            <a:endParaRPr lang="fr-FR" sz="2000" dirty="0"/>
           </a:p>
           <a:p>
             <a:pPr algn="just"/>
@@ -9696,7 +9961,7 @@
           <p:nvPr/>
         </p:nvPicPr>
         <p:blipFill>
-          <a:blip r:embed="rId2" cstate="print"/>
+          <a:blip r:embed="rId3" cstate="print"/>
           <a:srcRect/>
           <a:stretch>
             <a:fillRect/>
